--- a/docs/paytm-stage1/MerchantLens-Paytm-Stage1.pptx
+++ b/docs/paytm-stage1/MerchantLens-Paytm-Stage1.pptx
@@ -2,19 +2,19 @@
 <file path=ppt/presentation.xml><?xml version="1.0" encoding="utf-8"?>
 <p:presentation xmlns:p="http://schemas.openxmlformats.org/presentationml/2006/main">
   <p:sldMasterIdLst>
-    <p:sldMasterId xmlns:r="http://schemas.openxmlformats.org/officeDocument/2006/relationships" id="2147483648" r:id="R206b3178b4a8466b"/>
+    <p:sldMasterId xmlns:r="http://schemas.openxmlformats.org/officeDocument/2006/relationships" id="2147483648" r:id="R93892ea777564a80"/>
   </p:sldMasterIdLst>
   <p:notesMasterIdLst>
-    <p:notesMasterId xmlns:r="http://schemas.openxmlformats.org/officeDocument/2006/relationships" r:id="R029eae8762f14f9c"/>
+    <p:notesMasterId xmlns:r="http://schemas.openxmlformats.org/officeDocument/2006/relationships" r:id="R393a717c7d804345"/>
   </p:notesMasterIdLst>
   <p:sldIdLst>
-    <p:sldId xmlns:r="http://schemas.openxmlformats.org/officeDocument/2006/relationships" id="256" r:id="R0b8bee6ae1914862"/>
-    <p:sldId xmlns:r="http://schemas.openxmlformats.org/officeDocument/2006/relationships" id="257" r:id="R0409ed2ccea14fce"/>
-    <p:sldId xmlns:r="http://schemas.openxmlformats.org/officeDocument/2006/relationships" id="258" r:id="R201b2f00c05147e5"/>
-    <p:sldId xmlns:r="http://schemas.openxmlformats.org/officeDocument/2006/relationships" id="259" r:id="R1e2d246179854d90"/>
-    <p:sldId xmlns:r="http://schemas.openxmlformats.org/officeDocument/2006/relationships" id="260" r:id="R0d2c750793a244e6"/>
-    <p:sldId xmlns:r="http://schemas.openxmlformats.org/officeDocument/2006/relationships" id="261" r:id="R96115d00a4ea42b1"/>
-    <p:sldId xmlns:r="http://schemas.openxmlformats.org/officeDocument/2006/relationships" id="262" r:id="Rca7e932b3ec645c3"/>
+    <p:sldId xmlns:r="http://schemas.openxmlformats.org/officeDocument/2006/relationships" id="256" r:id="Red64a13642ba49e1"/>
+    <p:sldId xmlns:r="http://schemas.openxmlformats.org/officeDocument/2006/relationships" id="257" r:id="Ra6f5a454c1024a5f"/>
+    <p:sldId xmlns:r="http://schemas.openxmlformats.org/officeDocument/2006/relationships" id="258" r:id="R13de6dbf169e4838"/>
+    <p:sldId xmlns:r="http://schemas.openxmlformats.org/officeDocument/2006/relationships" id="259" r:id="Rb907389b7c4c4792"/>
+    <p:sldId xmlns:r="http://schemas.openxmlformats.org/officeDocument/2006/relationships" id="260" r:id="Rfe72e34a76cf42f4"/>
+    <p:sldId xmlns:r="http://schemas.openxmlformats.org/officeDocument/2006/relationships" id="261" r:id="R4aac2e0b9b6f4595"/>
+    <p:sldId xmlns:r="http://schemas.openxmlformats.org/officeDocument/2006/relationships" id="262" r:id="Rf6cfbd9947e74428"/>
   </p:sldIdLst>
   <p:sldSz cx="12192000" cy="6858000"/>
   <p:notesSz cx="6858000" cy="9144000"/>
@@ -3311,12 +3311,12 @@
   </p:cSld>
   <p:clrMap bg1="lt1" tx1="dk1" bg2="lt2" tx2="dk2" accent1="accent1" accent2="accent2" accent3="accent3" accent4="accent4" accent5="accent5" accent6="accent6" hlink="hlink" folHlink="folHlink"/>
   <p:sldLayoutIdLst>
-    <p:sldLayoutId xmlns:r="http://schemas.openxmlformats.org/officeDocument/2006/relationships" id="2147483649" r:id="Rc012fbc871de4cbc"/>
-    <p:sldLayoutId xmlns:r="http://schemas.openxmlformats.org/officeDocument/2006/relationships" id="2147483650" r:id="R3a4547d67160413f"/>
-    <p:sldLayoutId xmlns:r="http://schemas.openxmlformats.org/officeDocument/2006/relationships" id="2147483651" r:id="R2407622b98bc48ee"/>
-    <p:sldLayoutId xmlns:r="http://schemas.openxmlformats.org/officeDocument/2006/relationships" id="2147483652" r:id="Rbff8a9dc32ad4420"/>
-    <p:sldLayoutId xmlns:r="http://schemas.openxmlformats.org/officeDocument/2006/relationships" id="2147483653" r:id="R5386b0d832a5443e"/>
-    <p:sldLayoutId xmlns:r="http://schemas.openxmlformats.org/officeDocument/2006/relationships" id="2147483654" r:id="R8f57884708be4133"/>
+    <p:sldLayoutId xmlns:r="http://schemas.openxmlformats.org/officeDocument/2006/relationships" id="2147483649" r:id="R341e2635b4a74397"/>
+    <p:sldLayoutId xmlns:r="http://schemas.openxmlformats.org/officeDocument/2006/relationships" id="2147483650" r:id="Rdaa03f3f38be4d2e"/>
+    <p:sldLayoutId xmlns:r="http://schemas.openxmlformats.org/officeDocument/2006/relationships" id="2147483651" r:id="R51f3b29f47384937"/>
+    <p:sldLayoutId xmlns:r="http://schemas.openxmlformats.org/officeDocument/2006/relationships" id="2147483652" r:id="R653a21e3eeb04335"/>
+    <p:sldLayoutId xmlns:r="http://schemas.openxmlformats.org/officeDocument/2006/relationships" id="2147483653" r:id="Rb3ca1a40baf64720"/>
+    <p:sldLayoutId xmlns:r="http://schemas.openxmlformats.org/officeDocument/2006/relationships" id="2147483654" r:id="R317f8014b801424c"/>
   </p:sldLayoutIdLst>
   <p:txStyles>
     <p:titleStyle>
@@ -3903,6 +3903,7 @@
               </a:defRPr>
             </a:defPPr>
             <a:lvl1pPr>
+              <a:buNone/>
               <a:defRPr sz="3450" b="1">
                 <a:solidFill>
                   <a:srgbClr val="FFFFFF"/>
@@ -3913,6 +3914,7 @@
               </a:defRPr>
             </a:lvl1pPr>
             <a:lvl2pPr>
+              <a:buNone/>
               <a:defRPr sz="3450" b="1">
                 <a:solidFill>
                   <a:srgbClr val="FFFFFF"/>
@@ -3923,6 +3925,7 @@
               </a:defRPr>
             </a:lvl2pPr>
             <a:lvl3pPr>
+              <a:buNone/>
               <a:defRPr sz="3450" b="1">
                 <a:solidFill>
                   <a:srgbClr val="FFFFFF"/>
@@ -3933,6 +3936,7 @@
               </a:defRPr>
             </a:lvl3pPr>
             <a:lvl4pPr>
+              <a:buNone/>
               <a:defRPr sz="3450" b="1">
                 <a:solidFill>
                   <a:srgbClr val="FFFFFF"/>
@@ -3943,6 +3947,7 @@
               </a:defRPr>
             </a:lvl4pPr>
             <a:lvl5pPr>
+              <a:buNone/>
               <a:defRPr sz="3450" b="1">
                 <a:solidFill>
                   <a:srgbClr val="FFFFFF"/>
@@ -3953,6 +3958,7 @@
               </a:defRPr>
             </a:lvl5pPr>
             <a:lvl6pPr>
+              <a:buNone/>
               <a:defRPr sz="3450" b="1">
                 <a:solidFill>
                   <a:srgbClr val="FFFFFF"/>
@@ -3963,6 +3969,7 @@
               </a:defRPr>
             </a:lvl6pPr>
             <a:lvl7pPr>
+              <a:buNone/>
               <a:defRPr sz="3450" b="1">
                 <a:solidFill>
                   <a:srgbClr val="FFFFFF"/>
@@ -3973,6 +3980,7 @@
               </a:defRPr>
             </a:lvl7pPr>
             <a:lvl8pPr>
+              <a:buNone/>
               <a:defRPr sz="3450" b="1">
                 <a:solidFill>
                   <a:srgbClr val="FFFFFF"/>
@@ -3983,6 +3991,7 @@
               </a:defRPr>
             </a:lvl8pPr>
             <a:lvl9pPr>
+              <a:buNone/>
               <a:defRPr sz="3450" b="1">
                 <a:solidFill>
                   <a:srgbClr val="FFFFFF"/>
@@ -3995,6 +4004,7 @@
           </a:lstStyle>
           <a:p xmlns:a="http://schemas.openxmlformats.org/drawingml/2006/main">
             <a:pPr>
+              <a:buNone/>
               <a:defRPr sz="3450" b="1">
                 <a:solidFill>
                   <a:srgbClr val="FFFFFF"/>
@@ -4059,6 +4069,7 @@
               </a:defRPr>
             </a:defPPr>
             <a:lvl1pPr>
+              <a:buNone/>
               <a:defRPr sz="1200" b="0">
                 <a:solidFill>
                   <a:srgbClr val="B9D0DE"/>
@@ -4069,6 +4080,7 @@
               </a:defRPr>
             </a:lvl1pPr>
             <a:lvl2pPr>
+              <a:buNone/>
               <a:defRPr sz="1200" b="0">
                 <a:solidFill>
                   <a:srgbClr val="B9D0DE"/>
@@ -4079,6 +4091,7 @@
               </a:defRPr>
             </a:lvl2pPr>
             <a:lvl3pPr>
+              <a:buNone/>
               <a:defRPr sz="1200" b="0">
                 <a:solidFill>
                   <a:srgbClr val="B9D0DE"/>
@@ -4089,6 +4102,7 @@
               </a:defRPr>
             </a:lvl3pPr>
             <a:lvl4pPr>
+              <a:buNone/>
               <a:defRPr sz="1200" b="0">
                 <a:solidFill>
                   <a:srgbClr val="B9D0DE"/>
@@ -4099,6 +4113,7 @@
               </a:defRPr>
             </a:lvl4pPr>
             <a:lvl5pPr>
+              <a:buNone/>
               <a:defRPr sz="1200" b="0">
                 <a:solidFill>
                   <a:srgbClr val="B9D0DE"/>
@@ -4109,6 +4124,7 @@
               </a:defRPr>
             </a:lvl5pPr>
             <a:lvl6pPr>
+              <a:buNone/>
               <a:defRPr sz="1200" b="0">
                 <a:solidFill>
                   <a:srgbClr val="B9D0DE"/>
@@ -4119,6 +4135,7 @@
               </a:defRPr>
             </a:lvl6pPr>
             <a:lvl7pPr>
+              <a:buNone/>
               <a:defRPr sz="1200" b="0">
                 <a:solidFill>
                   <a:srgbClr val="B9D0DE"/>
@@ -4129,6 +4146,7 @@
               </a:defRPr>
             </a:lvl7pPr>
             <a:lvl8pPr>
+              <a:buNone/>
               <a:defRPr sz="1200" b="0">
                 <a:solidFill>
                   <a:srgbClr val="B9D0DE"/>
@@ -4139,6 +4157,7 @@
               </a:defRPr>
             </a:lvl8pPr>
             <a:lvl9pPr>
+              <a:buNone/>
               <a:defRPr sz="1200" b="0">
                 <a:solidFill>
                   <a:srgbClr val="B9D0DE"/>
@@ -4151,6 +4170,7 @@
           </a:lstStyle>
           <a:p xmlns:a="http://schemas.openxmlformats.org/drawingml/2006/main">
             <a:pPr>
+              <a:buNone/>
               <a:defRPr sz="1200" b="0">
                 <a:solidFill>
                   <a:srgbClr val="B9D0DE"/>
@@ -4215,6 +4235,7 @@
               </a:defRPr>
             </a:defPPr>
             <a:lvl1pPr>
+              <a:buNone/>
               <a:defRPr sz="1200" b="0">
                 <a:solidFill>
                   <a:srgbClr val="B9D0DE"/>
@@ -4225,6 +4246,7 @@
               </a:defRPr>
             </a:lvl1pPr>
             <a:lvl2pPr>
+              <a:buNone/>
               <a:defRPr sz="1200" b="0">
                 <a:solidFill>
                   <a:srgbClr val="B9D0DE"/>
@@ -4235,6 +4257,7 @@
               </a:defRPr>
             </a:lvl2pPr>
             <a:lvl3pPr>
+              <a:buNone/>
               <a:defRPr sz="1200" b="0">
                 <a:solidFill>
                   <a:srgbClr val="B9D0DE"/>
@@ -4245,6 +4268,7 @@
               </a:defRPr>
             </a:lvl3pPr>
             <a:lvl4pPr>
+              <a:buNone/>
               <a:defRPr sz="1200" b="0">
                 <a:solidFill>
                   <a:srgbClr val="B9D0DE"/>
@@ -4255,6 +4279,7 @@
               </a:defRPr>
             </a:lvl4pPr>
             <a:lvl5pPr>
+              <a:buNone/>
               <a:defRPr sz="1200" b="0">
                 <a:solidFill>
                   <a:srgbClr val="B9D0DE"/>
@@ -4265,6 +4290,7 @@
               </a:defRPr>
             </a:lvl5pPr>
             <a:lvl6pPr>
+              <a:buNone/>
               <a:defRPr sz="1200" b="0">
                 <a:solidFill>
                   <a:srgbClr val="B9D0DE"/>
@@ -4275,6 +4301,7 @@
               </a:defRPr>
             </a:lvl6pPr>
             <a:lvl7pPr>
+              <a:buNone/>
               <a:defRPr sz="1200" b="0">
                 <a:solidFill>
                   <a:srgbClr val="B9D0DE"/>
@@ -4285,6 +4312,7 @@
               </a:defRPr>
             </a:lvl7pPr>
             <a:lvl8pPr>
+              <a:buNone/>
               <a:defRPr sz="1200" b="0">
                 <a:solidFill>
                   <a:srgbClr val="B9D0DE"/>
@@ -4295,6 +4323,7 @@
               </a:defRPr>
             </a:lvl8pPr>
             <a:lvl9pPr>
+              <a:buNone/>
               <a:defRPr sz="1200" b="0">
                 <a:solidFill>
                   <a:srgbClr val="B9D0DE"/>
@@ -4307,6 +4336,7 @@
           </a:lstStyle>
           <a:p xmlns:a="http://schemas.openxmlformats.org/drawingml/2006/main">
             <a:pPr>
+              <a:buNone/>
               <a:defRPr sz="1200" b="0">
                 <a:solidFill>
                   <a:srgbClr val="B9D0DE"/>
@@ -4371,6 +4401,7 @@
               </a:defRPr>
             </a:defPPr>
             <a:lvl1pPr>
+              <a:buNone/>
               <a:defRPr sz="3900" b="1">
                 <a:solidFill>
                   <a:srgbClr val="FFFFFF"/>
@@ -4381,6 +4412,7 @@
               </a:defRPr>
             </a:lvl1pPr>
             <a:lvl2pPr>
+              <a:buNone/>
               <a:defRPr sz="3900" b="1">
                 <a:solidFill>
                   <a:srgbClr val="FFFFFF"/>
@@ -4391,6 +4423,7 @@
               </a:defRPr>
             </a:lvl2pPr>
             <a:lvl3pPr>
+              <a:buNone/>
               <a:defRPr sz="3900" b="1">
                 <a:solidFill>
                   <a:srgbClr val="FFFFFF"/>
@@ -4401,6 +4434,7 @@
               </a:defRPr>
             </a:lvl3pPr>
             <a:lvl4pPr>
+              <a:buNone/>
               <a:defRPr sz="3900" b="1">
                 <a:solidFill>
                   <a:srgbClr val="FFFFFF"/>
@@ -4411,6 +4445,7 @@
               </a:defRPr>
             </a:lvl4pPr>
             <a:lvl5pPr>
+              <a:buNone/>
               <a:defRPr sz="3900" b="1">
                 <a:solidFill>
                   <a:srgbClr val="FFFFFF"/>
@@ -4421,6 +4456,7 @@
               </a:defRPr>
             </a:lvl5pPr>
             <a:lvl6pPr>
+              <a:buNone/>
               <a:defRPr sz="3900" b="1">
                 <a:solidFill>
                   <a:srgbClr val="FFFFFF"/>
@@ -4431,6 +4467,7 @@
               </a:defRPr>
             </a:lvl6pPr>
             <a:lvl7pPr>
+              <a:buNone/>
               <a:defRPr sz="3900" b="1">
                 <a:solidFill>
                   <a:srgbClr val="FFFFFF"/>
@@ -4441,6 +4478,7 @@
               </a:defRPr>
             </a:lvl7pPr>
             <a:lvl8pPr>
+              <a:buNone/>
               <a:defRPr sz="3900" b="1">
                 <a:solidFill>
                   <a:srgbClr val="FFFFFF"/>
@@ -4451,6 +4489,7 @@
               </a:defRPr>
             </a:lvl8pPr>
             <a:lvl9pPr>
+              <a:buNone/>
               <a:defRPr sz="3900" b="1">
                 <a:solidFill>
                   <a:srgbClr val="FFFFFF"/>
@@ -4463,6 +4502,7 @@
           </a:lstStyle>
           <a:p xmlns:a="http://schemas.openxmlformats.org/drawingml/2006/main">
             <a:pPr>
+              <a:buNone/>
               <a:defRPr sz="3900" b="1">
                 <a:solidFill>
                   <a:srgbClr val="FFFFFF"/>
@@ -4486,6 +4526,7 @@
           </a:p>
           <a:p xmlns:a="http://schemas.openxmlformats.org/drawingml/2006/main">
             <a:pPr>
+              <a:buNone/>
               <a:defRPr sz="3900" b="1">
                 <a:solidFill>
                   <a:srgbClr val="FFFFFF"/>
@@ -4550,6 +4591,7 @@
               </a:defRPr>
             </a:defPPr>
             <a:lvl1pPr>
+              <a:buNone/>
               <a:defRPr sz="2400" b="0">
                 <a:solidFill>
                   <a:srgbClr val="B9D0DE"/>
@@ -4560,6 +4602,7 @@
               </a:defRPr>
             </a:lvl1pPr>
             <a:lvl2pPr>
+              <a:buNone/>
               <a:defRPr sz="2400" b="0">
                 <a:solidFill>
                   <a:srgbClr val="B9D0DE"/>
@@ -4570,6 +4613,7 @@
               </a:defRPr>
             </a:lvl2pPr>
             <a:lvl3pPr>
+              <a:buNone/>
               <a:defRPr sz="2400" b="0">
                 <a:solidFill>
                   <a:srgbClr val="B9D0DE"/>
@@ -4580,6 +4624,7 @@
               </a:defRPr>
             </a:lvl3pPr>
             <a:lvl4pPr>
+              <a:buNone/>
               <a:defRPr sz="2400" b="0">
                 <a:solidFill>
                   <a:srgbClr val="B9D0DE"/>
@@ -4590,6 +4635,7 @@
               </a:defRPr>
             </a:lvl4pPr>
             <a:lvl5pPr>
+              <a:buNone/>
               <a:defRPr sz="2400" b="0">
                 <a:solidFill>
                   <a:srgbClr val="B9D0DE"/>
@@ -4600,6 +4646,7 @@
               </a:defRPr>
             </a:lvl5pPr>
             <a:lvl6pPr>
+              <a:buNone/>
               <a:defRPr sz="2400" b="0">
                 <a:solidFill>
                   <a:srgbClr val="B9D0DE"/>
@@ -4610,6 +4657,7 @@
               </a:defRPr>
             </a:lvl6pPr>
             <a:lvl7pPr>
+              <a:buNone/>
               <a:defRPr sz="2400" b="0">
                 <a:solidFill>
                   <a:srgbClr val="B9D0DE"/>
@@ -4620,6 +4668,7 @@
               </a:defRPr>
             </a:lvl7pPr>
             <a:lvl8pPr>
+              <a:buNone/>
               <a:defRPr sz="2400" b="0">
                 <a:solidFill>
                   <a:srgbClr val="B9D0DE"/>
@@ -4630,6 +4679,7 @@
               </a:defRPr>
             </a:lvl8pPr>
             <a:lvl9pPr>
+              <a:buNone/>
               <a:defRPr sz="2400" b="0">
                 <a:solidFill>
                   <a:srgbClr val="B9D0DE"/>
@@ -4642,6 +4692,7 @@
           </a:lstStyle>
           <a:p xmlns:a="http://schemas.openxmlformats.org/drawingml/2006/main">
             <a:pPr>
+              <a:buNone/>
               <a:defRPr sz="2400" b="0">
                 <a:solidFill>
                   <a:srgbClr val="B9D0DE"/>
@@ -4665,6 +4716,7 @@
           </a:p>
           <a:p xmlns:a="http://schemas.openxmlformats.org/drawingml/2006/main">
             <a:pPr>
+              <a:buNone/>
               <a:defRPr sz="2400" b="0">
                 <a:solidFill>
                   <a:srgbClr val="B9D0DE"/>
@@ -4729,6 +4781,7 @@
               </a:defRPr>
             </a:defPPr>
             <a:lvl1pPr>
+              <a:buNone/>
               <a:defRPr sz="2250" b="1">
                 <a:solidFill>
                   <a:srgbClr val="FFFFFF"/>
@@ -4739,6 +4792,7 @@
               </a:defRPr>
             </a:lvl1pPr>
             <a:lvl2pPr>
+              <a:buNone/>
               <a:defRPr sz="2250" b="1">
                 <a:solidFill>
                   <a:srgbClr val="FFFFFF"/>
@@ -4749,6 +4803,7 @@
               </a:defRPr>
             </a:lvl2pPr>
             <a:lvl3pPr>
+              <a:buNone/>
               <a:defRPr sz="2250" b="1">
                 <a:solidFill>
                   <a:srgbClr val="FFFFFF"/>
@@ -4759,6 +4814,7 @@
               </a:defRPr>
             </a:lvl3pPr>
             <a:lvl4pPr>
+              <a:buNone/>
               <a:defRPr sz="2250" b="1">
                 <a:solidFill>
                   <a:srgbClr val="FFFFFF"/>
@@ -4769,6 +4825,7 @@
               </a:defRPr>
             </a:lvl4pPr>
             <a:lvl5pPr>
+              <a:buNone/>
               <a:defRPr sz="2250" b="1">
                 <a:solidFill>
                   <a:srgbClr val="FFFFFF"/>
@@ -4779,6 +4836,7 @@
               </a:defRPr>
             </a:lvl5pPr>
             <a:lvl6pPr>
+              <a:buNone/>
               <a:defRPr sz="2250" b="1">
                 <a:solidFill>
                   <a:srgbClr val="FFFFFF"/>
@@ -4789,6 +4847,7 @@
               </a:defRPr>
             </a:lvl6pPr>
             <a:lvl7pPr>
+              <a:buNone/>
               <a:defRPr sz="2250" b="1">
                 <a:solidFill>
                   <a:srgbClr val="FFFFFF"/>
@@ -4799,6 +4858,7 @@
               </a:defRPr>
             </a:lvl7pPr>
             <a:lvl8pPr>
+              <a:buNone/>
               <a:defRPr sz="2250" b="1">
                 <a:solidFill>
                   <a:srgbClr val="FFFFFF"/>
@@ -4809,6 +4869,7 @@
               </a:defRPr>
             </a:lvl8pPr>
             <a:lvl9pPr>
+              <a:buNone/>
               <a:defRPr sz="2250" b="1">
                 <a:solidFill>
                   <a:srgbClr val="FFFFFF"/>
@@ -4821,6 +4882,7 @@
           </a:lstStyle>
           <a:p xmlns:a="http://schemas.openxmlformats.org/drawingml/2006/main">
             <a:pPr>
+              <a:buNone/>
               <a:defRPr sz="2250" b="1">
                 <a:solidFill>
                   <a:srgbClr val="FFFFFF"/>
@@ -4885,6 +4947,7 @@
               </a:defRPr>
             </a:defPPr>
             <a:lvl1pPr>
+              <a:buNone/>
               <a:defRPr sz="1800" b="0">
                 <a:solidFill>
                   <a:srgbClr val="B9D0DE"/>
@@ -4895,6 +4958,7 @@
               </a:defRPr>
             </a:lvl1pPr>
             <a:lvl2pPr>
+              <a:buNone/>
               <a:defRPr sz="1800" b="0">
                 <a:solidFill>
                   <a:srgbClr val="B9D0DE"/>
@@ -4905,6 +4969,7 @@
               </a:defRPr>
             </a:lvl2pPr>
             <a:lvl3pPr>
+              <a:buNone/>
               <a:defRPr sz="1800" b="0">
                 <a:solidFill>
                   <a:srgbClr val="B9D0DE"/>
@@ -4915,6 +4980,7 @@
               </a:defRPr>
             </a:lvl3pPr>
             <a:lvl4pPr>
+              <a:buNone/>
               <a:defRPr sz="1800" b="0">
                 <a:solidFill>
                   <a:srgbClr val="B9D0DE"/>
@@ -4925,6 +4991,7 @@
               </a:defRPr>
             </a:lvl4pPr>
             <a:lvl5pPr>
+              <a:buNone/>
               <a:defRPr sz="1800" b="0">
                 <a:solidFill>
                   <a:srgbClr val="B9D0DE"/>
@@ -4935,6 +5002,7 @@
               </a:defRPr>
             </a:lvl5pPr>
             <a:lvl6pPr>
+              <a:buNone/>
               <a:defRPr sz="1800" b="0">
                 <a:solidFill>
                   <a:srgbClr val="B9D0DE"/>
@@ -4945,6 +5013,7 @@
               </a:defRPr>
             </a:lvl6pPr>
             <a:lvl7pPr>
+              <a:buNone/>
               <a:defRPr sz="1800" b="0">
                 <a:solidFill>
                   <a:srgbClr val="B9D0DE"/>
@@ -4955,6 +5024,7 @@
               </a:defRPr>
             </a:lvl7pPr>
             <a:lvl8pPr>
+              <a:buNone/>
               <a:defRPr sz="1800" b="0">
                 <a:solidFill>
                   <a:srgbClr val="B9D0DE"/>
@@ -4965,6 +5035,7 @@
               </a:defRPr>
             </a:lvl8pPr>
             <a:lvl9pPr>
+              <a:buNone/>
               <a:defRPr sz="1800" b="0">
                 <a:solidFill>
                   <a:srgbClr val="B9D0DE"/>
@@ -4977,6 +5048,7 @@
           </a:lstStyle>
           <a:p xmlns:a="http://schemas.openxmlformats.org/drawingml/2006/main">
             <a:pPr>
+              <a:buNone/>
               <a:defRPr sz="1800" b="0">
                 <a:solidFill>
                   <a:srgbClr val="B9D0DE"/>
@@ -5041,6 +5113,7 @@
               </a:defRPr>
             </a:defPPr>
             <a:lvl1pPr>
+              <a:buNone/>
               <a:defRPr sz="1650" b="1">
                 <a:solidFill>
                   <a:srgbClr val="00A9D6"/>
@@ -5051,6 +5124,7 @@
               </a:defRPr>
             </a:lvl1pPr>
             <a:lvl2pPr>
+              <a:buNone/>
               <a:defRPr sz="1650" b="1">
                 <a:solidFill>
                   <a:srgbClr val="00A9D6"/>
@@ -5061,6 +5135,7 @@
               </a:defRPr>
             </a:lvl2pPr>
             <a:lvl3pPr>
+              <a:buNone/>
               <a:defRPr sz="1650" b="1">
                 <a:solidFill>
                   <a:srgbClr val="00A9D6"/>
@@ -5071,6 +5146,7 @@
               </a:defRPr>
             </a:lvl3pPr>
             <a:lvl4pPr>
+              <a:buNone/>
               <a:defRPr sz="1650" b="1">
                 <a:solidFill>
                   <a:srgbClr val="00A9D6"/>
@@ -5081,6 +5157,7 @@
               </a:defRPr>
             </a:lvl4pPr>
             <a:lvl5pPr>
+              <a:buNone/>
               <a:defRPr sz="1650" b="1">
                 <a:solidFill>
                   <a:srgbClr val="00A9D6"/>
@@ -5091,6 +5168,7 @@
               </a:defRPr>
             </a:lvl5pPr>
             <a:lvl6pPr>
+              <a:buNone/>
               <a:defRPr sz="1650" b="1">
                 <a:solidFill>
                   <a:srgbClr val="00A9D6"/>
@@ -5101,6 +5179,7 @@
               </a:defRPr>
             </a:lvl6pPr>
             <a:lvl7pPr>
+              <a:buNone/>
               <a:defRPr sz="1650" b="1">
                 <a:solidFill>
                   <a:srgbClr val="00A9D6"/>
@@ -5111,6 +5190,7 @@
               </a:defRPr>
             </a:lvl7pPr>
             <a:lvl8pPr>
+              <a:buNone/>
               <a:defRPr sz="1650" b="1">
                 <a:solidFill>
                   <a:srgbClr val="00A9D6"/>
@@ -5121,6 +5201,7 @@
               </a:defRPr>
             </a:lvl8pPr>
             <a:lvl9pPr>
+              <a:buNone/>
               <a:defRPr sz="1650" b="1">
                 <a:solidFill>
                   <a:srgbClr val="00A9D6"/>
@@ -5133,6 +5214,7 @@
           </a:lstStyle>
           <a:p xmlns:a="http://schemas.openxmlformats.org/drawingml/2006/main">
             <a:pPr>
+              <a:buNone/>
               <a:defRPr sz="1650" b="1">
                 <a:solidFill>
                   <a:srgbClr val="00A9D6"/>
@@ -5150,7 +5232,7 @@
                 <a:latin typeface="Helvetica Neue"/>
                 <a:ea typeface="Helvetica Neue"/>
                 <a:cs typeface="Helvetica Neue"/>
-                <a:hlinkClick xmlns:r="http://schemas.openxmlformats.org/officeDocument/2006/relationships" r:id="R19cdbec8e56e42d2"/>
+                <a:hlinkClick xmlns:r="http://schemas.openxmlformats.org/officeDocument/2006/relationships" r:id="R39067bd8f48e4f9e"/>
               </a:rPr>
               <a:t>Working prototype</a:t>
             </a:r>
@@ -5198,6 +5280,173 @@
               </a:defRPr>
             </a:defPPr>
             <a:lvl1pPr>
+              <a:buNone/>
+              <a:defRPr sz="1650" b="1">
+                <a:solidFill>
+                  <a:srgbClr val="00A9D6"/>
+                </a:solidFill>
+                <a:latin typeface="Helvetica Neue"/>
+                <a:ea typeface="Helvetica Neue"/>
+                <a:cs typeface="Helvetica Neue"/>
+              </a:defRPr>
+            </a:lvl1pPr>
+            <a:lvl2pPr>
+              <a:buNone/>
+              <a:defRPr sz="1650" b="1">
+                <a:solidFill>
+                  <a:srgbClr val="00A9D6"/>
+                </a:solidFill>
+                <a:latin typeface="Helvetica Neue"/>
+                <a:ea typeface="Helvetica Neue"/>
+                <a:cs typeface="Helvetica Neue"/>
+              </a:defRPr>
+            </a:lvl2pPr>
+            <a:lvl3pPr>
+              <a:buNone/>
+              <a:defRPr sz="1650" b="1">
+                <a:solidFill>
+                  <a:srgbClr val="00A9D6"/>
+                </a:solidFill>
+                <a:latin typeface="Helvetica Neue"/>
+                <a:ea typeface="Helvetica Neue"/>
+                <a:cs typeface="Helvetica Neue"/>
+              </a:defRPr>
+            </a:lvl3pPr>
+            <a:lvl4pPr>
+              <a:buNone/>
+              <a:defRPr sz="1650" b="1">
+                <a:solidFill>
+                  <a:srgbClr val="00A9D6"/>
+                </a:solidFill>
+                <a:latin typeface="Helvetica Neue"/>
+                <a:ea typeface="Helvetica Neue"/>
+                <a:cs typeface="Helvetica Neue"/>
+              </a:defRPr>
+            </a:lvl4pPr>
+            <a:lvl5pPr>
+              <a:buNone/>
+              <a:defRPr sz="1650" b="1">
+                <a:solidFill>
+                  <a:srgbClr val="00A9D6"/>
+                </a:solidFill>
+                <a:latin typeface="Helvetica Neue"/>
+                <a:ea typeface="Helvetica Neue"/>
+                <a:cs typeface="Helvetica Neue"/>
+              </a:defRPr>
+            </a:lvl5pPr>
+            <a:lvl6pPr>
+              <a:buNone/>
+              <a:defRPr sz="1650" b="1">
+                <a:solidFill>
+                  <a:srgbClr val="00A9D6"/>
+                </a:solidFill>
+                <a:latin typeface="Helvetica Neue"/>
+                <a:ea typeface="Helvetica Neue"/>
+                <a:cs typeface="Helvetica Neue"/>
+              </a:defRPr>
+            </a:lvl6pPr>
+            <a:lvl7pPr>
+              <a:buNone/>
+              <a:defRPr sz="1650" b="1">
+                <a:solidFill>
+                  <a:srgbClr val="00A9D6"/>
+                </a:solidFill>
+                <a:latin typeface="Helvetica Neue"/>
+                <a:ea typeface="Helvetica Neue"/>
+                <a:cs typeface="Helvetica Neue"/>
+              </a:defRPr>
+            </a:lvl7pPr>
+            <a:lvl8pPr>
+              <a:buNone/>
+              <a:defRPr sz="1650" b="1">
+                <a:solidFill>
+                  <a:srgbClr val="00A9D6"/>
+                </a:solidFill>
+                <a:latin typeface="Helvetica Neue"/>
+                <a:ea typeface="Helvetica Neue"/>
+                <a:cs typeface="Helvetica Neue"/>
+              </a:defRPr>
+            </a:lvl8pPr>
+            <a:lvl9pPr>
+              <a:buNone/>
+              <a:defRPr sz="1650" b="1">
+                <a:solidFill>
+                  <a:srgbClr val="00A9D6"/>
+                </a:solidFill>
+                <a:latin typeface="Helvetica Neue"/>
+                <a:ea typeface="Helvetica Neue"/>
+                <a:cs typeface="Helvetica Neue"/>
+              </a:defRPr>
+            </a:lvl9pPr>
+          </a:lstStyle>
+          <a:p xmlns:a="http://schemas.openxmlformats.org/drawingml/2006/main">
+            <a:pPr>
+              <a:buNone/>
+              <a:defRPr sz="1650" b="1">
+                <a:solidFill>
+                  <a:srgbClr val="00A9D6"/>
+                </a:solidFill>
+                <a:latin typeface="Helvetica Neue"/>
+                <a:ea typeface="Helvetica Neue"/>
+                <a:cs typeface="Helvetica Neue"/>
+              </a:defRPr>
+            </a:pPr>
+            <a:r>
+              <a:rPr u="sng">
+                <a:solidFill>
+                  <a:srgbClr val="00A9D6"/>
+                </a:solidFill>
+                <a:latin typeface="Helvetica Neue"/>
+                <a:ea typeface="Helvetica Neue"/>
+                <a:cs typeface="Helvetica Neue"/>
+                <a:hlinkClick xmlns:r="http://schemas.openxmlformats.org/officeDocument/2006/relationships" r:id="R58d1e3d00bff4107"/>
+              </a:rPr>
+              <a:t>Public source</a:t>
+            </a:r>
+          </a:p>
+        </p:txBody>
+      </p:sp>
+      <p:sp>
+        <p:nvSpPr>
+          <p:cNvPr id="11" name="">
+            <a:extLst xmlns:a="http://schemas.openxmlformats.org/drawingml/2006/main">
+              <a:ext uri="{FF2B5EF4-FFF2-40B4-BE49-F238E27FC236}">
+                <a16:creationId xmlns:a16="http://schemas.microsoft.com/office/drawing/2014/main" id="{388FEBAF-0366-4D32-8C37-DFECB84B4C09}"/>
+              </a:ext>
+            </a:extLst>
+          </p:cNvPr>
+          <p:cNvSpPr>
+            <a:spLocks xmlns:a="http://schemas.openxmlformats.org/drawingml/2006/main" noGrp="1"/>
+          </p:cNvSpPr>
+          <p:nvPr/>
+        </p:nvSpPr>
+        <p:spPr>
+          <a:xfrm xmlns:a="http://schemas.openxmlformats.org/drawingml/2006/main">
+            <a:off x="7048500" y="5905500"/>
+            <a:ext cx="3048000" cy="333375"/>
+          </a:xfrm>
+          <a:prstGeom xmlns:a="http://schemas.openxmlformats.org/drawingml/2006/main" prst="rect">
+            <a:avLst/>
+          </a:prstGeom>
+          <a:noFill xmlns:a="http://schemas.openxmlformats.org/drawingml/2006/main"/>
+          <a:ln xmlns:a="http://schemas.openxmlformats.org/drawingml/2006/main" w="0">
+            <a:noFill/>
+          </a:ln>
+        </p:spPr>
+        <p:txBody>
+          <a:bodyPr xmlns:a="http://schemas.openxmlformats.org/drawingml/2006/main" lIns="0" tIns="0" rIns="0" bIns="0"/>
+          <a:lstStyle xmlns:a="http://schemas.openxmlformats.org/drawingml/2006/main">
+            <a:defPPr>
+              <a:defRPr sz="1650" b="1">
+                <a:solidFill>
+                  <a:srgbClr val="00A9D6"/>
+                </a:solidFill>
+                <a:latin typeface="Helvetica Neue"/>
+                <a:ea typeface="Helvetica Neue"/>
+                <a:cs typeface="Helvetica Neue"/>
+              </a:defRPr>
+            </a:defPPr>
+            <a:lvl1pPr>
               <a:defRPr sz="1650" b="1">
                 <a:solidFill>
                   <a:srgbClr val="00A9D6"/>
@@ -5307,9 +5556,9 @@
                 <a:latin typeface="Helvetica Neue"/>
                 <a:ea typeface="Helvetica Neue"/>
                 <a:cs typeface="Helvetica Neue"/>
-                <a:hlinkClick xmlns:r="http://schemas.openxmlformats.org/officeDocument/2006/relationships" r:id="R59f456cc5c674fa8"/>
+                <a:hlinkClick xmlns:r="http://schemas.openxmlformats.org/officeDocument/2006/relationships" r:id="R9fe6e01bcaf440b6"/>
               </a:rPr>
-              <a:t>Public source</a:t>
+              <a:t>Demo (3:17)</a:t>
             </a:r>
           </a:p>
         </p:txBody>
@@ -5384,6 +5633,7 @@
               </a:defRPr>
             </a:defPPr>
             <a:lvl1pPr>
+              <a:buNone/>
               <a:defRPr sz="3450" b="1">
                 <a:solidFill>
                   <a:srgbClr val="102F43"/>
@@ -5394,6 +5644,7 @@
               </a:defRPr>
             </a:lvl1pPr>
             <a:lvl2pPr>
+              <a:buNone/>
               <a:defRPr sz="3450" b="1">
                 <a:solidFill>
                   <a:srgbClr val="102F43"/>
@@ -5404,6 +5655,7 @@
               </a:defRPr>
             </a:lvl2pPr>
             <a:lvl3pPr>
+              <a:buNone/>
               <a:defRPr sz="3450" b="1">
                 <a:solidFill>
                   <a:srgbClr val="102F43"/>
@@ -5414,6 +5666,7 @@
               </a:defRPr>
             </a:lvl3pPr>
             <a:lvl4pPr>
+              <a:buNone/>
               <a:defRPr sz="3450" b="1">
                 <a:solidFill>
                   <a:srgbClr val="102F43"/>
@@ -5424,6 +5677,7 @@
               </a:defRPr>
             </a:lvl4pPr>
             <a:lvl5pPr>
+              <a:buNone/>
               <a:defRPr sz="3450" b="1">
                 <a:solidFill>
                   <a:srgbClr val="102F43"/>
@@ -5434,6 +5688,7 @@
               </a:defRPr>
             </a:lvl5pPr>
             <a:lvl6pPr>
+              <a:buNone/>
               <a:defRPr sz="3450" b="1">
                 <a:solidFill>
                   <a:srgbClr val="102F43"/>
@@ -5444,6 +5699,7 @@
               </a:defRPr>
             </a:lvl6pPr>
             <a:lvl7pPr>
+              <a:buNone/>
               <a:defRPr sz="3450" b="1">
                 <a:solidFill>
                   <a:srgbClr val="102F43"/>
@@ -5454,6 +5710,7 @@
               </a:defRPr>
             </a:lvl7pPr>
             <a:lvl8pPr>
+              <a:buNone/>
               <a:defRPr sz="3450" b="1">
                 <a:solidFill>
                   <a:srgbClr val="102F43"/>
@@ -5464,6 +5721,7 @@
               </a:defRPr>
             </a:lvl8pPr>
             <a:lvl9pPr>
+              <a:buNone/>
               <a:defRPr sz="3450" b="1">
                 <a:solidFill>
                   <a:srgbClr val="102F43"/>
@@ -5476,6 +5734,7 @@
           </a:lstStyle>
           <a:p xmlns:a="http://schemas.openxmlformats.org/drawingml/2006/main">
             <a:pPr>
+              <a:buNone/>
               <a:defRPr sz="3450" b="1">
                 <a:solidFill>
                   <a:srgbClr val="102F43"/>
@@ -5540,6 +5799,7 @@
               </a:defRPr>
             </a:defPPr>
             <a:lvl1pPr>
+              <a:buNone/>
               <a:defRPr sz="1200" b="0">
                 <a:solidFill>
                   <a:srgbClr val="526B7C"/>
@@ -5550,6 +5810,7 @@
               </a:defRPr>
             </a:lvl1pPr>
             <a:lvl2pPr>
+              <a:buNone/>
               <a:defRPr sz="1200" b="0">
                 <a:solidFill>
                   <a:srgbClr val="526B7C"/>
@@ -5560,6 +5821,7 @@
               </a:defRPr>
             </a:lvl2pPr>
             <a:lvl3pPr>
+              <a:buNone/>
               <a:defRPr sz="1200" b="0">
                 <a:solidFill>
                   <a:srgbClr val="526B7C"/>
@@ -5570,6 +5832,7 @@
               </a:defRPr>
             </a:lvl3pPr>
             <a:lvl4pPr>
+              <a:buNone/>
               <a:defRPr sz="1200" b="0">
                 <a:solidFill>
                   <a:srgbClr val="526B7C"/>
@@ -5580,6 +5843,7 @@
               </a:defRPr>
             </a:lvl4pPr>
             <a:lvl5pPr>
+              <a:buNone/>
               <a:defRPr sz="1200" b="0">
                 <a:solidFill>
                   <a:srgbClr val="526B7C"/>
@@ -5590,6 +5854,7 @@
               </a:defRPr>
             </a:lvl5pPr>
             <a:lvl6pPr>
+              <a:buNone/>
               <a:defRPr sz="1200" b="0">
                 <a:solidFill>
                   <a:srgbClr val="526B7C"/>
@@ -5600,6 +5865,7 @@
               </a:defRPr>
             </a:lvl6pPr>
             <a:lvl7pPr>
+              <a:buNone/>
               <a:defRPr sz="1200" b="0">
                 <a:solidFill>
                   <a:srgbClr val="526B7C"/>
@@ -5610,6 +5876,7 @@
               </a:defRPr>
             </a:lvl7pPr>
             <a:lvl8pPr>
+              <a:buNone/>
               <a:defRPr sz="1200" b="0">
                 <a:solidFill>
                   <a:srgbClr val="526B7C"/>
@@ -5620,6 +5887,7 @@
               </a:defRPr>
             </a:lvl8pPr>
             <a:lvl9pPr>
+              <a:buNone/>
               <a:defRPr sz="1200" b="0">
                 <a:solidFill>
                   <a:srgbClr val="526B7C"/>
@@ -5632,6 +5900,7 @@
           </a:lstStyle>
           <a:p xmlns:a="http://schemas.openxmlformats.org/drawingml/2006/main">
             <a:pPr>
+              <a:buNone/>
               <a:defRPr sz="1200" b="0">
                 <a:solidFill>
                   <a:srgbClr val="526B7C"/>
@@ -5696,6 +5965,7 @@
               </a:defRPr>
             </a:defPPr>
             <a:lvl1pPr>
+              <a:buNone/>
               <a:defRPr sz="1200" b="0">
                 <a:solidFill>
                   <a:srgbClr val="526B7C"/>
@@ -5706,6 +5976,7 @@
               </a:defRPr>
             </a:lvl1pPr>
             <a:lvl2pPr>
+              <a:buNone/>
               <a:defRPr sz="1200" b="0">
                 <a:solidFill>
                   <a:srgbClr val="526B7C"/>
@@ -5716,6 +5987,7 @@
               </a:defRPr>
             </a:lvl2pPr>
             <a:lvl3pPr>
+              <a:buNone/>
               <a:defRPr sz="1200" b="0">
                 <a:solidFill>
                   <a:srgbClr val="526B7C"/>
@@ -5726,6 +5998,7 @@
               </a:defRPr>
             </a:lvl3pPr>
             <a:lvl4pPr>
+              <a:buNone/>
               <a:defRPr sz="1200" b="0">
                 <a:solidFill>
                   <a:srgbClr val="526B7C"/>
@@ -5736,6 +6009,7 @@
               </a:defRPr>
             </a:lvl4pPr>
             <a:lvl5pPr>
+              <a:buNone/>
               <a:defRPr sz="1200" b="0">
                 <a:solidFill>
                   <a:srgbClr val="526B7C"/>
@@ -5746,6 +6020,7 @@
               </a:defRPr>
             </a:lvl5pPr>
             <a:lvl6pPr>
+              <a:buNone/>
               <a:defRPr sz="1200" b="0">
                 <a:solidFill>
                   <a:srgbClr val="526B7C"/>
@@ -5756,6 +6031,7 @@
               </a:defRPr>
             </a:lvl6pPr>
             <a:lvl7pPr>
+              <a:buNone/>
               <a:defRPr sz="1200" b="0">
                 <a:solidFill>
                   <a:srgbClr val="526B7C"/>
@@ -5766,6 +6042,7 @@
               </a:defRPr>
             </a:lvl7pPr>
             <a:lvl8pPr>
+              <a:buNone/>
               <a:defRPr sz="1200" b="0">
                 <a:solidFill>
                   <a:srgbClr val="526B7C"/>
@@ -5776,6 +6053,7 @@
               </a:defRPr>
             </a:lvl8pPr>
             <a:lvl9pPr>
+              <a:buNone/>
               <a:defRPr sz="1200" b="0">
                 <a:solidFill>
                   <a:srgbClr val="526B7C"/>
@@ -5788,6 +6066,7 @@
           </a:lstStyle>
           <a:p xmlns:a="http://schemas.openxmlformats.org/drawingml/2006/main">
             <a:pPr>
+              <a:buNone/>
               <a:defRPr sz="1200" b="0">
                 <a:solidFill>
                   <a:srgbClr val="526B7C"/>
@@ -5852,6 +6131,7 @@
               </a:defRPr>
             </a:defPPr>
             <a:lvl1pPr>
+              <a:buNone/>
               <a:defRPr sz="2625" b="1">
                 <a:solidFill>
                   <a:srgbClr val="102F43"/>
@@ -5862,6 +6142,7 @@
               </a:defRPr>
             </a:lvl1pPr>
             <a:lvl2pPr>
+              <a:buNone/>
               <a:defRPr sz="2625" b="1">
                 <a:solidFill>
                   <a:srgbClr val="102F43"/>
@@ -5872,6 +6153,7 @@
               </a:defRPr>
             </a:lvl2pPr>
             <a:lvl3pPr>
+              <a:buNone/>
               <a:defRPr sz="2625" b="1">
                 <a:solidFill>
                   <a:srgbClr val="102F43"/>
@@ -5882,6 +6164,7 @@
               </a:defRPr>
             </a:lvl3pPr>
             <a:lvl4pPr>
+              <a:buNone/>
               <a:defRPr sz="2625" b="1">
                 <a:solidFill>
                   <a:srgbClr val="102F43"/>
@@ -5892,6 +6175,7 @@
               </a:defRPr>
             </a:lvl4pPr>
             <a:lvl5pPr>
+              <a:buNone/>
               <a:defRPr sz="2625" b="1">
                 <a:solidFill>
                   <a:srgbClr val="102F43"/>
@@ -5902,6 +6186,7 @@
               </a:defRPr>
             </a:lvl5pPr>
             <a:lvl6pPr>
+              <a:buNone/>
               <a:defRPr sz="2625" b="1">
                 <a:solidFill>
                   <a:srgbClr val="102F43"/>
@@ -5912,6 +6197,7 @@
               </a:defRPr>
             </a:lvl6pPr>
             <a:lvl7pPr>
+              <a:buNone/>
               <a:defRPr sz="2625" b="1">
                 <a:solidFill>
                   <a:srgbClr val="102F43"/>
@@ -5922,6 +6208,7 @@
               </a:defRPr>
             </a:lvl7pPr>
             <a:lvl8pPr>
+              <a:buNone/>
               <a:defRPr sz="2625" b="1">
                 <a:solidFill>
                   <a:srgbClr val="102F43"/>
@@ -5932,6 +6219,7 @@
               </a:defRPr>
             </a:lvl8pPr>
             <a:lvl9pPr>
+              <a:buNone/>
               <a:defRPr sz="2625" b="1">
                 <a:solidFill>
                   <a:srgbClr val="102F43"/>
@@ -5944,6 +6232,7 @@
           </a:lstStyle>
           <a:p xmlns:a="http://schemas.openxmlformats.org/drawingml/2006/main">
             <a:pPr>
+              <a:buNone/>
               <a:defRPr sz="2625" b="1">
                 <a:solidFill>
                   <a:srgbClr val="102F43"/>
@@ -6008,6 +6297,7 @@
               </a:defRPr>
             </a:defPPr>
             <a:lvl1pPr>
+              <a:buNone/>
               <a:defRPr sz="2175" b="1">
                 <a:solidFill>
                   <a:srgbClr val="102F43"/>
@@ -6018,6 +6308,7 @@
               </a:defRPr>
             </a:lvl1pPr>
             <a:lvl2pPr>
+              <a:buNone/>
               <a:defRPr sz="2175" b="1">
                 <a:solidFill>
                   <a:srgbClr val="102F43"/>
@@ -6028,6 +6319,7 @@
               </a:defRPr>
             </a:lvl2pPr>
             <a:lvl3pPr>
+              <a:buNone/>
               <a:defRPr sz="2175" b="1">
                 <a:solidFill>
                   <a:srgbClr val="102F43"/>
@@ -6038,6 +6330,7 @@
               </a:defRPr>
             </a:lvl3pPr>
             <a:lvl4pPr>
+              <a:buNone/>
               <a:defRPr sz="2175" b="1">
                 <a:solidFill>
                   <a:srgbClr val="102F43"/>
@@ -6048,6 +6341,7 @@
               </a:defRPr>
             </a:lvl4pPr>
             <a:lvl5pPr>
+              <a:buNone/>
               <a:defRPr sz="2175" b="1">
                 <a:solidFill>
                   <a:srgbClr val="102F43"/>
@@ -6058,6 +6352,7 @@
               </a:defRPr>
             </a:lvl5pPr>
             <a:lvl6pPr>
+              <a:buNone/>
               <a:defRPr sz="2175" b="1">
                 <a:solidFill>
                   <a:srgbClr val="102F43"/>
@@ -6068,6 +6363,7 @@
               </a:defRPr>
             </a:lvl6pPr>
             <a:lvl7pPr>
+              <a:buNone/>
               <a:defRPr sz="2175" b="1">
                 <a:solidFill>
                   <a:srgbClr val="102F43"/>
@@ -6078,6 +6374,7 @@
               </a:defRPr>
             </a:lvl7pPr>
             <a:lvl8pPr>
+              <a:buNone/>
               <a:defRPr sz="2175" b="1">
                 <a:solidFill>
                   <a:srgbClr val="102F43"/>
@@ -6088,6 +6385,7 @@
               </a:defRPr>
             </a:lvl8pPr>
             <a:lvl9pPr>
+              <a:buNone/>
               <a:defRPr sz="2175" b="1">
                 <a:solidFill>
                   <a:srgbClr val="102F43"/>
@@ -6100,6 +6398,7 @@
           </a:lstStyle>
           <a:p xmlns:a="http://schemas.openxmlformats.org/drawingml/2006/main">
             <a:pPr>
+              <a:buNone/>
               <a:defRPr sz="2175" b="1">
                 <a:solidFill>
                   <a:srgbClr val="102F43"/>
@@ -6164,6 +6463,7 @@
               </a:defRPr>
             </a:defPPr>
             <a:lvl1pPr>
+              <a:buNone/>
               <a:defRPr sz="1875" b="0">
                 <a:solidFill>
                   <a:srgbClr val="526B7C"/>
@@ -6174,6 +6474,7 @@
               </a:defRPr>
             </a:lvl1pPr>
             <a:lvl2pPr>
+              <a:buNone/>
               <a:defRPr sz="1875" b="0">
                 <a:solidFill>
                   <a:srgbClr val="526B7C"/>
@@ -6184,6 +6485,7 @@
               </a:defRPr>
             </a:lvl2pPr>
             <a:lvl3pPr>
+              <a:buNone/>
               <a:defRPr sz="1875" b="0">
                 <a:solidFill>
                   <a:srgbClr val="526B7C"/>
@@ -6194,6 +6496,7 @@
               </a:defRPr>
             </a:lvl3pPr>
             <a:lvl4pPr>
+              <a:buNone/>
               <a:defRPr sz="1875" b="0">
                 <a:solidFill>
                   <a:srgbClr val="526B7C"/>
@@ -6204,6 +6507,7 @@
               </a:defRPr>
             </a:lvl4pPr>
             <a:lvl5pPr>
+              <a:buNone/>
               <a:defRPr sz="1875" b="0">
                 <a:solidFill>
                   <a:srgbClr val="526B7C"/>
@@ -6214,6 +6518,7 @@
               </a:defRPr>
             </a:lvl5pPr>
             <a:lvl6pPr>
+              <a:buNone/>
               <a:defRPr sz="1875" b="0">
                 <a:solidFill>
                   <a:srgbClr val="526B7C"/>
@@ -6224,6 +6529,7 @@
               </a:defRPr>
             </a:lvl6pPr>
             <a:lvl7pPr>
+              <a:buNone/>
               <a:defRPr sz="1875" b="0">
                 <a:solidFill>
                   <a:srgbClr val="526B7C"/>
@@ -6234,6 +6540,7 @@
               </a:defRPr>
             </a:lvl7pPr>
             <a:lvl8pPr>
+              <a:buNone/>
               <a:defRPr sz="1875" b="0">
                 <a:solidFill>
                   <a:srgbClr val="526B7C"/>
@@ -6244,6 +6551,7 @@
               </a:defRPr>
             </a:lvl8pPr>
             <a:lvl9pPr>
+              <a:buNone/>
               <a:defRPr sz="1875" b="0">
                 <a:solidFill>
                   <a:srgbClr val="526B7C"/>
@@ -6256,6 +6564,7 @@
           </a:lstStyle>
           <a:p xmlns:a="http://schemas.openxmlformats.org/drawingml/2006/main">
             <a:pPr>
+              <a:buNone/>
               <a:defRPr sz="1875" b="0">
                 <a:solidFill>
                   <a:srgbClr val="526B7C"/>
@@ -6279,6 +6588,7 @@
           </a:p>
           <a:p xmlns:a="http://schemas.openxmlformats.org/drawingml/2006/main">
             <a:pPr>
+              <a:buNone/>
               <a:defRPr sz="1875" b="0">
                 <a:solidFill>
                   <a:srgbClr val="526B7C"/>
@@ -6302,6 +6612,7 @@
           </a:p>
           <a:p xmlns:a="http://schemas.openxmlformats.org/drawingml/2006/main">
             <a:pPr>
+              <a:buNone/>
               <a:defRPr sz="1875" b="0">
                 <a:solidFill>
                   <a:srgbClr val="526B7C"/>
@@ -6366,6 +6677,7 @@
               </a:defRPr>
             </a:defPPr>
             <a:lvl1pPr>
+              <a:buNone/>
               <a:defRPr sz="2175" b="1">
                 <a:solidFill>
                   <a:srgbClr val="102F43"/>
@@ -6376,6 +6688,7 @@
               </a:defRPr>
             </a:lvl1pPr>
             <a:lvl2pPr>
+              <a:buNone/>
               <a:defRPr sz="2175" b="1">
                 <a:solidFill>
                   <a:srgbClr val="102F43"/>
@@ -6386,6 +6699,7 @@
               </a:defRPr>
             </a:lvl2pPr>
             <a:lvl3pPr>
+              <a:buNone/>
               <a:defRPr sz="2175" b="1">
                 <a:solidFill>
                   <a:srgbClr val="102F43"/>
@@ -6396,6 +6710,7 @@
               </a:defRPr>
             </a:lvl3pPr>
             <a:lvl4pPr>
+              <a:buNone/>
               <a:defRPr sz="2175" b="1">
                 <a:solidFill>
                   <a:srgbClr val="102F43"/>
@@ -6406,6 +6721,7 @@
               </a:defRPr>
             </a:lvl4pPr>
             <a:lvl5pPr>
+              <a:buNone/>
               <a:defRPr sz="2175" b="1">
                 <a:solidFill>
                   <a:srgbClr val="102F43"/>
@@ -6416,6 +6732,7 @@
               </a:defRPr>
             </a:lvl5pPr>
             <a:lvl6pPr>
+              <a:buNone/>
               <a:defRPr sz="2175" b="1">
                 <a:solidFill>
                   <a:srgbClr val="102F43"/>
@@ -6426,6 +6743,7 @@
               </a:defRPr>
             </a:lvl6pPr>
             <a:lvl7pPr>
+              <a:buNone/>
               <a:defRPr sz="2175" b="1">
                 <a:solidFill>
                   <a:srgbClr val="102F43"/>
@@ -6436,6 +6754,7 @@
               </a:defRPr>
             </a:lvl7pPr>
             <a:lvl8pPr>
+              <a:buNone/>
               <a:defRPr sz="2175" b="1">
                 <a:solidFill>
                   <a:srgbClr val="102F43"/>
@@ -6446,6 +6765,7 @@
               </a:defRPr>
             </a:lvl8pPr>
             <a:lvl9pPr>
+              <a:buNone/>
               <a:defRPr sz="2175" b="1">
                 <a:solidFill>
                   <a:srgbClr val="102F43"/>
@@ -6458,6 +6778,7 @@
           </a:lstStyle>
           <a:p xmlns:a="http://schemas.openxmlformats.org/drawingml/2006/main">
             <a:pPr>
+              <a:buNone/>
               <a:defRPr sz="2175" b="1">
                 <a:solidFill>
                   <a:srgbClr val="102F43"/>
@@ -6522,6 +6843,7 @@
               </a:defRPr>
             </a:defPPr>
             <a:lvl1pPr>
+              <a:buNone/>
               <a:defRPr sz="1875" b="0">
                 <a:solidFill>
                   <a:srgbClr val="526B7C"/>
@@ -6532,6 +6854,7 @@
               </a:defRPr>
             </a:lvl1pPr>
             <a:lvl2pPr>
+              <a:buNone/>
               <a:defRPr sz="1875" b="0">
                 <a:solidFill>
                   <a:srgbClr val="526B7C"/>
@@ -6542,6 +6865,7 @@
               </a:defRPr>
             </a:lvl2pPr>
             <a:lvl3pPr>
+              <a:buNone/>
               <a:defRPr sz="1875" b="0">
                 <a:solidFill>
                   <a:srgbClr val="526B7C"/>
@@ -6552,6 +6876,7 @@
               </a:defRPr>
             </a:lvl3pPr>
             <a:lvl4pPr>
+              <a:buNone/>
               <a:defRPr sz="1875" b="0">
                 <a:solidFill>
                   <a:srgbClr val="526B7C"/>
@@ -6562,6 +6887,7 @@
               </a:defRPr>
             </a:lvl4pPr>
             <a:lvl5pPr>
+              <a:buNone/>
               <a:defRPr sz="1875" b="0">
                 <a:solidFill>
                   <a:srgbClr val="526B7C"/>
@@ -6572,6 +6898,7 @@
               </a:defRPr>
             </a:lvl5pPr>
             <a:lvl6pPr>
+              <a:buNone/>
               <a:defRPr sz="1875" b="0">
                 <a:solidFill>
                   <a:srgbClr val="526B7C"/>
@@ -6582,6 +6909,7 @@
               </a:defRPr>
             </a:lvl6pPr>
             <a:lvl7pPr>
+              <a:buNone/>
               <a:defRPr sz="1875" b="0">
                 <a:solidFill>
                   <a:srgbClr val="526B7C"/>
@@ -6592,6 +6920,7 @@
               </a:defRPr>
             </a:lvl7pPr>
             <a:lvl8pPr>
+              <a:buNone/>
               <a:defRPr sz="1875" b="0">
                 <a:solidFill>
                   <a:srgbClr val="526B7C"/>
@@ -6602,6 +6931,7 @@
               </a:defRPr>
             </a:lvl8pPr>
             <a:lvl9pPr>
+              <a:buNone/>
               <a:defRPr sz="1875" b="0">
                 <a:solidFill>
                   <a:srgbClr val="526B7C"/>
@@ -6614,6 +6944,7 @@
           </a:lstStyle>
           <a:p xmlns:a="http://schemas.openxmlformats.org/drawingml/2006/main">
             <a:pPr>
+              <a:buNone/>
               <a:defRPr sz="1875" b="0">
                 <a:solidFill>
                   <a:srgbClr val="526B7C"/>
@@ -6678,6 +7009,7 @@
               </a:defRPr>
             </a:defPPr>
             <a:lvl1pPr>
+              <a:buNone/>
               <a:defRPr sz="2400" b="1">
                 <a:solidFill>
                   <a:srgbClr val="102F43"/>
@@ -6688,6 +7020,7 @@
               </a:defRPr>
             </a:lvl1pPr>
             <a:lvl2pPr>
+              <a:buNone/>
               <a:defRPr sz="2400" b="1">
                 <a:solidFill>
                   <a:srgbClr val="102F43"/>
@@ -6698,6 +7031,7 @@
               </a:defRPr>
             </a:lvl2pPr>
             <a:lvl3pPr>
+              <a:buNone/>
               <a:defRPr sz="2400" b="1">
                 <a:solidFill>
                   <a:srgbClr val="102F43"/>
@@ -6708,6 +7042,7 @@
               </a:defRPr>
             </a:lvl3pPr>
             <a:lvl4pPr>
+              <a:buNone/>
               <a:defRPr sz="2400" b="1">
                 <a:solidFill>
                   <a:srgbClr val="102F43"/>
@@ -6718,6 +7053,7 @@
               </a:defRPr>
             </a:lvl4pPr>
             <a:lvl5pPr>
+              <a:buNone/>
               <a:defRPr sz="2400" b="1">
                 <a:solidFill>
                   <a:srgbClr val="102F43"/>
@@ -6728,6 +7064,7 @@
               </a:defRPr>
             </a:lvl5pPr>
             <a:lvl6pPr>
+              <a:buNone/>
               <a:defRPr sz="2400" b="1">
                 <a:solidFill>
                   <a:srgbClr val="102F43"/>
@@ -6738,6 +7075,7 @@
               </a:defRPr>
             </a:lvl6pPr>
             <a:lvl7pPr>
+              <a:buNone/>
               <a:defRPr sz="2400" b="1">
                 <a:solidFill>
                   <a:srgbClr val="102F43"/>
@@ -6748,6 +7086,7 @@
               </a:defRPr>
             </a:lvl7pPr>
             <a:lvl8pPr>
+              <a:buNone/>
               <a:defRPr sz="2400" b="1">
                 <a:solidFill>
                   <a:srgbClr val="102F43"/>
@@ -6758,6 +7097,7 @@
               </a:defRPr>
             </a:lvl8pPr>
             <a:lvl9pPr>
+              <a:buNone/>
               <a:defRPr sz="2400" b="1">
                 <a:solidFill>
                   <a:srgbClr val="102F43"/>
@@ -6770,6 +7110,7 @@
           </a:lstStyle>
           <a:p xmlns:a="http://schemas.openxmlformats.org/drawingml/2006/main">
             <a:pPr>
+              <a:buNone/>
               <a:defRPr sz="2400" b="1">
                 <a:solidFill>
                   <a:srgbClr val="102F43"/>
@@ -6834,6 +7175,7 @@
               </a:defRPr>
             </a:defPPr>
             <a:lvl1pPr>
+              <a:buNone/>
               <a:defRPr sz="1650" b="0">
                 <a:solidFill>
                   <a:srgbClr val="526B7C"/>
@@ -6844,6 +7186,7 @@
               </a:defRPr>
             </a:lvl1pPr>
             <a:lvl2pPr>
+              <a:buNone/>
               <a:defRPr sz="1650" b="0">
                 <a:solidFill>
                   <a:srgbClr val="526B7C"/>
@@ -6854,6 +7197,7 @@
               </a:defRPr>
             </a:lvl2pPr>
             <a:lvl3pPr>
+              <a:buNone/>
               <a:defRPr sz="1650" b="0">
                 <a:solidFill>
                   <a:srgbClr val="526B7C"/>
@@ -6864,6 +7208,7 @@
               </a:defRPr>
             </a:lvl3pPr>
             <a:lvl4pPr>
+              <a:buNone/>
               <a:defRPr sz="1650" b="0">
                 <a:solidFill>
                   <a:srgbClr val="526B7C"/>
@@ -6874,6 +7219,7 @@
               </a:defRPr>
             </a:lvl4pPr>
             <a:lvl5pPr>
+              <a:buNone/>
               <a:defRPr sz="1650" b="0">
                 <a:solidFill>
                   <a:srgbClr val="526B7C"/>
@@ -6884,6 +7230,7 @@
               </a:defRPr>
             </a:lvl5pPr>
             <a:lvl6pPr>
+              <a:buNone/>
               <a:defRPr sz="1650" b="0">
                 <a:solidFill>
                   <a:srgbClr val="526B7C"/>
@@ -6894,6 +7241,7 @@
               </a:defRPr>
             </a:lvl6pPr>
             <a:lvl7pPr>
+              <a:buNone/>
               <a:defRPr sz="1650" b="0">
                 <a:solidFill>
                   <a:srgbClr val="526B7C"/>
@@ -6904,6 +7252,7 @@
               </a:defRPr>
             </a:lvl7pPr>
             <a:lvl8pPr>
+              <a:buNone/>
               <a:defRPr sz="1650" b="0">
                 <a:solidFill>
                   <a:srgbClr val="526B7C"/>
@@ -6914,6 +7263,7 @@
               </a:defRPr>
             </a:lvl8pPr>
             <a:lvl9pPr>
+              <a:buNone/>
               <a:defRPr sz="1650" b="0">
                 <a:solidFill>
                   <a:srgbClr val="526B7C"/>
@@ -6926,6 +7276,7 @@
           </a:lstStyle>
           <a:p xmlns:a="http://schemas.openxmlformats.org/drawingml/2006/main">
             <a:pPr>
+              <a:buNone/>
               <a:defRPr sz="1650" b="0">
                 <a:solidFill>
                   <a:srgbClr val="526B7C"/>
@@ -7019,6 +7370,7 @@
               </a:defRPr>
             </a:defPPr>
             <a:lvl1pPr>
+              <a:buNone/>
               <a:defRPr sz="3450" b="1">
                 <a:solidFill>
                   <a:srgbClr val="102F43"/>
@@ -7029,6 +7381,7 @@
               </a:defRPr>
             </a:lvl1pPr>
             <a:lvl2pPr>
+              <a:buNone/>
               <a:defRPr sz="3450" b="1">
                 <a:solidFill>
                   <a:srgbClr val="102F43"/>
@@ -7039,6 +7392,7 @@
               </a:defRPr>
             </a:lvl2pPr>
             <a:lvl3pPr>
+              <a:buNone/>
               <a:defRPr sz="3450" b="1">
                 <a:solidFill>
                   <a:srgbClr val="102F43"/>
@@ -7049,6 +7403,7 @@
               </a:defRPr>
             </a:lvl3pPr>
             <a:lvl4pPr>
+              <a:buNone/>
               <a:defRPr sz="3450" b="1">
                 <a:solidFill>
                   <a:srgbClr val="102F43"/>
@@ -7059,6 +7414,7 @@
               </a:defRPr>
             </a:lvl4pPr>
             <a:lvl5pPr>
+              <a:buNone/>
               <a:defRPr sz="3450" b="1">
                 <a:solidFill>
                   <a:srgbClr val="102F43"/>
@@ -7069,6 +7425,7 @@
               </a:defRPr>
             </a:lvl5pPr>
             <a:lvl6pPr>
+              <a:buNone/>
               <a:defRPr sz="3450" b="1">
                 <a:solidFill>
                   <a:srgbClr val="102F43"/>
@@ -7079,6 +7436,7 @@
               </a:defRPr>
             </a:lvl6pPr>
             <a:lvl7pPr>
+              <a:buNone/>
               <a:defRPr sz="3450" b="1">
                 <a:solidFill>
                   <a:srgbClr val="102F43"/>
@@ -7089,6 +7447,7 @@
               </a:defRPr>
             </a:lvl7pPr>
             <a:lvl8pPr>
+              <a:buNone/>
               <a:defRPr sz="3450" b="1">
                 <a:solidFill>
                   <a:srgbClr val="102F43"/>
@@ -7099,6 +7458,7 @@
               </a:defRPr>
             </a:lvl8pPr>
             <a:lvl9pPr>
+              <a:buNone/>
               <a:defRPr sz="3450" b="1">
                 <a:solidFill>
                   <a:srgbClr val="102F43"/>
@@ -7111,6 +7471,7 @@
           </a:lstStyle>
           <a:p xmlns:a="http://schemas.openxmlformats.org/drawingml/2006/main">
             <a:pPr>
+              <a:buNone/>
               <a:defRPr sz="3450" b="1">
                 <a:solidFill>
                   <a:srgbClr val="102F43"/>
@@ -7175,6 +7536,7 @@
               </a:defRPr>
             </a:defPPr>
             <a:lvl1pPr>
+              <a:buNone/>
               <a:defRPr sz="1200" b="0">
                 <a:solidFill>
                   <a:srgbClr val="526B7C"/>
@@ -7185,6 +7547,7 @@
               </a:defRPr>
             </a:lvl1pPr>
             <a:lvl2pPr>
+              <a:buNone/>
               <a:defRPr sz="1200" b="0">
                 <a:solidFill>
                   <a:srgbClr val="526B7C"/>
@@ -7195,6 +7558,7 @@
               </a:defRPr>
             </a:lvl2pPr>
             <a:lvl3pPr>
+              <a:buNone/>
               <a:defRPr sz="1200" b="0">
                 <a:solidFill>
                   <a:srgbClr val="526B7C"/>
@@ -7205,6 +7569,7 @@
               </a:defRPr>
             </a:lvl3pPr>
             <a:lvl4pPr>
+              <a:buNone/>
               <a:defRPr sz="1200" b="0">
                 <a:solidFill>
                   <a:srgbClr val="526B7C"/>
@@ -7215,6 +7580,7 @@
               </a:defRPr>
             </a:lvl4pPr>
             <a:lvl5pPr>
+              <a:buNone/>
               <a:defRPr sz="1200" b="0">
                 <a:solidFill>
                   <a:srgbClr val="526B7C"/>
@@ -7225,6 +7591,7 @@
               </a:defRPr>
             </a:lvl5pPr>
             <a:lvl6pPr>
+              <a:buNone/>
               <a:defRPr sz="1200" b="0">
                 <a:solidFill>
                   <a:srgbClr val="526B7C"/>
@@ -7235,6 +7602,7 @@
               </a:defRPr>
             </a:lvl6pPr>
             <a:lvl7pPr>
+              <a:buNone/>
               <a:defRPr sz="1200" b="0">
                 <a:solidFill>
                   <a:srgbClr val="526B7C"/>
@@ -7245,6 +7613,7 @@
               </a:defRPr>
             </a:lvl7pPr>
             <a:lvl8pPr>
+              <a:buNone/>
               <a:defRPr sz="1200" b="0">
                 <a:solidFill>
                   <a:srgbClr val="526B7C"/>
@@ -7255,6 +7624,7 @@
               </a:defRPr>
             </a:lvl8pPr>
             <a:lvl9pPr>
+              <a:buNone/>
               <a:defRPr sz="1200" b="0">
                 <a:solidFill>
                   <a:srgbClr val="526B7C"/>
@@ -7267,6 +7637,7 @@
           </a:lstStyle>
           <a:p xmlns:a="http://schemas.openxmlformats.org/drawingml/2006/main">
             <a:pPr>
+              <a:buNone/>
               <a:defRPr sz="1200" b="0">
                 <a:solidFill>
                   <a:srgbClr val="526B7C"/>
@@ -7331,6 +7702,7 @@
               </a:defRPr>
             </a:defPPr>
             <a:lvl1pPr>
+              <a:buNone/>
               <a:defRPr sz="1200" b="0">
                 <a:solidFill>
                   <a:srgbClr val="526B7C"/>
@@ -7341,6 +7713,7 @@
               </a:defRPr>
             </a:lvl1pPr>
             <a:lvl2pPr>
+              <a:buNone/>
               <a:defRPr sz="1200" b="0">
                 <a:solidFill>
                   <a:srgbClr val="526B7C"/>
@@ -7351,6 +7724,7 @@
               </a:defRPr>
             </a:lvl2pPr>
             <a:lvl3pPr>
+              <a:buNone/>
               <a:defRPr sz="1200" b="0">
                 <a:solidFill>
                   <a:srgbClr val="526B7C"/>
@@ -7361,6 +7735,7 @@
               </a:defRPr>
             </a:lvl3pPr>
             <a:lvl4pPr>
+              <a:buNone/>
               <a:defRPr sz="1200" b="0">
                 <a:solidFill>
                   <a:srgbClr val="526B7C"/>
@@ -7371,6 +7746,7 @@
               </a:defRPr>
             </a:lvl4pPr>
             <a:lvl5pPr>
+              <a:buNone/>
               <a:defRPr sz="1200" b="0">
                 <a:solidFill>
                   <a:srgbClr val="526B7C"/>
@@ -7381,6 +7757,7 @@
               </a:defRPr>
             </a:lvl5pPr>
             <a:lvl6pPr>
+              <a:buNone/>
               <a:defRPr sz="1200" b="0">
                 <a:solidFill>
                   <a:srgbClr val="526B7C"/>
@@ -7391,6 +7768,7 @@
               </a:defRPr>
             </a:lvl6pPr>
             <a:lvl7pPr>
+              <a:buNone/>
               <a:defRPr sz="1200" b="0">
                 <a:solidFill>
                   <a:srgbClr val="526B7C"/>
@@ -7401,6 +7779,7 @@
               </a:defRPr>
             </a:lvl7pPr>
             <a:lvl8pPr>
+              <a:buNone/>
               <a:defRPr sz="1200" b="0">
                 <a:solidFill>
                   <a:srgbClr val="526B7C"/>
@@ -7411,6 +7790,7 @@
               </a:defRPr>
             </a:lvl8pPr>
             <a:lvl9pPr>
+              <a:buNone/>
               <a:defRPr sz="1200" b="0">
                 <a:solidFill>
                   <a:srgbClr val="526B7C"/>
@@ -7423,6 +7803,7 @@
           </a:lstStyle>
           <a:p xmlns:a="http://schemas.openxmlformats.org/drawingml/2006/main">
             <a:pPr>
+              <a:buNone/>
               <a:defRPr sz="1200" b="0">
                 <a:solidFill>
                   <a:srgbClr val="526B7C"/>
@@ -7487,6 +7868,7 @@
               </a:defRPr>
             </a:defPPr>
             <a:lvl1pPr>
+              <a:buNone/>
               <a:defRPr sz="2175" b="1">
                 <a:solidFill>
                   <a:srgbClr val="102F43"/>
@@ -7497,6 +7879,7 @@
               </a:defRPr>
             </a:lvl1pPr>
             <a:lvl2pPr>
+              <a:buNone/>
               <a:defRPr sz="2175" b="1">
                 <a:solidFill>
                   <a:srgbClr val="102F43"/>
@@ -7507,6 +7890,7 @@
               </a:defRPr>
             </a:lvl2pPr>
             <a:lvl3pPr>
+              <a:buNone/>
               <a:defRPr sz="2175" b="1">
                 <a:solidFill>
                   <a:srgbClr val="102F43"/>
@@ -7517,6 +7901,7 @@
               </a:defRPr>
             </a:lvl3pPr>
             <a:lvl4pPr>
+              <a:buNone/>
               <a:defRPr sz="2175" b="1">
                 <a:solidFill>
                   <a:srgbClr val="102F43"/>
@@ -7527,6 +7912,7 @@
               </a:defRPr>
             </a:lvl4pPr>
             <a:lvl5pPr>
+              <a:buNone/>
               <a:defRPr sz="2175" b="1">
                 <a:solidFill>
                   <a:srgbClr val="102F43"/>
@@ -7537,6 +7923,7 @@
               </a:defRPr>
             </a:lvl5pPr>
             <a:lvl6pPr>
+              <a:buNone/>
               <a:defRPr sz="2175" b="1">
                 <a:solidFill>
                   <a:srgbClr val="102F43"/>
@@ -7547,6 +7934,7 @@
               </a:defRPr>
             </a:lvl6pPr>
             <a:lvl7pPr>
+              <a:buNone/>
               <a:defRPr sz="2175" b="1">
                 <a:solidFill>
                   <a:srgbClr val="102F43"/>
@@ -7557,6 +7945,7 @@
               </a:defRPr>
             </a:lvl7pPr>
             <a:lvl8pPr>
+              <a:buNone/>
               <a:defRPr sz="2175" b="1">
                 <a:solidFill>
                   <a:srgbClr val="102F43"/>
@@ -7567,6 +7956,7 @@
               </a:defRPr>
             </a:lvl8pPr>
             <a:lvl9pPr>
+              <a:buNone/>
               <a:defRPr sz="2175" b="1">
                 <a:solidFill>
                   <a:srgbClr val="102F43"/>
@@ -7579,6 +7969,7 @@
           </a:lstStyle>
           <a:p xmlns:a="http://schemas.openxmlformats.org/drawingml/2006/main">
             <a:pPr>
+              <a:buNone/>
               <a:defRPr sz="2175" b="1">
                 <a:solidFill>
                   <a:srgbClr val="102F43"/>
@@ -7643,6 +8034,7 @@
               </a:defRPr>
             </a:defPPr>
             <a:lvl1pPr>
+              <a:buNone/>
               <a:defRPr sz="2250" b="1">
                 <a:solidFill>
                   <a:srgbClr val="00A9D6"/>
@@ -7653,6 +8045,7 @@
               </a:defRPr>
             </a:lvl1pPr>
             <a:lvl2pPr>
+              <a:buNone/>
               <a:defRPr sz="2250" b="1">
                 <a:solidFill>
                   <a:srgbClr val="00A9D6"/>
@@ -7663,6 +8056,7 @@
               </a:defRPr>
             </a:lvl2pPr>
             <a:lvl3pPr>
+              <a:buNone/>
               <a:defRPr sz="2250" b="1">
                 <a:solidFill>
                   <a:srgbClr val="00A9D6"/>
@@ -7673,6 +8067,7 @@
               </a:defRPr>
             </a:lvl3pPr>
             <a:lvl4pPr>
+              <a:buNone/>
               <a:defRPr sz="2250" b="1">
                 <a:solidFill>
                   <a:srgbClr val="00A9D6"/>
@@ -7683,6 +8078,7 @@
               </a:defRPr>
             </a:lvl4pPr>
             <a:lvl5pPr>
+              <a:buNone/>
               <a:defRPr sz="2250" b="1">
                 <a:solidFill>
                   <a:srgbClr val="00A9D6"/>
@@ -7693,6 +8089,7 @@
               </a:defRPr>
             </a:lvl5pPr>
             <a:lvl6pPr>
+              <a:buNone/>
               <a:defRPr sz="2250" b="1">
                 <a:solidFill>
                   <a:srgbClr val="00A9D6"/>
@@ -7703,6 +8100,7 @@
               </a:defRPr>
             </a:lvl6pPr>
             <a:lvl7pPr>
+              <a:buNone/>
               <a:defRPr sz="2250" b="1">
                 <a:solidFill>
                   <a:srgbClr val="00A9D6"/>
@@ -7713,6 +8111,7 @@
               </a:defRPr>
             </a:lvl7pPr>
             <a:lvl8pPr>
+              <a:buNone/>
               <a:defRPr sz="2250" b="1">
                 <a:solidFill>
                   <a:srgbClr val="00A9D6"/>
@@ -7723,6 +8122,7 @@
               </a:defRPr>
             </a:lvl8pPr>
             <a:lvl9pPr>
+              <a:buNone/>
               <a:defRPr sz="2250" b="1">
                 <a:solidFill>
                   <a:srgbClr val="00A9D6"/>
@@ -7735,6 +8135,7 @@
           </a:lstStyle>
           <a:p xmlns:a="http://schemas.openxmlformats.org/drawingml/2006/main">
             <a:pPr>
+              <a:buNone/>
               <a:defRPr sz="2250" b="1">
                 <a:solidFill>
                   <a:srgbClr val="00A9D6"/>
@@ -7799,6 +8200,7 @@
               </a:defRPr>
             </a:defPPr>
             <a:lvl1pPr>
+              <a:buNone/>
               <a:defRPr sz="1950" b="0">
                 <a:solidFill>
                   <a:srgbClr val="102F43"/>
@@ -7809,6 +8211,7 @@
               </a:defRPr>
             </a:lvl1pPr>
             <a:lvl2pPr>
+              <a:buNone/>
               <a:defRPr sz="1950" b="0">
                 <a:solidFill>
                   <a:srgbClr val="102F43"/>
@@ -7819,6 +8222,7 @@
               </a:defRPr>
             </a:lvl2pPr>
             <a:lvl3pPr>
+              <a:buNone/>
               <a:defRPr sz="1950" b="0">
                 <a:solidFill>
                   <a:srgbClr val="102F43"/>
@@ -7829,6 +8233,7 @@
               </a:defRPr>
             </a:lvl3pPr>
             <a:lvl4pPr>
+              <a:buNone/>
               <a:defRPr sz="1950" b="0">
                 <a:solidFill>
                   <a:srgbClr val="102F43"/>
@@ -7839,6 +8244,7 @@
               </a:defRPr>
             </a:lvl4pPr>
             <a:lvl5pPr>
+              <a:buNone/>
               <a:defRPr sz="1950" b="0">
                 <a:solidFill>
                   <a:srgbClr val="102F43"/>
@@ -7849,6 +8255,7 @@
               </a:defRPr>
             </a:lvl5pPr>
             <a:lvl6pPr>
+              <a:buNone/>
               <a:defRPr sz="1950" b="0">
                 <a:solidFill>
                   <a:srgbClr val="102F43"/>
@@ -7859,6 +8266,7 @@
               </a:defRPr>
             </a:lvl6pPr>
             <a:lvl7pPr>
+              <a:buNone/>
               <a:defRPr sz="1950" b="0">
                 <a:solidFill>
                   <a:srgbClr val="102F43"/>
@@ -7869,6 +8277,7 @@
               </a:defRPr>
             </a:lvl7pPr>
             <a:lvl8pPr>
+              <a:buNone/>
               <a:defRPr sz="1950" b="0">
                 <a:solidFill>
                   <a:srgbClr val="102F43"/>
@@ -7879,6 +8288,7 @@
               </a:defRPr>
             </a:lvl8pPr>
             <a:lvl9pPr>
+              <a:buNone/>
               <a:defRPr sz="1950" b="0">
                 <a:solidFill>
                   <a:srgbClr val="102F43"/>
@@ -7891,6 +8301,7 @@
           </a:lstStyle>
           <a:p xmlns:a="http://schemas.openxmlformats.org/drawingml/2006/main">
             <a:pPr>
+              <a:buNone/>
               <a:defRPr sz="1950" b="0">
                 <a:solidFill>
                   <a:srgbClr val="102F43"/>
@@ -7914,6 +8325,7 @@
           </a:p>
           <a:p xmlns:a="http://schemas.openxmlformats.org/drawingml/2006/main">
             <a:pPr>
+              <a:buNone/>
               <a:defRPr sz="1950" b="0">
                 <a:solidFill>
                   <a:srgbClr val="102F43"/>
@@ -7937,6 +8349,7 @@
           </a:p>
           <a:p xmlns:a="http://schemas.openxmlformats.org/drawingml/2006/main">
             <a:pPr>
+              <a:buNone/>
               <a:defRPr sz="1950" b="0">
                 <a:solidFill>
                   <a:srgbClr val="102F43"/>
@@ -7960,6 +8373,7 @@
           </a:p>
           <a:p xmlns:a="http://schemas.openxmlformats.org/drawingml/2006/main">
             <a:pPr>
+              <a:buNone/>
               <a:defRPr sz="1950" b="0">
                 <a:solidFill>
                   <a:srgbClr val="102F43"/>
@@ -7983,6 +8397,7 @@
           </a:p>
           <a:p xmlns:a="http://schemas.openxmlformats.org/drawingml/2006/main">
             <a:pPr>
+              <a:buNone/>
               <a:defRPr sz="1950" b="0">
                 <a:solidFill>
                   <a:srgbClr val="102F43"/>
@@ -8006,6 +8421,7 @@
           </a:p>
           <a:p xmlns:a="http://schemas.openxmlformats.org/drawingml/2006/main">
             <a:pPr>
+              <a:buNone/>
               <a:defRPr sz="1950" b="0">
                 <a:solidFill>
                   <a:srgbClr val="102F43"/>
@@ -8029,6 +8445,7 @@
           </a:p>
           <a:p xmlns:a="http://schemas.openxmlformats.org/drawingml/2006/main">
             <a:pPr>
+              <a:buNone/>
               <a:defRPr sz="1950" b="0">
                 <a:solidFill>
                   <a:srgbClr val="102F43"/>
@@ -8052,6 +8469,7 @@
           </a:p>
           <a:p xmlns:a="http://schemas.openxmlformats.org/drawingml/2006/main">
             <a:pPr>
+              <a:buNone/>
               <a:defRPr sz="1950" b="0">
                 <a:solidFill>
                   <a:srgbClr val="102F43"/>
@@ -8080,7 +8498,7 @@
           <p:cNvPr id="7" name="">
             <a:extLst xmlns:a="http://schemas.openxmlformats.org/drawingml/2006/main">
               <a:ext uri="{FF2B5EF4-FFF2-40B4-BE49-F238E27FC236}">
-                <a16:creationId xmlns:a16="http://schemas.microsoft.com/office/drawing/2014/main" id="{6953EE65-BC4D-4B61-9167-D60825563964}"/>
+                <a16:creationId xmlns:a16="http://schemas.microsoft.com/office/drawing/2014/main" id="{0F0099B0-A775-4F40-A9D1-2E333E0E96B0}"/>
               </a:ext>
             </a:extLst>
           </p:cNvPr>
@@ -8090,7 +8508,7 @@
           <p:nvPr/>
         </p:nvPicPr>
         <p:blipFill>
-          <a:blip xmlns:r="http://schemas.openxmlformats.org/officeDocument/2006/relationships" xmlns:a="http://schemas.openxmlformats.org/drawingml/2006/main" r:embed="R08a8547ee0eb4798"/>
+          <a:blip xmlns:r="http://schemas.openxmlformats.org/officeDocument/2006/relationships" xmlns:a="http://schemas.openxmlformats.org/drawingml/2006/main" r:embed="R79b2675b4c794e31"/>
           <a:stretch xmlns:a="http://schemas.openxmlformats.org/drawingml/2006/main"/>
         </p:blipFill>
         <p:spPr>
@@ -8144,6 +8562,7 @@
               </a:defRPr>
             </a:defPPr>
             <a:lvl1pPr>
+              <a:buNone/>
               <a:defRPr sz="1875" b="0">
                 <a:solidFill>
                   <a:srgbClr val="526B7C"/>
@@ -8154,6 +8573,7 @@
               </a:defRPr>
             </a:lvl1pPr>
             <a:lvl2pPr>
+              <a:buNone/>
               <a:defRPr sz="1875" b="0">
                 <a:solidFill>
                   <a:srgbClr val="526B7C"/>
@@ -8164,6 +8584,7 @@
               </a:defRPr>
             </a:lvl2pPr>
             <a:lvl3pPr>
+              <a:buNone/>
               <a:defRPr sz="1875" b="0">
                 <a:solidFill>
                   <a:srgbClr val="526B7C"/>
@@ -8174,6 +8595,7 @@
               </a:defRPr>
             </a:lvl3pPr>
             <a:lvl4pPr>
+              <a:buNone/>
               <a:defRPr sz="1875" b="0">
                 <a:solidFill>
                   <a:srgbClr val="526B7C"/>
@@ -8184,6 +8606,7 @@
               </a:defRPr>
             </a:lvl4pPr>
             <a:lvl5pPr>
+              <a:buNone/>
               <a:defRPr sz="1875" b="0">
                 <a:solidFill>
                   <a:srgbClr val="526B7C"/>
@@ -8194,6 +8617,7 @@
               </a:defRPr>
             </a:lvl5pPr>
             <a:lvl6pPr>
+              <a:buNone/>
               <a:defRPr sz="1875" b="0">
                 <a:solidFill>
                   <a:srgbClr val="526B7C"/>
@@ -8204,6 +8628,7 @@
               </a:defRPr>
             </a:lvl6pPr>
             <a:lvl7pPr>
+              <a:buNone/>
               <a:defRPr sz="1875" b="0">
                 <a:solidFill>
                   <a:srgbClr val="526B7C"/>
@@ -8214,6 +8639,7 @@
               </a:defRPr>
             </a:lvl7pPr>
             <a:lvl8pPr>
+              <a:buNone/>
               <a:defRPr sz="1875" b="0">
                 <a:solidFill>
                   <a:srgbClr val="526B7C"/>
@@ -8224,6 +8650,7 @@
               </a:defRPr>
             </a:lvl8pPr>
             <a:lvl9pPr>
+              <a:buNone/>
               <a:defRPr sz="1875" b="0">
                 <a:solidFill>
                   <a:srgbClr val="526B7C"/>
@@ -8236,6 +8663,7 @@
           </a:lstStyle>
           <a:p xmlns:a="http://schemas.openxmlformats.org/drawingml/2006/main">
             <a:pPr>
+              <a:buNone/>
               <a:defRPr sz="1875" b="0">
                 <a:solidFill>
                   <a:srgbClr val="526B7C"/>
@@ -8259,6 +8687,7 @@
           </a:p>
           <a:p xmlns:a="http://schemas.openxmlformats.org/drawingml/2006/main">
             <a:pPr>
+              <a:buNone/>
               <a:defRPr sz="1875" b="0">
                 <a:solidFill>
                   <a:srgbClr val="526B7C"/>
@@ -8352,6 +8781,7 @@
               </a:defRPr>
             </a:defPPr>
             <a:lvl1pPr>
+              <a:buNone/>
               <a:defRPr sz="3450" b="1">
                 <a:solidFill>
                   <a:srgbClr val="FFFFFF"/>
@@ -8362,6 +8792,7 @@
               </a:defRPr>
             </a:lvl1pPr>
             <a:lvl2pPr>
+              <a:buNone/>
               <a:defRPr sz="3450" b="1">
                 <a:solidFill>
                   <a:srgbClr val="FFFFFF"/>
@@ -8372,6 +8803,7 @@
               </a:defRPr>
             </a:lvl2pPr>
             <a:lvl3pPr>
+              <a:buNone/>
               <a:defRPr sz="3450" b="1">
                 <a:solidFill>
                   <a:srgbClr val="FFFFFF"/>
@@ -8382,6 +8814,7 @@
               </a:defRPr>
             </a:lvl3pPr>
             <a:lvl4pPr>
+              <a:buNone/>
               <a:defRPr sz="3450" b="1">
                 <a:solidFill>
                   <a:srgbClr val="FFFFFF"/>
@@ -8392,6 +8825,7 @@
               </a:defRPr>
             </a:lvl4pPr>
             <a:lvl5pPr>
+              <a:buNone/>
               <a:defRPr sz="3450" b="1">
                 <a:solidFill>
                   <a:srgbClr val="FFFFFF"/>
@@ -8402,6 +8836,7 @@
               </a:defRPr>
             </a:lvl5pPr>
             <a:lvl6pPr>
+              <a:buNone/>
               <a:defRPr sz="3450" b="1">
                 <a:solidFill>
                   <a:srgbClr val="FFFFFF"/>
@@ -8412,6 +8847,7 @@
               </a:defRPr>
             </a:lvl6pPr>
             <a:lvl7pPr>
+              <a:buNone/>
               <a:defRPr sz="3450" b="1">
                 <a:solidFill>
                   <a:srgbClr val="FFFFFF"/>
@@ -8422,6 +8858,7 @@
               </a:defRPr>
             </a:lvl7pPr>
             <a:lvl8pPr>
+              <a:buNone/>
               <a:defRPr sz="3450" b="1">
                 <a:solidFill>
                   <a:srgbClr val="FFFFFF"/>
@@ -8432,6 +8869,7 @@
               </a:defRPr>
             </a:lvl8pPr>
             <a:lvl9pPr>
+              <a:buNone/>
               <a:defRPr sz="3450" b="1">
                 <a:solidFill>
                   <a:srgbClr val="FFFFFF"/>
@@ -8444,6 +8882,7 @@
           </a:lstStyle>
           <a:p xmlns:a="http://schemas.openxmlformats.org/drawingml/2006/main">
             <a:pPr>
+              <a:buNone/>
               <a:defRPr sz="3450" b="1">
                 <a:solidFill>
                   <a:srgbClr val="FFFFFF"/>
@@ -8508,6 +8947,7 @@
               </a:defRPr>
             </a:defPPr>
             <a:lvl1pPr>
+              <a:buNone/>
               <a:defRPr sz="1200" b="0">
                 <a:solidFill>
                   <a:srgbClr val="B9D0DE"/>
@@ -8518,6 +8958,7 @@
               </a:defRPr>
             </a:lvl1pPr>
             <a:lvl2pPr>
+              <a:buNone/>
               <a:defRPr sz="1200" b="0">
                 <a:solidFill>
                   <a:srgbClr val="B9D0DE"/>
@@ -8528,6 +8969,7 @@
               </a:defRPr>
             </a:lvl2pPr>
             <a:lvl3pPr>
+              <a:buNone/>
               <a:defRPr sz="1200" b="0">
                 <a:solidFill>
                   <a:srgbClr val="B9D0DE"/>
@@ -8538,6 +8980,7 @@
               </a:defRPr>
             </a:lvl3pPr>
             <a:lvl4pPr>
+              <a:buNone/>
               <a:defRPr sz="1200" b="0">
                 <a:solidFill>
                   <a:srgbClr val="B9D0DE"/>
@@ -8548,6 +8991,7 @@
               </a:defRPr>
             </a:lvl4pPr>
             <a:lvl5pPr>
+              <a:buNone/>
               <a:defRPr sz="1200" b="0">
                 <a:solidFill>
                   <a:srgbClr val="B9D0DE"/>
@@ -8558,6 +9002,7 @@
               </a:defRPr>
             </a:lvl5pPr>
             <a:lvl6pPr>
+              <a:buNone/>
               <a:defRPr sz="1200" b="0">
                 <a:solidFill>
                   <a:srgbClr val="B9D0DE"/>
@@ -8568,6 +9013,7 @@
               </a:defRPr>
             </a:lvl6pPr>
             <a:lvl7pPr>
+              <a:buNone/>
               <a:defRPr sz="1200" b="0">
                 <a:solidFill>
                   <a:srgbClr val="B9D0DE"/>
@@ -8578,6 +9024,7 @@
               </a:defRPr>
             </a:lvl7pPr>
             <a:lvl8pPr>
+              <a:buNone/>
               <a:defRPr sz="1200" b="0">
                 <a:solidFill>
                   <a:srgbClr val="B9D0DE"/>
@@ -8588,6 +9035,7 @@
               </a:defRPr>
             </a:lvl8pPr>
             <a:lvl9pPr>
+              <a:buNone/>
               <a:defRPr sz="1200" b="0">
                 <a:solidFill>
                   <a:srgbClr val="B9D0DE"/>
@@ -8600,6 +9048,7 @@
           </a:lstStyle>
           <a:p xmlns:a="http://schemas.openxmlformats.org/drawingml/2006/main">
             <a:pPr>
+              <a:buNone/>
               <a:defRPr sz="1200" b="0">
                 <a:solidFill>
                   <a:srgbClr val="B9D0DE"/>
@@ -8664,6 +9113,7 @@
               </a:defRPr>
             </a:defPPr>
             <a:lvl1pPr>
+              <a:buNone/>
               <a:defRPr sz="1200" b="0">
                 <a:solidFill>
                   <a:srgbClr val="B9D0DE"/>
@@ -8674,6 +9124,7 @@
               </a:defRPr>
             </a:lvl1pPr>
             <a:lvl2pPr>
+              <a:buNone/>
               <a:defRPr sz="1200" b="0">
                 <a:solidFill>
                   <a:srgbClr val="B9D0DE"/>
@@ -8684,6 +9135,7 @@
               </a:defRPr>
             </a:lvl2pPr>
             <a:lvl3pPr>
+              <a:buNone/>
               <a:defRPr sz="1200" b="0">
                 <a:solidFill>
                   <a:srgbClr val="B9D0DE"/>
@@ -8694,6 +9146,7 @@
               </a:defRPr>
             </a:lvl3pPr>
             <a:lvl4pPr>
+              <a:buNone/>
               <a:defRPr sz="1200" b="0">
                 <a:solidFill>
                   <a:srgbClr val="B9D0DE"/>
@@ -8704,6 +9157,7 @@
               </a:defRPr>
             </a:lvl4pPr>
             <a:lvl5pPr>
+              <a:buNone/>
               <a:defRPr sz="1200" b="0">
                 <a:solidFill>
                   <a:srgbClr val="B9D0DE"/>
@@ -8714,6 +9168,7 @@
               </a:defRPr>
             </a:lvl5pPr>
             <a:lvl6pPr>
+              <a:buNone/>
               <a:defRPr sz="1200" b="0">
                 <a:solidFill>
                   <a:srgbClr val="B9D0DE"/>
@@ -8724,6 +9179,7 @@
               </a:defRPr>
             </a:lvl6pPr>
             <a:lvl7pPr>
+              <a:buNone/>
               <a:defRPr sz="1200" b="0">
                 <a:solidFill>
                   <a:srgbClr val="B9D0DE"/>
@@ -8734,6 +9190,7 @@
               </a:defRPr>
             </a:lvl7pPr>
             <a:lvl8pPr>
+              <a:buNone/>
               <a:defRPr sz="1200" b="0">
                 <a:solidFill>
                   <a:srgbClr val="B9D0DE"/>
@@ -8744,6 +9201,7 @@
               </a:defRPr>
             </a:lvl8pPr>
             <a:lvl9pPr>
+              <a:buNone/>
               <a:defRPr sz="1200" b="0">
                 <a:solidFill>
                   <a:srgbClr val="B9D0DE"/>
@@ -8756,6 +9214,7 @@
           </a:lstStyle>
           <a:p xmlns:a="http://schemas.openxmlformats.org/drawingml/2006/main">
             <a:pPr>
+              <a:buNone/>
               <a:defRPr sz="1200" b="0">
                 <a:solidFill>
                   <a:srgbClr val="B9D0DE"/>
@@ -8820,6 +9279,7 @@
               </a:defRPr>
             </a:defPPr>
             <a:lvl1pPr>
+              <a:buNone/>
               <a:defRPr sz="2175" b="1">
                 <a:solidFill>
                   <a:srgbClr val="FFFFFF"/>
@@ -8830,6 +9290,7 @@
               </a:defRPr>
             </a:lvl1pPr>
             <a:lvl2pPr>
+              <a:buNone/>
               <a:defRPr sz="2175" b="1">
                 <a:solidFill>
                   <a:srgbClr val="FFFFFF"/>
@@ -8840,6 +9301,7 @@
               </a:defRPr>
             </a:lvl2pPr>
             <a:lvl3pPr>
+              <a:buNone/>
               <a:defRPr sz="2175" b="1">
                 <a:solidFill>
                   <a:srgbClr val="FFFFFF"/>
@@ -8850,6 +9312,7 @@
               </a:defRPr>
             </a:lvl3pPr>
             <a:lvl4pPr>
+              <a:buNone/>
               <a:defRPr sz="2175" b="1">
                 <a:solidFill>
                   <a:srgbClr val="FFFFFF"/>
@@ -8860,6 +9323,7 @@
               </a:defRPr>
             </a:lvl4pPr>
             <a:lvl5pPr>
+              <a:buNone/>
               <a:defRPr sz="2175" b="1">
                 <a:solidFill>
                   <a:srgbClr val="FFFFFF"/>
@@ -8870,6 +9334,7 @@
               </a:defRPr>
             </a:lvl5pPr>
             <a:lvl6pPr>
+              <a:buNone/>
               <a:defRPr sz="2175" b="1">
                 <a:solidFill>
                   <a:srgbClr val="FFFFFF"/>
@@ -8880,6 +9345,7 @@
               </a:defRPr>
             </a:lvl6pPr>
             <a:lvl7pPr>
+              <a:buNone/>
               <a:defRPr sz="2175" b="1">
                 <a:solidFill>
                   <a:srgbClr val="FFFFFF"/>
@@ -8890,6 +9356,7 @@
               </a:defRPr>
             </a:lvl7pPr>
             <a:lvl8pPr>
+              <a:buNone/>
               <a:defRPr sz="2175" b="1">
                 <a:solidFill>
                   <a:srgbClr val="FFFFFF"/>
@@ -8900,6 +9367,7 @@
               </a:defRPr>
             </a:lvl8pPr>
             <a:lvl9pPr>
+              <a:buNone/>
               <a:defRPr sz="2175" b="1">
                 <a:solidFill>
                   <a:srgbClr val="FFFFFF"/>
@@ -8912,6 +9380,7 @@
           </a:lstStyle>
           <a:p xmlns:a="http://schemas.openxmlformats.org/drawingml/2006/main">
             <a:pPr>
+              <a:buNone/>
               <a:defRPr sz="2175" b="1">
                 <a:solidFill>
                   <a:srgbClr val="FFFFFF"/>
@@ -8976,6 +9445,7 @@
               </a:defRPr>
             </a:defPPr>
             <a:lvl1pPr>
+              <a:buNone/>
               <a:defRPr sz="1875" b="0">
                 <a:solidFill>
                   <a:srgbClr val="B9D0DE"/>
@@ -8986,6 +9456,7 @@
               </a:defRPr>
             </a:lvl1pPr>
             <a:lvl2pPr>
+              <a:buNone/>
               <a:defRPr sz="1875" b="0">
                 <a:solidFill>
                   <a:srgbClr val="B9D0DE"/>
@@ -8996,6 +9467,7 @@
               </a:defRPr>
             </a:lvl2pPr>
             <a:lvl3pPr>
+              <a:buNone/>
               <a:defRPr sz="1875" b="0">
                 <a:solidFill>
                   <a:srgbClr val="B9D0DE"/>
@@ -9006,6 +9478,7 @@
               </a:defRPr>
             </a:lvl3pPr>
             <a:lvl4pPr>
+              <a:buNone/>
               <a:defRPr sz="1875" b="0">
                 <a:solidFill>
                   <a:srgbClr val="B9D0DE"/>
@@ -9016,6 +9489,7 @@
               </a:defRPr>
             </a:lvl4pPr>
             <a:lvl5pPr>
+              <a:buNone/>
               <a:defRPr sz="1875" b="0">
                 <a:solidFill>
                   <a:srgbClr val="B9D0DE"/>
@@ -9026,6 +9500,7 @@
               </a:defRPr>
             </a:lvl5pPr>
             <a:lvl6pPr>
+              <a:buNone/>
               <a:defRPr sz="1875" b="0">
                 <a:solidFill>
                   <a:srgbClr val="B9D0DE"/>
@@ -9036,6 +9511,7 @@
               </a:defRPr>
             </a:lvl6pPr>
             <a:lvl7pPr>
+              <a:buNone/>
               <a:defRPr sz="1875" b="0">
                 <a:solidFill>
                   <a:srgbClr val="B9D0DE"/>
@@ -9046,6 +9522,7 @@
               </a:defRPr>
             </a:lvl7pPr>
             <a:lvl8pPr>
+              <a:buNone/>
               <a:defRPr sz="1875" b="0">
                 <a:solidFill>
                   <a:srgbClr val="B9D0DE"/>
@@ -9056,6 +9533,7 @@
               </a:defRPr>
             </a:lvl8pPr>
             <a:lvl9pPr>
+              <a:buNone/>
               <a:defRPr sz="1875" b="0">
                 <a:solidFill>
                   <a:srgbClr val="B9D0DE"/>
@@ -9068,6 +9546,7 @@
           </a:lstStyle>
           <a:p xmlns:a="http://schemas.openxmlformats.org/drawingml/2006/main">
             <a:pPr>
+              <a:buNone/>
               <a:defRPr sz="1875" b="0">
                 <a:solidFill>
                   <a:srgbClr val="B9D0DE"/>
@@ -9091,6 +9570,7 @@
           </a:p>
           <a:p xmlns:a="http://schemas.openxmlformats.org/drawingml/2006/main">
             <a:pPr>
+              <a:buNone/>
               <a:defRPr sz="1875" b="0">
                 <a:solidFill>
                   <a:srgbClr val="B9D0DE"/>
@@ -9114,6 +9594,7 @@
           </a:p>
           <a:p xmlns:a="http://schemas.openxmlformats.org/drawingml/2006/main">
             <a:pPr>
+              <a:buNone/>
               <a:defRPr sz="1875" b="0">
                 <a:solidFill>
                   <a:srgbClr val="B9D0DE"/>
@@ -9178,6 +9659,7 @@
               </a:defRPr>
             </a:defPPr>
             <a:lvl1pPr>
+              <a:buNone/>
               <a:defRPr sz="2175" b="1">
                 <a:solidFill>
                   <a:srgbClr val="FFFFFF"/>
@@ -9188,6 +9670,7 @@
               </a:defRPr>
             </a:lvl1pPr>
             <a:lvl2pPr>
+              <a:buNone/>
               <a:defRPr sz="2175" b="1">
                 <a:solidFill>
                   <a:srgbClr val="FFFFFF"/>
@@ -9198,6 +9681,7 @@
               </a:defRPr>
             </a:lvl2pPr>
             <a:lvl3pPr>
+              <a:buNone/>
               <a:defRPr sz="2175" b="1">
                 <a:solidFill>
                   <a:srgbClr val="FFFFFF"/>
@@ -9208,6 +9692,7 @@
               </a:defRPr>
             </a:lvl3pPr>
             <a:lvl4pPr>
+              <a:buNone/>
               <a:defRPr sz="2175" b="1">
                 <a:solidFill>
                   <a:srgbClr val="FFFFFF"/>
@@ -9218,6 +9703,7 @@
               </a:defRPr>
             </a:lvl4pPr>
             <a:lvl5pPr>
+              <a:buNone/>
               <a:defRPr sz="2175" b="1">
                 <a:solidFill>
                   <a:srgbClr val="FFFFFF"/>
@@ -9228,6 +9714,7 @@
               </a:defRPr>
             </a:lvl5pPr>
             <a:lvl6pPr>
+              <a:buNone/>
               <a:defRPr sz="2175" b="1">
                 <a:solidFill>
                   <a:srgbClr val="FFFFFF"/>
@@ -9238,6 +9725,7 @@
               </a:defRPr>
             </a:lvl6pPr>
             <a:lvl7pPr>
+              <a:buNone/>
               <a:defRPr sz="2175" b="1">
                 <a:solidFill>
                   <a:srgbClr val="FFFFFF"/>
@@ -9248,6 +9736,7 @@
               </a:defRPr>
             </a:lvl7pPr>
             <a:lvl8pPr>
+              <a:buNone/>
               <a:defRPr sz="2175" b="1">
                 <a:solidFill>
                   <a:srgbClr val="FFFFFF"/>
@@ -9258,6 +9747,7 @@
               </a:defRPr>
             </a:lvl8pPr>
             <a:lvl9pPr>
+              <a:buNone/>
               <a:defRPr sz="2175" b="1">
                 <a:solidFill>
                   <a:srgbClr val="FFFFFF"/>
@@ -9270,6 +9760,7 @@
           </a:lstStyle>
           <a:p xmlns:a="http://schemas.openxmlformats.org/drawingml/2006/main">
             <a:pPr>
+              <a:buNone/>
               <a:defRPr sz="2175" b="1">
                 <a:solidFill>
                   <a:srgbClr val="FFFFFF"/>
@@ -9334,6 +9825,7 @@
               </a:defRPr>
             </a:defPPr>
             <a:lvl1pPr>
+              <a:buNone/>
               <a:defRPr sz="1875" b="0">
                 <a:solidFill>
                   <a:srgbClr val="B9D0DE"/>
@@ -9344,6 +9836,7 @@
               </a:defRPr>
             </a:lvl1pPr>
             <a:lvl2pPr>
+              <a:buNone/>
               <a:defRPr sz="1875" b="0">
                 <a:solidFill>
                   <a:srgbClr val="B9D0DE"/>
@@ -9354,6 +9847,7 @@
               </a:defRPr>
             </a:lvl2pPr>
             <a:lvl3pPr>
+              <a:buNone/>
               <a:defRPr sz="1875" b="0">
                 <a:solidFill>
                   <a:srgbClr val="B9D0DE"/>
@@ -9364,6 +9858,7 @@
               </a:defRPr>
             </a:lvl3pPr>
             <a:lvl4pPr>
+              <a:buNone/>
               <a:defRPr sz="1875" b="0">
                 <a:solidFill>
                   <a:srgbClr val="B9D0DE"/>
@@ -9374,6 +9869,7 @@
               </a:defRPr>
             </a:lvl4pPr>
             <a:lvl5pPr>
+              <a:buNone/>
               <a:defRPr sz="1875" b="0">
                 <a:solidFill>
                   <a:srgbClr val="B9D0DE"/>
@@ -9384,6 +9880,7 @@
               </a:defRPr>
             </a:lvl5pPr>
             <a:lvl6pPr>
+              <a:buNone/>
               <a:defRPr sz="1875" b="0">
                 <a:solidFill>
                   <a:srgbClr val="B9D0DE"/>
@@ -9394,6 +9891,7 @@
               </a:defRPr>
             </a:lvl6pPr>
             <a:lvl7pPr>
+              <a:buNone/>
               <a:defRPr sz="1875" b="0">
                 <a:solidFill>
                   <a:srgbClr val="B9D0DE"/>
@@ -9404,6 +9902,7 @@
               </a:defRPr>
             </a:lvl7pPr>
             <a:lvl8pPr>
+              <a:buNone/>
               <a:defRPr sz="1875" b="0">
                 <a:solidFill>
                   <a:srgbClr val="B9D0DE"/>
@@ -9414,6 +9913,7 @@
               </a:defRPr>
             </a:lvl8pPr>
             <a:lvl9pPr>
+              <a:buNone/>
               <a:defRPr sz="1875" b="0">
                 <a:solidFill>
                   <a:srgbClr val="B9D0DE"/>
@@ -9426,6 +9926,7 @@
           </a:lstStyle>
           <a:p xmlns:a="http://schemas.openxmlformats.org/drawingml/2006/main">
             <a:pPr>
+              <a:buNone/>
               <a:defRPr sz="1875" b="0">
                 <a:solidFill>
                   <a:srgbClr val="B9D0DE"/>
@@ -9449,6 +9950,7 @@
           </a:p>
           <a:p xmlns:a="http://schemas.openxmlformats.org/drawingml/2006/main">
             <a:pPr>
+              <a:buNone/>
               <a:defRPr sz="1875" b="0">
                 <a:solidFill>
                   <a:srgbClr val="B9D0DE"/>
@@ -9472,6 +9974,7 @@
           </a:p>
           <a:p xmlns:a="http://schemas.openxmlformats.org/drawingml/2006/main">
             <a:pPr>
+              <a:buNone/>
               <a:defRPr sz="1875" b="0">
                 <a:solidFill>
                   <a:srgbClr val="B9D0DE"/>
@@ -9536,6 +10039,7 @@
               </a:defRPr>
             </a:defPPr>
             <a:lvl1pPr>
+              <a:buNone/>
               <a:defRPr sz="2175" b="1">
                 <a:solidFill>
                   <a:srgbClr val="FFFFFF"/>
@@ -9546,6 +10050,7 @@
               </a:defRPr>
             </a:lvl1pPr>
             <a:lvl2pPr>
+              <a:buNone/>
               <a:defRPr sz="2175" b="1">
                 <a:solidFill>
                   <a:srgbClr val="FFFFFF"/>
@@ -9556,6 +10061,7 @@
               </a:defRPr>
             </a:lvl2pPr>
             <a:lvl3pPr>
+              <a:buNone/>
               <a:defRPr sz="2175" b="1">
                 <a:solidFill>
                   <a:srgbClr val="FFFFFF"/>
@@ -9566,6 +10072,7 @@
               </a:defRPr>
             </a:lvl3pPr>
             <a:lvl4pPr>
+              <a:buNone/>
               <a:defRPr sz="2175" b="1">
                 <a:solidFill>
                   <a:srgbClr val="FFFFFF"/>
@@ -9576,6 +10083,7 @@
               </a:defRPr>
             </a:lvl4pPr>
             <a:lvl5pPr>
+              <a:buNone/>
               <a:defRPr sz="2175" b="1">
                 <a:solidFill>
                   <a:srgbClr val="FFFFFF"/>
@@ -9586,6 +10094,7 @@
               </a:defRPr>
             </a:lvl5pPr>
             <a:lvl6pPr>
+              <a:buNone/>
               <a:defRPr sz="2175" b="1">
                 <a:solidFill>
                   <a:srgbClr val="FFFFFF"/>
@@ -9596,6 +10105,7 @@
               </a:defRPr>
             </a:lvl6pPr>
             <a:lvl7pPr>
+              <a:buNone/>
               <a:defRPr sz="2175" b="1">
                 <a:solidFill>
                   <a:srgbClr val="FFFFFF"/>
@@ -9606,6 +10116,7 @@
               </a:defRPr>
             </a:lvl7pPr>
             <a:lvl8pPr>
+              <a:buNone/>
               <a:defRPr sz="2175" b="1">
                 <a:solidFill>
                   <a:srgbClr val="FFFFFF"/>
@@ -9616,6 +10127,7 @@
               </a:defRPr>
             </a:lvl8pPr>
             <a:lvl9pPr>
+              <a:buNone/>
               <a:defRPr sz="2175" b="1">
                 <a:solidFill>
                   <a:srgbClr val="FFFFFF"/>
@@ -9628,6 +10140,7 @@
           </a:lstStyle>
           <a:p xmlns:a="http://schemas.openxmlformats.org/drawingml/2006/main">
             <a:pPr>
+              <a:buNone/>
               <a:defRPr sz="2175" b="1">
                 <a:solidFill>
                   <a:srgbClr val="FFFFFF"/>
@@ -9692,6 +10205,7 @@
               </a:defRPr>
             </a:defPPr>
             <a:lvl1pPr>
+              <a:buNone/>
               <a:defRPr sz="1875" b="0">
                 <a:solidFill>
                   <a:srgbClr val="B9D0DE"/>
@@ -9702,6 +10216,7 @@
               </a:defRPr>
             </a:lvl1pPr>
             <a:lvl2pPr>
+              <a:buNone/>
               <a:defRPr sz="1875" b="0">
                 <a:solidFill>
                   <a:srgbClr val="B9D0DE"/>
@@ -9712,6 +10227,7 @@
               </a:defRPr>
             </a:lvl2pPr>
             <a:lvl3pPr>
+              <a:buNone/>
               <a:defRPr sz="1875" b="0">
                 <a:solidFill>
                   <a:srgbClr val="B9D0DE"/>
@@ -9722,6 +10238,7 @@
               </a:defRPr>
             </a:lvl3pPr>
             <a:lvl4pPr>
+              <a:buNone/>
               <a:defRPr sz="1875" b="0">
                 <a:solidFill>
                   <a:srgbClr val="B9D0DE"/>
@@ -9732,6 +10249,7 @@
               </a:defRPr>
             </a:lvl4pPr>
             <a:lvl5pPr>
+              <a:buNone/>
               <a:defRPr sz="1875" b="0">
                 <a:solidFill>
                   <a:srgbClr val="B9D0DE"/>
@@ -9742,6 +10260,7 @@
               </a:defRPr>
             </a:lvl5pPr>
             <a:lvl6pPr>
+              <a:buNone/>
               <a:defRPr sz="1875" b="0">
                 <a:solidFill>
                   <a:srgbClr val="B9D0DE"/>
@@ -9752,6 +10271,7 @@
               </a:defRPr>
             </a:lvl6pPr>
             <a:lvl7pPr>
+              <a:buNone/>
               <a:defRPr sz="1875" b="0">
                 <a:solidFill>
                   <a:srgbClr val="B9D0DE"/>
@@ -9762,6 +10282,7 @@
               </a:defRPr>
             </a:lvl7pPr>
             <a:lvl8pPr>
+              <a:buNone/>
               <a:defRPr sz="1875" b="0">
                 <a:solidFill>
                   <a:srgbClr val="B9D0DE"/>
@@ -9772,6 +10293,7 @@
               </a:defRPr>
             </a:lvl8pPr>
             <a:lvl9pPr>
+              <a:buNone/>
               <a:defRPr sz="1875" b="0">
                 <a:solidFill>
                   <a:srgbClr val="B9D0DE"/>
@@ -9784,6 +10306,7 @@
           </a:lstStyle>
           <a:p xmlns:a="http://schemas.openxmlformats.org/drawingml/2006/main">
             <a:pPr>
+              <a:buNone/>
               <a:defRPr sz="1875" b="0">
                 <a:solidFill>
                   <a:srgbClr val="B9D0DE"/>
@@ -9807,6 +10330,7 @@
           </a:p>
           <a:p xmlns:a="http://schemas.openxmlformats.org/drawingml/2006/main">
             <a:pPr>
+              <a:buNone/>
               <a:defRPr sz="1875" b="0">
                 <a:solidFill>
                   <a:srgbClr val="B9D0DE"/>
@@ -9830,6 +10354,7 @@
           </a:p>
           <a:p xmlns:a="http://schemas.openxmlformats.org/drawingml/2006/main">
             <a:pPr>
+              <a:buNone/>
               <a:defRPr sz="1875" b="0">
                 <a:solidFill>
                   <a:srgbClr val="B9D0DE"/>
@@ -9894,6 +10419,7 @@
               </a:defRPr>
             </a:defPPr>
             <a:lvl1pPr>
+              <a:buNone/>
               <a:defRPr sz="2175" b="1">
                 <a:solidFill>
                   <a:srgbClr val="FFFFFF"/>
@@ -9904,6 +10430,7 @@
               </a:defRPr>
             </a:lvl1pPr>
             <a:lvl2pPr>
+              <a:buNone/>
               <a:defRPr sz="2175" b="1">
                 <a:solidFill>
                   <a:srgbClr val="FFFFFF"/>
@@ -9914,6 +10441,7 @@
               </a:defRPr>
             </a:lvl2pPr>
             <a:lvl3pPr>
+              <a:buNone/>
               <a:defRPr sz="2175" b="1">
                 <a:solidFill>
                   <a:srgbClr val="FFFFFF"/>
@@ -9924,6 +10452,7 @@
               </a:defRPr>
             </a:lvl3pPr>
             <a:lvl4pPr>
+              <a:buNone/>
               <a:defRPr sz="2175" b="1">
                 <a:solidFill>
                   <a:srgbClr val="FFFFFF"/>
@@ -9934,6 +10463,7 @@
               </a:defRPr>
             </a:lvl4pPr>
             <a:lvl5pPr>
+              <a:buNone/>
               <a:defRPr sz="2175" b="1">
                 <a:solidFill>
                   <a:srgbClr val="FFFFFF"/>
@@ -9944,6 +10474,7 @@
               </a:defRPr>
             </a:lvl5pPr>
             <a:lvl6pPr>
+              <a:buNone/>
               <a:defRPr sz="2175" b="1">
                 <a:solidFill>
                   <a:srgbClr val="FFFFFF"/>
@@ -9954,6 +10485,7 @@
               </a:defRPr>
             </a:lvl6pPr>
             <a:lvl7pPr>
+              <a:buNone/>
               <a:defRPr sz="2175" b="1">
                 <a:solidFill>
                   <a:srgbClr val="FFFFFF"/>
@@ -9964,6 +10496,7 @@
               </a:defRPr>
             </a:lvl7pPr>
             <a:lvl8pPr>
+              <a:buNone/>
               <a:defRPr sz="2175" b="1">
                 <a:solidFill>
                   <a:srgbClr val="FFFFFF"/>
@@ -9974,6 +10507,7 @@
               </a:defRPr>
             </a:lvl8pPr>
             <a:lvl9pPr>
+              <a:buNone/>
               <a:defRPr sz="2175" b="1">
                 <a:solidFill>
                   <a:srgbClr val="FFFFFF"/>
@@ -9986,6 +10520,7 @@
           </a:lstStyle>
           <a:p xmlns:a="http://schemas.openxmlformats.org/drawingml/2006/main">
             <a:pPr>
+              <a:buNone/>
               <a:defRPr sz="2175" b="1">
                 <a:solidFill>
                   <a:srgbClr val="FFFFFF"/>
@@ -10050,6 +10585,7 @@
               </a:defRPr>
             </a:defPPr>
             <a:lvl1pPr>
+              <a:buNone/>
               <a:defRPr sz="1875" b="0">
                 <a:solidFill>
                   <a:srgbClr val="B9D0DE"/>
@@ -10060,6 +10596,7 @@
               </a:defRPr>
             </a:lvl1pPr>
             <a:lvl2pPr>
+              <a:buNone/>
               <a:defRPr sz="1875" b="0">
                 <a:solidFill>
                   <a:srgbClr val="B9D0DE"/>
@@ -10070,6 +10607,7 @@
               </a:defRPr>
             </a:lvl2pPr>
             <a:lvl3pPr>
+              <a:buNone/>
               <a:defRPr sz="1875" b="0">
                 <a:solidFill>
                   <a:srgbClr val="B9D0DE"/>
@@ -10080,6 +10618,7 @@
               </a:defRPr>
             </a:lvl3pPr>
             <a:lvl4pPr>
+              <a:buNone/>
               <a:defRPr sz="1875" b="0">
                 <a:solidFill>
                   <a:srgbClr val="B9D0DE"/>
@@ -10090,6 +10629,7 @@
               </a:defRPr>
             </a:lvl4pPr>
             <a:lvl5pPr>
+              <a:buNone/>
               <a:defRPr sz="1875" b="0">
                 <a:solidFill>
                   <a:srgbClr val="B9D0DE"/>
@@ -10100,6 +10640,7 @@
               </a:defRPr>
             </a:lvl5pPr>
             <a:lvl6pPr>
+              <a:buNone/>
               <a:defRPr sz="1875" b="0">
                 <a:solidFill>
                   <a:srgbClr val="B9D0DE"/>
@@ -10110,6 +10651,7 @@
               </a:defRPr>
             </a:lvl6pPr>
             <a:lvl7pPr>
+              <a:buNone/>
               <a:defRPr sz="1875" b="0">
                 <a:solidFill>
                   <a:srgbClr val="B9D0DE"/>
@@ -10120,6 +10662,7 @@
               </a:defRPr>
             </a:lvl7pPr>
             <a:lvl8pPr>
+              <a:buNone/>
               <a:defRPr sz="1875" b="0">
                 <a:solidFill>
                   <a:srgbClr val="B9D0DE"/>
@@ -10130,6 +10673,7 @@
               </a:defRPr>
             </a:lvl8pPr>
             <a:lvl9pPr>
+              <a:buNone/>
               <a:defRPr sz="1875" b="0">
                 <a:solidFill>
                   <a:srgbClr val="B9D0DE"/>
@@ -10142,6 +10686,7 @@
           </a:lstStyle>
           <a:p xmlns:a="http://schemas.openxmlformats.org/drawingml/2006/main">
             <a:pPr>
+              <a:buNone/>
               <a:defRPr sz="1875" b="0">
                 <a:solidFill>
                   <a:srgbClr val="B9D0DE"/>
@@ -10165,6 +10710,7 @@
           </a:p>
           <a:p xmlns:a="http://schemas.openxmlformats.org/drawingml/2006/main">
             <a:pPr>
+              <a:buNone/>
               <a:defRPr sz="1875" b="0">
                 <a:solidFill>
                   <a:srgbClr val="B9D0DE"/>
@@ -10188,6 +10734,7 @@
           </a:p>
           <a:p xmlns:a="http://schemas.openxmlformats.org/drawingml/2006/main">
             <a:pPr>
+              <a:buNone/>
               <a:defRPr sz="1875" b="0">
                 <a:solidFill>
                   <a:srgbClr val="B9D0DE"/>
@@ -10252,6 +10799,7 @@
               </a:defRPr>
             </a:defPPr>
             <a:lvl1pPr>
+              <a:buNone/>
               <a:defRPr sz="1725" b="1">
                 <a:solidFill>
                   <a:srgbClr val="00A9D6"/>
@@ -10262,6 +10810,7 @@
               </a:defRPr>
             </a:lvl1pPr>
             <a:lvl2pPr>
+              <a:buNone/>
               <a:defRPr sz="1725" b="1">
                 <a:solidFill>
                   <a:srgbClr val="00A9D6"/>
@@ -10272,6 +10821,7 @@
               </a:defRPr>
             </a:lvl2pPr>
             <a:lvl3pPr>
+              <a:buNone/>
               <a:defRPr sz="1725" b="1">
                 <a:solidFill>
                   <a:srgbClr val="00A9D6"/>
@@ -10282,6 +10832,7 @@
               </a:defRPr>
             </a:lvl3pPr>
             <a:lvl4pPr>
+              <a:buNone/>
               <a:defRPr sz="1725" b="1">
                 <a:solidFill>
                   <a:srgbClr val="00A9D6"/>
@@ -10292,6 +10843,7 @@
               </a:defRPr>
             </a:lvl4pPr>
             <a:lvl5pPr>
+              <a:buNone/>
               <a:defRPr sz="1725" b="1">
                 <a:solidFill>
                   <a:srgbClr val="00A9D6"/>
@@ -10302,6 +10854,7 @@
               </a:defRPr>
             </a:lvl5pPr>
             <a:lvl6pPr>
+              <a:buNone/>
               <a:defRPr sz="1725" b="1">
                 <a:solidFill>
                   <a:srgbClr val="00A9D6"/>
@@ -10312,6 +10865,7 @@
               </a:defRPr>
             </a:lvl6pPr>
             <a:lvl7pPr>
+              <a:buNone/>
               <a:defRPr sz="1725" b="1">
                 <a:solidFill>
                   <a:srgbClr val="00A9D6"/>
@@ -10322,6 +10876,7 @@
               </a:defRPr>
             </a:lvl7pPr>
             <a:lvl8pPr>
+              <a:buNone/>
               <a:defRPr sz="1725" b="1">
                 <a:solidFill>
                   <a:srgbClr val="00A9D6"/>
@@ -10332,6 +10887,7 @@
               </a:defRPr>
             </a:lvl8pPr>
             <a:lvl9pPr>
+              <a:buNone/>
               <a:defRPr sz="1725" b="1">
                 <a:solidFill>
                   <a:srgbClr val="00A9D6"/>
@@ -10344,6 +10900,7 @@
           </a:lstStyle>
           <a:p xmlns:a="http://schemas.openxmlformats.org/drawingml/2006/main">
             <a:pPr>
+              <a:buNone/>
               <a:defRPr sz="1725" b="1">
                 <a:solidFill>
                   <a:srgbClr val="00A9D6"/>
@@ -10437,6 +10994,7 @@
               </a:defRPr>
             </a:defPPr>
             <a:lvl1pPr>
+              <a:buNone/>
               <a:defRPr sz="3450" b="1">
                 <a:solidFill>
                   <a:srgbClr val="102F43"/>
@@ -10447,6 +11005,7 @@
               </a:defRPr>
             </a:lvl1pPr>
             <a:lvl2pPr>
+              <a:buNone/>
               <a:defRPr sz="3450" b="1">
                 <a:solidFill>
                   <a:srgbClr val="102F43"/>
@@ -10457,6 +11016,7 @@
               </a:defRPr>
             </a:lvl2pPr>
             <a:lvl3pPr>
+              <a:buNone/>
               <a:defRPr sz="3450" b="1">
                 <a:solidFill>
                   <a:srgbClr val="102F43"/>
@@ -10467,6 +11027,7 @@
               </a:defRPr>
             </a:lvl3pPr>
             <a:lvl4pPr>
+              <a:buNone/>
               <a:defRPr sz="3450" b="1">
                 <a:solidFill>
                   <a:srgbClr val="102F43"/>
@@ -10477,6 +11038,7 @@
               </a:defRPr>
             </a:lvl4pPr>
             <a:lvl5pPr>
+              <a:buNone/>
               <a:defRPr sz="3450" b="1">
                 <a:solidFill>
                   <a:srgbClr val="102F43"/>
@@ -10487,6 +11049,7 @@
               </a:defRPr>
             </a:lvl5pPr>
             <a:lvl6pPr>
+              <a:buNone/>
               <a:defRPr sz="3450" b="1">
                 <a:solidFill>
                   <a:srgbClr val="102F43"/>
@@ -10497,6 +11060,7 @@
               </a:defRPr>
             </a:lvl6pPr>
             <a:lvl7pPr>
+              <a:buNone/>
               <a:defRPr sz="3450" b="1">
                 <a:solidFill>
                   <a:srgbClr val="102F43"/>
@@ -10507,6 +11071,7 @@
               </a:defRPr>
             </a:lvl7pPr>
             <a:lvl8pPr>
+              <a:buNone/>
               <a:defRPr sz="3450" b="1">
                 <a:solidFill>
                   <a:srgbClr val="102F43"/>
@@ -10517,6 +11082,7 @@
               </a:defRPr>
             </a:lvl8pPr>
             <a:lvl9pPr>
+              <a:buNone/>
               <a:defRPr sz="3450" b="1">
                 <a:solidFill>
                   <a:srgbClr val="102F43"/>
@@ -10529,6 +11095,7 @@
           </a:lstStyle>
           <a:p xmlns:a="http://schemas.openxmlformats.org/drawingml/2006/main">
             <a:pPr>
+              <a:buNone/>
               <a:defRPr sz="3450" b="1">
                 <a:solidFill>
                   <a:srgbClr val="102F43"/>
@@ -10593,6 +11160,7 @@
               </a:defRPr>
             </a:defPPr>
             <a:lvl1pPr>
+              <a:buNone/>
               <a:defRPr sz="1200" b="0">
                 <a:solidFill>
                   <a:srgbClr val="526B7C"/>
@@ -10603,6 +11171,7 @@
               </a:defRPr>
             </a:lvl1pPr>
             <a:lvl2pPr>
+              <a:buNone/>
               <a:defRPr sz="1200" b="0">
                 <a:solidFill>
                   <a:srgbClr val="526B7C"/>
@@ -10613,6 +11182,7 @@
               </a:defRPr>
             </a:lvl2pPr>
             <a:lvl3pPr>
+              <a:buNone/>
               <a:defRPr sz="1200" b="0">
                 <a:solidFill>
                   <a:srgbClr val="526B7C"/>
@@ -10623,6 +11193,7 @@
               </a:defRPr>
             </a:lvl3pPr>
             <a:lvl4pPr>
+              <a:buNone/>
               <a:defRPr sz="1200" b="0">
                 <a:solidFill>
                   <a:srgbClr val="526B7C"/>
@@ -10633,6 +11204,7 @@
               </a:defRPr>
             </a:lvl4pPr>
             <a:lvl5pPr>
+              <a:buNone/>
               <a:defRPr sz="1200" b="0">
                 <a:solidFill>
                   <a:srgbClr val="526B7C"/>
@@ -10643,6 +11215,7 @@
               </a:defRPr>
             </a:lvl5pPr>
             <a:lvl6pPr>
+              <a:buNone/>
               <a:defRPr sz="1200" b="0">
                 <a:solidFill>
                   <a:srgbClr val="526B7C"/>
@@ -10653,6 +11226,7 @@
               </a:defRPr>
             </a:lvl6pPr>
             <a:lvl7pPr>
+              <a:buNone/>
               <a:defRPr sz="1200" b="0">
                 <a:solidFill>
                   <a:srgbClr val="526B7C"/>
@@ -10663,6 +11237,7 @@
               </a:defRPr>
             </a:lvl7pPr>
             <a:lvl8pPr>
+              <a:buNone/>
               <a:defRPr sz="1200" b="0">
                 <a:solidFill>
                   <a:srgbClr val="526B7C"/>
@@ -10673,6 +11248,7 @@
               </a:defRPr>
             </a:lvl8pPr>
             <a:lvl9pPr>
+              <a:buNone/>
               <a:defRPr sz="1200" b="0">
                 <a:solidFill>
                   <a:srgbClr val="526B7C"/>
@@ -10685,6 +11261,7 @@
           </a:lstStyle>
           <a:p xmlns:a="http://schemas.openxmlformats.org/drawingml/2006/main">
             <a:pPr>
+              <a:buNone/>
               <a:defRPr sz="1200" b="0">
                 <a:solidFill>
                   <a:srgbClr val="526B7C"/>
@@ -10749,6 +11326,7 @@
               </a:defRPr>
             </a:defPPr>
             <a:lvl1pPr>
+              <a:buNone/>
               <a:defRPr sz="1200" b="0">
                 <a:solidFill>
                   <a:srgbClr val="526B7C"/>
@@ -10759,6 +11337,7 @@
               </a:defRPr>
             </a:lvl1pPr>
             <a:lvl2pPr>
+              <a:buNone/>
               <a:defRPr sz="1200" b="0">
                 <a:solidFill>
                   <a:srgbClr val="526B7C"/>
@@ -10769,6 +11348,7 @@
               </a:defRPr>
             </a:lvl2pPr>
             <a:lvl3pPr>
+              <a:buNone/>
               <a:defRPr sz="1200" b="0">
                 <a:solidFill>
                   <a:srgbClr val="526B7C"/>
@@ -10779,6 +11359,7 @@
               </a:defRPr>
             </a:lvl3pPr>
             <a:lvl4pPr>
+              <a:buNone/>
               <a:defRPr sz="1200" b="0">
                 <a:solidFill>
                   <a:srgbClr val="526B7C"/>
@@ -10789,6 +11370,7 @@
               </a:defRPr>
             </a:lvl4pPr>
             <a:lvl5pPr>
+              <a:buNone/>
               <a:defRPr sz="1200" b="0">
                 <a:solidFill>
                   <a:srgbClr val="526B7C"/>
@@ -10799,6 +11381,7 @@
               </a:defRPr>
             </a:lvl5pPr>
             <a:lvl6pPr>
+              <a:buNone/>
               <a:defRPr sz="1200" b="0">
                 <a:solidFill>
                   <a:srgbClr val="526B7C"/>
@@ -10809,6 +11392,7 @@
               </a:defRPr>
             </a:lvl6pPr>
             <a:lvl7pPr>
+              <a:buNone/>
               <a:defRPr sz="1200" b="0">
                 <a:solidFill>
                   <a:srgbClr val="526B7C"/>
@@ -10819,6 +11403,7 @@
               </a:defRPr>
             </a:lvl7pPr>
             <a:lvl8pPr>
+              <a:buNone/>
               <a:defRPr sz="1200" b="0">
                 <a:solidFill>
                   <a:srgbClr val="526B7C"/>
@@ -10829,6 +11414,7 @@
               </a:defRPr>
             </a:lvl8pPr>
             <a:lvl9pPr>
+              <a:buNone/>
               <a:defRPr sz="1200" b="0">
                 <a:solidFill>
                   <a:srgbClr val="526B7C"/>
@@ -10841,6 +11427,7 @@
           </a:lstStyle>
           <a:p xmlns:a="http://schemas.openxmlformats.org/drawingml/2006/main">
             <a:pPr>
+              <a:buNone/>
               <a:defRPr sz="1200" b="0">
                 <a:solidFill>
                   <a:srgbClr val="526B7C"/>
@@ -10905,6 +11492,7 @@
               </a:defRPr>
             </a:defPPr>
             <a:lvl1pPr>
+              <a:buNone/>
               <a:defRPr sz="2175" b="1">
                 <a:solidFill>
                   <a:srgbClr val="102F43"/>
@@ -10915,6 +11503,7 @@
               </a:defRPr>
             </a:lvl1pPr>
             <a:lvl2pPr>
+              <a:buNone/>
               <a:defRPr sz="2175" b="1">
                 <a:solidFill>
                   <a:srgbClr val="102F43"/>
@@ -10925,6 +11514,7 @@
               </a:defRPr>
             </a:lvl2pPr>
             <a:lvl3pPr>
+              <a:buNone/>
               <a:defRPr sz="2175" b="1">
                 <a:solidFill>
                   <a:srgbClr val="102F43"/>
@@ -10935,6 +11525,7 @@
               </a:defRPr>
             </a:lvl3pPr>
             <a:lvl4pPr>
+              <a:buNone/>
               <a:defRPr sz="2175" b="1">
                 <a:solidFill>
                   <a:srgbClr val="102F43"/>
@@ -10945,6 +11536,7 @@
               </a:defRPr>
             </a:lvl4pPr>
             <a:lvl5pPr>
+              <a:buNone/>
               <a:defRPr sz="2175" b="1">
                 <a:solidFill>
                   <a:srgbClr val="102F43"/>
@@ -10955,6 +11547,7 @@
               </a:defRPr>
             </a:lvl5pPr>
             <a:lvl6pPr>
+              <a:buNone/>
               <a:defRPr sz="2175" b="1">
                 <a:solidFill>
                   <a:srgbClr val="102F43"/>
@@ -10965,6 +11558,7 @@
               </a:defRPr>
             </a:lvl6pPr>
             <a:lvl7pPr>
+              <a:buNone/>
               <a:defRPr sz="2175" b="1">
                 <a:solidFill>
                   <a:srgbClr val="102F43"/>
@@ -10975,6 +11569,7 @@
               </a:defRPr>
             </a:lvl7pPr>
             <a:lvl8pPr>
+              <a:buNone/>
               <a:defRPr sz="2175" b="1">
                 <a:solidFill>
                   <a:srgbClr val="102F43"/>
@@ -10985,6 +11580,7 @@
               </a:defRPr>
             </a:lvl8pPr>
             <a:lvl9pPr>
+              <a:buNone/>
               <a:defRPr sz="2175" b="1">
                 <a:solidFill>
                   <a:srgbClr val="102F43"/>
@@ -10997,6 +11593,7 @@
           </a:lstStyle>
           <a:p xmlns:a="http://schemas.openxmlformats.org/drawingml/2006/main">
             <a:pPr>
+              <a:buNone/>
               <a:defRPr sz="2175" b="1">
                 <a:solidFill>
                   <a:srgbClr val="102F43"/>
@@ -11061,6 +11658,7 @@
               </a:defRPr>
             </a:defPPr>
             <a:lvl1pPr>
+              <a:buNone/>
               <a:defRPr sz="1875" b="0">
                 <a:solidFill>
                   <a:srgbClr val="526B7C"/>
@@ -11071,6 +11669,7 @@
               </a:defRPr>
             </a:lvl1pPr>
             <a:lvl2pPr>
+              <a:buNone/>
               <a:defRPr sz="1875" b="0">
                 <a:solidFill>
                   <a:srgbClr val="526B7C"/>
@@ -11081,6 +11680,7 @@
               </a:defRPr>
             </a:lvl2pPr>
             <a:lvl3pPr>
+              <a:buNone/>
               <a:defRPr sz="1875" b="0">
                 <a:solidFill>
                   <a:srgbClr val="526B7C"/>
@@ -11091,6 +11691,7 @@
               </a:defRPr>
             </a:lvl3pPr>
             <a:lvl4pPr>
+              <a:buNone/>
               <a:defRPr sz="1875" b="0">
                 <a:solidFill>
                   <a:srgbClr val="526B7C"/>
@@ -11101,6 +11702,7 @@
               </a:defRPr>
             </a:lvl4pPr>
             <a:lvl5pPr>
+              <a:buNone/>
               <a:defRPr sz="1875" b="0">
                 <a:solidFill>
                   <a:srgbClr val="526B7C"/>
@@ -11111,6 +11713,7 @@
               </a:defRPr>
             </a:lvl5pPr>
             <a:lvl6pPr>
+              <a:buNone/>
               <a:defRPr sz="1875" b="0">
                 <a:solidFill>
                   <a:srgbClr val="526B7C"/>
@@ -11121,6 +11724,7 @@
               </a:defRPr>
             </a:lvl6pPr>
             <a:lvl7pPr>
+              <a:buNone/>
               <a:defRPr sz="1875" b="0">
                 <a:solidFill>
                   <a:srgbClr val="526B7C"/>
@@ -11131,6 +11735,7 @@
               </a:defRPr>
             </a:lvl7pPr>
             <a:lvl8pPr>
+              <a:buNone/>
               <a:defRPr sz="1875" b="0">
                 <a:solidFill>
                   <a:srgbClr val="526B7C"/>
@@ -11141,6 +11746,7 @@
               </a:defRPr>
             </a:lvl8pPr>
             <a:lvl9pPr>
+              <a:buNone/>
               <a:defRPr sz="1875" b="0">
                 <a:solidFill>
                   <a:srgbClr val="526B7C"/>
@@ -11153,6 +11759,7 @@
           </a:lstStyle>
           <a:p xmlns:a="http://schemas.openxmlformats.org/drawingml/2006/main">
             <a:pPr>
+              <a:buNone/>
               <a:defRPr sz="1875" b="0">
                 <a:solidFill>
                   <a:srgbClr val="526B7C"/>
@@ -11176,6 +11783,7 @@
           </a:p>
           <a:p xmlns:a="http://schemas.openxmlformats.org/drawingml/2006/main">
             <a:pPr>
+              <a:buNone/>
               <a:defRPr sz="1875" b="0">
                 <a:solidFill>
                   <a:srgbClr val="526B7C"/>
@@ -11199,6 +11807,7 @@
           </a:p>
           <a:p xmlns:a="http://schemas.openxmlformats.org/drawingml/2006/main">
             <a:pPr>
+              <a:buNone/>
               <a:defRPr sz="1875" b="0">
                 <a:solidFill>
                   <a:srgbClr val="526B7C"/>
@@ -11263,6 +11872,7 @@
               </a:defRPr>
             </a:defPPr>
             <a:lvl1pPr>
+              <a:buNone/>
               <a:defRPr sz="2175" b="1">
                 <a:solidFill>
                   <a:srgbClr val="102F43"/>
@@ -11273,6 +11883,7 @@
               </a:defRPr>
             </a:lvl1pPr>
             <a:lvl2pPr>
+              <a:buNone/>
               <a:defRPr sz="2175" b="1">
                 <a:solidFill>
                   <a:srgbClr val="102F43"/>
@@ -11283,6 +11894,7 @@
               </a:defRPr>
             </a:lvl2pPr>
             <a:lvl3pPr>
+              <a:buNone/>
               <a:defRPr sz="2175" b="1">
                 <a:solidFill>
                   <a:srgbClr val="102F43"/>
@@ -11293,6 +11905,7 @@
               </a:defRPr>
             </a:lvl3pPr>
             <a:lvl4pPr>
+              <a:buNone/>
               <a:defRPr sz="2175" b="1">
                 <a:solidFill>
                   <a:srgbClr val="102F43"/>
@@ -11303,6 +11916,7 @@
               </a:defRPr>
             </a:lvl4pPr>
             <a:lvl5pPr>
+              <a:buNone/>
               <a:defRPr sz="2175" b="1">
                 <a:solidFill>
                   <a:srgbClr val="102F43"/>
@@ -11313,6 +11927,7 @@
               </a:defRPr>
             </a:lvl5pPr>
             <a:lvl6pPr>
+              <a:buNone/>
               <a:defRPr sz="2175" b="1">
                 <a:solidFill>
                   <a:srgbClr val="102F43"/>
@@ -11323,6 +11938,7 @@
               </a:defRPr>
             </a:lvl6pPr>
             <a:lvl7pPr>
+              <a:buNone/>
               <a:defRPr sz="2175" b="1">
                 <a:solidFill>
                   <a:srgbClr val="102F43"/>
@@ -11333,6 +11949,7 @@
               </a:defRPr>
             </a:lvl7pPr>
             <a:lvl8pPr>
+              <a:buNone/>
               <a:defRPr sz="2175" b="1">
                 <a:solidFill>
                   <a:srgbClr val="102F43"/>
@@ -11343,6 +11960,7 @@
               </a:defRPr>
             </a:lvl8pPr>
             <a:lvl9pPr>
+              <a:buNone/>
               <a:defRPr sz="2175" b="1">
                 <a:solidFill>
                   <a:srgbClr val="102F43"/>
@@ -11355,6 +11973,7 @@
           </a:lstStyle>
           <a:p xmlns:a="http://schemas.openxmlformats.org/drawingml/2006/main">
             <a:pPr>
+              <a:buNone/>
               <a:defRPr sz="2175" b="1">
                 <a:solidFill>
                   <a:srgbClr val="102F43"/>
@@ -11419,6 +12038,7 @@
               </a:defRPr>
             </a:defPPr>
             <a:lvl1pPr>
+              <a:buNone/>
               <a:defRPr sz="1875" b="0">
                 <a:solidFill>
                   <a:srgbClr val="526B7C"/>
@@ -11429,6 +12049,7 @@
               </a:defRPr>
             </a:lvl1pPr>
             <a:lvl2pPr>
+              <a:buNone/>
               <a:defRPr sz="1875" b="0">
                 <a:solidFill>
                   <a:srgbClr val="526B7C"/>
@@ -11439,6 +12060,7 @@
               </a:defRPr>
             </a:lvl2pPr>
             <a:lvl3pPr>
+              <a:buNone/>
               <a:defRPr sz="1875" b="0">
                 <a:solidFill>
                   <a:srgbClr val="526B7C"/>
@@ -11449,6 +12071,7 @@
               </a:defRPr>
             </a:lvl3pPr>
             <a:lvl4pPr>
+              <a:buNone/>
               <a:defRPr sz="1875" b="0">
                 <a:solidFill>
                   <a:srgbClr val="526B7C"/>
@@ -11459,6 +12082,7 @@
               </a:defRPr>
             </a:lvl4pPr>
             <a:lvl5pPr>
+              <a:buNone/>
               <a:defRPr sz="1875" b="0">
                 <a:solidFill>
                   <a:srgbClr val="526B7C"/>
@@ -11469,6 +12093,7 @@
               </a:defRPr>
             </a:lvl5pPr>
             <a:lvl6pPr>
+              <a:buNone/>
               <a:defRPr sz="1875" b="0">
                 <a:solidFill>
                   <a:srgbClr val="526B7C"/>
@@ -11479,6 +12104,7 @@
               </a:defRPr>
             </a:lvl6pPr>
             <a:lvl7pPr>
+              <a:buNone/>
               <a:defRPr sz="1875" b="0">
                 <a:solidFill>
                   <a:srgbClr val="526B7C"/>
@@ -11489,6 +12115,7 @@
               </a:defRPr>
             </a:lvl7pPr>
             <a:lvl8pPr>
+              <a:buNone/>
               <a:defRPr sz="1875" b="0">
                 <a:solidFill>
                   <a:srgbClr val="526B7C"/>
@@ -11499,6 +12126,7 @@
               </a:defRPr>
             </a:lvl8pPr>
             <a:lvl9pPr>
+              <a:buNone/>
               <a:defRPr sz="1875" b="0">
                 <a:solidFill>
                   <a:srgbClr val="526B7C"/>
@@ -11511,6 +12139,7 @@
           </a:lstStyle>
           <a:p xmlns:a="http://schemas.openxmlformats.org/drawingml/2006/main">
             <a:pPr>
+              <a:buNone/>
               <a:defRPr sz="1875" b="0">
                 <a:solidFill>
                   <a:srgbClr val="526B7C"/>
@@ -11534,6 +12163,7 @@
           </a:p>
           <a:p xmlns:a="http://schemas.openxmlformats.org/drawingml/2006/main">
             <a:pPr>
+              <a:buNone/>
               <a:defRPr sz="1875" b="0">
                 <a:solidFill>
                   <a:srgbClr val="526B7C"/>
@@ -11557,6 +12187,7 @@
           </a:p>
           <a:p xmlns:a="http://schemas.openxmlformats.org/drawingml/2006/main">
             <a:pPr>
+              <a:buNone/>
               <a:defRPr sz="1875" b="0">
                 <a:solidFill>
                   <a:srgbClr val="526B7C"/>
@@ -11621,6 +12252,7 @@
               </a:defRPr>
             </a:defPPr>
             <a:lvl1pPr>
+              <a:buNone/>
               <a:defRPr sz="2175" b="1">
                 <a:solidFill>
                   <a:srgbClr val="102F43"/>
@@ -11631,6 +12263,7 @@
               </a:defRPr>
             </a:lvl1pPr>
             <a:lvl2pPr>
+              <a:buNone/>
               <a:defRPr sz="2175" b="1">
                 <a:solidFill>
                   <a:srgbClr val="102F43"/>
@@ -11641,6 +12274,7 @@
               </a:defRPr>
             </a:lvl2pPr>
             <a:lvl3pPr>
+              <a:buNone/>
               <a:defRPr sz="2175" b="1">
                 <a:solidFill>
                   <a:srgbClr val="102F43"/>
@@ -11651,6 +12285,7 @@
               </a:defRPr>
             </a:lvl3pPr>
             <a:lvl4pPr>
+              <a:buNone/>
               <a:defRPr sz="2175" b="1">
                 <a:solidFill>
                   <a:srgbClr val="102F43"/>
@@ -11661,6 +12296,7 @@
               </a:defRPr>
             </a:lvl4pPr>
             <a:lvl5pPr>
+              <a:buNone/>
               <a:defRPr sz="2175" b="1">
                 <a:solidFill>
                   <a:srgbClr val="102F43"/>
@@ -11671,6 +12307,7 @@
               </a:defRPr>
             </a:lvl5pPr>
             <a:lvl6pPr>
+              <a:buNone/>
               <a:defRPr sz="2175" b="1">
                 <a:solidFill>
                   <a:srgbClr val="102F43"/>
@@ -11681,6 +12318,7 @@
               </a:defRPr>
             </a:lvl6pPr>
             <a:lvl7pPr>
+              <a:buNone/>
               <a:defRPr sz="2175" b="1">
                 <a:solidFill>
                   <a:srgbClr val="102F43"/>
@@ -11691,6 +12329,7 @@
               </a:defRPr>
             </a:lvl7pPr>
             <a:lvl8pPr>
+              <a:buNone/>
               <a:defRPr sz="2175" b="1">
                 <a:solidFill>
                   <a:srgbClr val="102F43"/>
@@ -11701,6 +12340,7 @@
               </a:defRPr>
             </a:lvl8pPr>
             <a:lvl9pPr>
+              <a:buNone/>
               <a:defRPr sz="2175" b="1">
                 <a:solidFill>
                   <a:srgbClr val="102F43"/>
@@ -11713,6 +12353,7 @@
           </a:lstStyle>
           <a:p xmlns:a="http://schemas.openxmlformats.org/drawingml/2006/main">
             <a:pPr>
+              <a:buNone/>
               <a:defRPr sz="2175" b="1">
                 <a:solidFill>
                   <a:srgbClr val="102F43"/>
@@ -11777,6 +12418,7 @@
               </a:defRPr>
             </a:defPPr>
             <a:lvl1pPr>
+              <a:buNone/>
               <a:defRPr sz="1875" b="0">
                 <a:solidFill>
                   <a:srgbClr val="526B7C"/>
@@ -11787,6 +12429,7 @@
               </a:defRPr>
             </a:lvl1pPr>
             <a:lvl2pPr>
+              <a:buNone/>
               <a:defRPr sz="1875" b="0">
                 <a:solidFill>
                   <a:srgbClr val="526B7C"/>
@@ -11797,6 +12440,7 @@
               </a:defRPr>
             </a:lvl2pPr>
             <a:lvl3pPr>
+              <a:buNone/>
               <a:defRPr sz="1875" b="0">
                 <a:solidFill>
                   <a:srgbClr val="526B7C"/>
@@ -11807,6 +12451,7 @@
               </a:defRPr>
             </a:lvl3pPr>
             <a:lvl4pPr>
+              <a:buNone/>
               <a:defRPr sz="1875" b="0">
                 <a:solidFill>
                   <a:srgbClr val="526B7C"/>
@@ -11817,6 +12462,7 @@
               </a:defRPr>
             </a:lvl4pPr>
             <a:lvl5pPr>
+              <a:buNone/>
               <a:defRPr sz="1875" b="0">
                 <a:solidFill>
                   <a:srgbClr val="526B7C"/>
@@ -11827,6 +12473,7 @@
               </a:defRPr>
             </a:lvl5pPr>
             <a:lvl6pPr>
+              <a:buNone/>
               <a:defRPr sz="1875" b="0">
                 <a:solidFill>
                   <a:srgbClr val="526B7C"/>
@@ -11837,6 +12484,7 @@
               </a:defRPr>
             </a:lvl6pPr>
             <a:lvl7pPr>
+              <a:buNone/>
               <a:defRPr sz="1875" b="0">
                 <a:solidFill>
                   <a:srgbClr val="526B7C"/>
@@ -11847,6 +12495,7 @@
               </a:defRPr>
             </a:lvl7pPr>
             <a:lvl8pPr>
+              <a:buNone/>
               <a:defRPr sz="1875" b="0">
                 <a:solidFill>
                   <a:srgbClr val="526B7C"/>
@@ -11857,6 +12506,7 @@
               </a:defRPr>
             </a:lvl8pPr>
             <a:lvl9pPr>
+              <a:buNone/>
               <a:defRPr sz="1875" b="0">
                 <a:solidFill>
                   <a:srgbClr val="526B7C"/>
@@ -11869,6 +12519,7 @@
           </a:lstStyle>
           <a:p xmlns:a="http://schemas.openxmlformats.org/drawingml/2006/main">
             <a:pPr>
+              <a:buNone/>
               <a:defRPr sz="1875" b="0">
                 <a:solidFill>
                   <a:srgbClr val="526B7C"/>
@@ -11892,6 +12543,7 @@
           </a:p>
           <a:p xmlns:a="http://schemas.openxmlformats.org/drawingml/2006/main">
             <a:pPr>
+              <a:buNone/>
               <a:defRPr sz="1875" b="0">
                 <a:solidFill>
                   <a:srgbClr val="526B7C"/>
@@ -11915,6 +12567,7 @@
           </a:p>
           <a:p xmlns:a="http://schemas.openxmlformats.org/drawingml/2006/main">
             <a:pPr>
+              <a:buNone/>
               <a:defRPr sz="1875" b="0">
                 <a:solidFill>
                   <a:srgbClr val="526B7C"/>
@@ -11979,6 +12632,7 @@
               </a:defRPr>
             </a:defPPr>
             <a:lvl1pPr>
+              <a:buNone/>
               <a:defRPr sz="2175" b="1">
                 <a:solidFill>
                   <a:srgbClr val="102F43"/>
@@ -11989,6 +12643,7 @@
               </a:defRPr>
             </a:lvl1pPr>
             <a:lvl2pPr>
+              <a:buNone/>
               <a:defRPr sz="2175" b="1">
                 <a:solidFill>
                   <a:srgbClr val="102F43"/>
@@ -11999,6 +12654,7 @@
               </a:defRPr>
             </a:lvl2pPr>
             <a:lvl3pPr>
+              <a:buNone/>
               <a:defRPr sz="2175" b="1">
                 <a:solidFill>
                   <a:srgbClr val="102F43"/>
@@ -12009,6 +12665,7 @@
               </a:defRPr>
             </a:lvl3pPr>
             <a:lvl4pPr>
+              <a:buNone/>
               <a:defRPr sz="2175" b="1">
                 <a:solidFill>
                   <a:srgbClr val="102F43"/>
@@ -12019,6 +12676,7 @@
               </a:defRPr>
             </a:lvl4pPr>
             <a:lvl5pPr>
+              <a:buNone/>
               <a:defRPr sz="2175" b="1">
                 <a:solidFill>
                   <a:srgbClr val="102F43"/>
@@ -12029,6 +12687,7 @@
               </a:defRPr>
             </a:lvl5pPr>
             <a:lvl6pPr>
+              <a:buNone/>
               <a:defRPr sz="2175" b="1">
                 <a:solidFill>
                   <a:srgbClr val="102F43"/>
@@ -12039,6 +12698,7 @@
               </a:defRPr>
             </a:lvl6pPr>
             <a:lvl7pPr>
+              <a:buNone/>
               <a:defRPr sz="2175" b="1">
                 <a:solidFill>
                   <a:srgbClr val="102F43"/>
@@ -12049,6 +12709,7 @@
               </a:defRPr>
             </a:lvl7pPr>
             <a:lvl8pPr>
+              <a:buNone/>
               <a:defRPr sz="2175" b="1">
                 <a:solidFill>
                   <a:srgbClr val="102F43"/>
@@ -12059,6 +12720,7 @@
               </a:defRPr>
             </a:lvl8pPr>
             <a:lvl9pPr>
+              <a:buNone/>
               <a:defRPr sz="2175" b="1">
                 <a:solidFill>
                   <a:srgbClr val="102F43"/>
@@ -12071,6 +12733,7 @@
           </a:lstStyle>
           <a:p xmlns:a="http://schemas.openxmlformats.org/drawingml/2006/main">
             <a:pPr>
+              <a:buNone/>
               <a:defRPr sz="2175" b="1">
                 <a:solidFill>
                   <a:srgbClr val="102F43"/>
@@ -12135,6 +12798,7 @@
               </a:defRPr>
             </a:defPPr>
             <a:lvl1pPr>
+              <a:buNone/>
               <a:defRPr sz="1875" b="0">
                 <a:solidFill>
                   <a:srgbClr val="526B7C"/>
@@ -12145,6 +12809,7 @@
               </a:defRPr>
             </a:lvl1pPr>
             <a:lvl2pPr>
+              <a:buNone/>
               <a:defRPr sz="1875" b="0">
                 <a:solidFill>
                   <a:srgbClr val="526B7C"/>
@@ -12155,6 +12820,7 @@
               </a:defRPr>
             </a:lvl2pPr>
             <a:lvl3pPr>
+              <a:buNone/>
               <a:defRPr sz="1875" b="0">
                 <a:solidFill>
                   <a:srgbClr val="526B7C"/>
@@ -12165,6 +12831,7 @@
               </a:defRPr>
             </a:lvl3pPr>
             <a:lvl4pPr>
+              <a:buNone/>
               <a:defRPr sz="1875" b="0">
                 <a:solidFill>
                   <a:srgbClr val="526B7C"/>
@@ -12175,6 +12842,7 @@
               </a:defRPr>
             </a:lvl4pPr>
             <a:lvl5pPr>
+              <a:buNone/>
               <a:defRPr sz="1875" b="0">
                 <a:solidFill>
                   <a:srgbClr val="526B7C"/>
@@ -12185,6 +12853,7 @@
               </a:defRPr>
             </a:lvl5pPr>
             <a:lvl6pPr>
+              <a:buNone/>
               <a:defRPr sz="1875" b="0">
                 <a:solidFill>
                   <a:srgbClr val="526B7C"/>
@@ -12195,6 +12864,7 @@
               </a:defRPr>
             </a:lvl6pPr>
             <a:lvl7pPr>
+              <a:buNone/>
               <a:defRPr sz="1875" b="0">
                 <a:solidFill>
                   <a:srgbClr val="526B7C"/>
@@ -12205,6 +12875,7 @@
               </a:defRPr>
             </a:lvl7pPr>
             <a:lvl8pPr>
+              <a:buNone/>
               <a:defRPr sz="1875" b="0">
                 <a:solidFill>
                   <a:srgbClr val="526B7C"/>
@@ -12215,6 +12886,7 @@
               </a:defRPr>
             </a:lvl8pPr>
             <a:lvl9pPr>
+              <a:buNone/>
               <a:defRPr sz="1875" b="0">
                 <a:solidFill>
                   <a:srgbClr val="526B7C"/>
@@ -12227,6 +12899,7 @@
           </a:lstStyle>
           <a:p xmlns:a="http://schemas.openxmlformats.org/drawingml/2006/main">
             <a:pPr>
+              <a:buNone/>
               <a:defRPr sz="1875" b="0">
                 <a:solidFill>
                   <a:srgbClr val="526B7C"/>
@@ -12250,6 +12923,7 @@
           </a:p>
           <a:p xmlns:a="http://schemas.openxmlformats.org/drawingml/2006/main">
             <a:pPr>
+              <a:buNone/>
               <a:defRPr sz="1875" b="0">
                 <a:solidFill>
                   <a:srgbClr val="526B7C"/>
@@ -12273,6 +12947,7 @@
           </a:p>
           <a:p xmlns:a="http://schemas.openxmlformats.org/drawingml/2006/main">
             <a:pPr>
+              <a:buNone/>
               <a:defRPr sz="1875" b="0">
                 <a:solidFill>
                   <a:srgbClr val="526B7C"/>
@@ -12366,6 +13041,7 @@
               </a:defRPr>
             </a:defPPr>
             <a:lvl1pPr>
+              <a:buNone/>
               <a:defRPr sz="3450" b="1">
                 <a:solidFill>
                   <a:srgbClr val="102F43"/>
@@ -12376,6 +13052,7 @@
               </a:defRPr>
             </a:lvl1pPr>
             <a:lvl2pPr>
+              <a:buNone/>
               <a:defRPr sz="3450" b="1">
                 <a:solidFill>
                   <a:srgbClr val="102F43"/>
@@ -12386,6 +13063,7 @@
               </a:defRPr>
             </a:lvl2pPr>
             <a:lvl3pPr>
+              <a:buNone/>
               <a:defRPr sz="3450" b="1">
                 <a:solidFill>
                   <a:srgbClr val="102F43"/>
@@ -12396,6 +13074,7 @@
               </a:defRPr>
             </a:lvl3pPr>
             <a:lvl4pPr>
+              <a:buNone/>
               <a:defRPr sz="3450" b="1">
                 <a:solidFill>
                   <a:srgbClr val="102F43"/>
@@ -12406,6 +13085,7 @@
               </a:defRPr>
             </a:lvl4pPr>
             <a:lvl5pPr>
+              <a:buNone/>
               <a:defRPr sz="3450" b="1">
                 <a:solidFill>
                   <a:srgbClr val="102F43"/>
@@ -12416,6 +13096,7 @@
               </a:defRPr>
             </a:lvl5pPr>
             <a:lvl6pPr>
+              <a:buNone/>
               <a:defRPr sz="3450" b="1">
                 <a:solidFill>
                   <a:srgbClr val="102F43"/>
@@ -12426,6 +13107,7 @@
               </a:defRPr>
             </a:lvl6pPr>
             <a:lvl7pPr>
+              <a:buNone/>
               <a:defRPr sz="3450" b="1">
                 <a:solidFill>
                   <a:srgbClr val="102F43"/>
@@ -12436,6 +13118,7 @@
               </a:defRPr>
             </a:lvl7pPr>
             <a:lvl8pPr>
+              <a:buNone/>
               <a:defRPr sz="3450" b="1">
                 <a:solidFill>
                   <a:srgbClr val="102F43"/>
@@ -12446,6 +13129,7 @@
               </a:defRPr>
             </a:lvl8pPr>
             <a:lvl9pPr>
+              <a:buNone/>
               <a:defRPr sz="3450" b="1">
                 <a:solidFill>
                   <a:srgbClr val="102F43"/>
@@ -12458,6 +13142,7 @@
           </a:lstStyle>
           <a:p xmlns:a="http://schemas.openxmlformats.org/drawingml/2006/main">
             <a:pPr>
+              <a:buNone/>
               <a:defRPr sz="3450" b="1">
                 <a:solidFill>
                   <a:srgbClr val="102F43"/>
@@ -12522,6 +13207,7 @@
               </a:defRPr>
             </a:defPPr>
             <a:lvl1pPr>
+              <a:buNone/>
               <a:defRPr sz="1200" b="0">
                 <a:solidFill>
                   <a:srgbClr val="526B7C"/>
@@ -12532,6 +13218,7 @@
               </a:defRPr>
             </a:lvl1pPr>
             <a:lvl2pPr>
+              <a:buNone/>
               <a:defRPr sz="1200" b="0">
                 <a:solidFill>
                   <a:srgbClr val="526B7C"/>
@@ -12542,6 +13229,7 @@
               </a:defRPr>
             </a:lvl2pPr>
             <a:lvl3pPr>
+              <a:buNone/>
               <a:defRPr sz="1200" b="0">
                 <a:solidFill>
                   <a:srgbClr val="526B7C"/>
@@ -12552,6 +13240,7 @@
               </a:defRPr>
             </a:lvl3pPr>
             <a:lvl4pPr>
+              <a:buNone/>
               <a:defRPr sz="1200" b="0">
                 <a:solidFill>
                   <a:srgbClr val="526B7C"/>
@@ -12562,6 +13251,7 @@
               </a:defRPr>
             </a:lvl4pPr>
             <a:lvl5pPr>
+              <a:buNone/>
               <a:defRPr sz="1200" b="0">
                 <a:solidFill>
                   <a:srgbClr val="526B7C"/>
@@ -12572,6 +13262,7 @@
               </a:defRPr>
             </a:lvl5pPr>
             <a:lvl6pPr>
+              <a:buNone/>
               <a:defRPr sz="1200" b="0">
                 <a:solidFill>
                   <a:srgbClr val="526B7C"/>
@@ -12582,6 +13273,7 @@
               </a:defRPr>
             </a:lvl6pPr>
             <a:lvl7pPr>
+              <a:buNone/>
               <a:defRPr sz="1200" b="0">
                 <a:solidFill>
                   <a:srgbClr val="526B7C"/>
@@ -12592,6 +13284,7 @@
               </a:defRPr>
             </a:lvl7pPr>
             <a:lvl8pPr>
+              <a:buNone/>
               <a:defRPr sz="1200" b="0">
                 <a:solidFill>
                   <a:srgbClr val="526B7C"/>
@@ -12602,6 +13295,7 @@
               </a:defRPr>
             </a:lvl8pPr>
             <a:lvl9pPr>
+              <a:buNone/>
               <a:defRPr sz="1200" b="0">
                 <a:solidFill>
                   <a:srgbClr val="526B7C"/>
@@ -12614,6 +13308,7 @@
           </a:lstStyle>
           <a:p xmlns:a="http://schemas.openxmlformats.org/drawingml/2006/main">
             <a:pPr>
+              <a:buNone/>
               <a:defRPr sz="1200" b="0">
                 <a:solidFill>
                   <a:srgbClr val="526B7C"/>
@@ -12678,6 +13373,7 @@
               </a:defRPr>
             </a:defPPr>
             <a:lvl1pPr>
+              <a:buNone/>
               <a:defRPr sz="1200" b="0">
                 <a:solidFill>
                   <a:srgbClr val="526B7C"/>
@@ -12688,6 +13384,7 @@
               </a:defRPr>
             </a:lvl1pPr>
             <a:lvl2pPr>
+              <a:buNone/>
               <a:defRPr sz="1200" b="0">
                 <a:solidFill>
                   <a:srgbClr val="526B7C"/>
@@ -12698,6 +13395,7 @@
               </a:defRPr>
             </a:lvl2pPr>
             <a:lvl3pPr>
+              <a:buNone/>
               <a:defRPr sz="1200" b="0">
                 <a:solidFill>
                   <a:srgbClr val="526B7C"/>
@@ -12708,6 +13406,7 @@
               </a:defRPr>
             </a:lvl3pPr>
             <a:lvl4pPr>
+              <a:buNone/>
               <a:defRPr sz="1200" b="0">
                 <a:solidFill>
                   <a:srgbClr val="526B7C"/>
@@ -12718,6 +13417,7 @@
               </a:defRPr>
             </a:lvl4pPr>
             <a:lvl5pPr>
+              <a:buNone/>
               <a:defRPr sz="1200" b="0">
                 <a:solidFill>
                   <a:srgbClr val="526B7C"/>
@@ -12728,6 +13428,7 @@
               </a:defRPr>
             </a:lvl5pPr>
             <a:lvl6pPr>
+              <a:buNone/>
               <a:defRPr sz="1200" b="0">
                 <a:solidFill>
                   <a:srgbClr val="526B7C"/>
@@ -12738,6 +13439,7 @@
               </a:defRPr>
             </a:lvl6pPr>
             <a:lvl7pPr>
+              <a:buNone/>
               <a:defRPr sz="1200" b="0">
                 <a:solidFill>
                   <a:srgbClr val="526B7C"/>
@@ -12748,6 +13450,7 @@
               </a:defRPr>
             </a:lvl7pPr>
             <a:lvl8pPr>
+              <a:buNone/>
               <a:defRPr sz="1200" b="0">
                 <a:solidFill>
                   <a:srgbClr val="526B7C"/>
@@ -12758,6 +13461,7 @@
               </a:defRPr>
             </a:lvl8pPr>
             <a:lvl9pPr>
+              <a:buNone/>
               <a:defRPr sz="1200" b="0">
                 <a:solidFill>
                   <a:srgbClr val="526B7C"/>
@@ -12770,6 +13474,7 @@
           </a:lstStyle>
           <a:p xmlns:a="http://schemas.openxmlformats.org/drawingml/2006/main">
             <a:pPr>
+              <a:buNone/>
               <a:defRPr sz="1200" b="0">
                 <a:solidFill>
                   <a:srgbClr val="526B7C"/>
@@ -12834,6 +13539,7 @@
               </a:defRPr>
             </a:defPPr>
             <a:lvl1pPr>
+              <a:buNone/>
               <a:defRPr sz="2400" b="1">
                 <a:solidFill>
                   <a:srgbClr val="102F43"/>
@@ -12844,6 +13550,7 @@
               </a:defRPr>
             </a:lvl1pPr>
             <a:lvl2pPr>
+              <a:buNone/>
               <a:defRPr sz="2400" b="1">
                 <a:solidFill>
                   <a:srgbClr val="102F43"/>
@@ -12854,6 +13561,7 @@
               </a:defRPr>
             </a:lvl2pPr>
             <a:lvl3pPr>
+              <a:buNone/>
               <a:defRPr sz="2400" b="1">
                 <a:solidFill>
                   <a:srgbClr val="102F43"/>
@@ -12864,6 +13572,7 @@
               </a:defRPr>
             </a:lvl3pPr>
             <a:lvl4pPr>
+              <a:buNone/>
               <a:defRPr sz="2400" b="1">
                 <a:solidFill>
                   <a:srgbClr val="102F43"/>
@@ -12874,6 +13583,7 @@
               </a:defRPr>
             </a:lvl4pPr>
             <a:lvl5pPr>
+              <a:buNone/>
               <a:defRPr sz="2400" b="1">
                 <a:solidFill>
                   <a:srgbClr val="102F43"/>
@@ -12884,6 +13594,7 @@
               </a:defRPr>
             </a:lvl5pPr>
             <a:lvl6pPr>
+              <a:buNone/>
               <a:defRPr sz="2400" b="1">
                 <a:solidFill>
                   <a:srgbClr val="102F43"/>
@@ -12894,6 +13605,7 @@
               </a:defRPr>
             </a:lvl6pPr>
             <a:lvl7pPr>
+              <a:buNone/>
               <a:defRPr sz="2400" b="1">
                 <a:solidFill>
                   <a:srgbClr val="102F43"/>
@@ -12904,6 +13616,7 @@
               </a:defRPr>
             </a:lvl7pPr>
             <a:lvl8pPr>
+              <a:buNone/>
               <a:defRPr sz="2400" b="1">
                 <a:solidFill>
                   <a:srgbClr val="102F43"/>
@@ -12914,6 +13627,7 @@
               </a:defRPr>
             </a:lvl8pPr>
             <a:lvl9pPr>
+              <a:buNone/>
               <a:defRPr sz="2400" b="1">
                 <a:solidFill>
                   <a:srgbClr val="102F43"/>
@@ -12926,6 +13640,7 @@
           </a:lstStyle>
           <a:p xmlns:a="http://schemas.openxmlformats.org/drawingml/2006/main">
             <a:pPr>
+              <a:buNone/>
               <a:defRPr sz="2400" b="1">
                 <a:solidFill>
                   <a:srgbClr val="102F43"/>
@@ -12990,6 +13705,7 @@
               </a:defRPr>
             </a:defPPr>
             <a:lvl1pPr>
+              <a:buNone/>
               <a:defRPr sz="2175" b="1">
                 <a:solidFill>
                   <a:srgbClr val="102F43"/>
@@ -13000,6 +13716,7 @@
               </a:defRPr>
             </a:lvl1pPr>
             <a:lvl2pPr>
+              <a:buNone/>
               <a:defRPr sz="2175" b="1">
                 <a:solidFill>
                   <a:srgbClr val="102F43"/>
@@ -13010,6 +13727,7 @@
               </a:defRPr>
             </a:lvl2pPr>
             <a:lvl3pPr>
+              <a:buNone/>
               <a:defRPr sz="2175" b="1">
                 <a:solidFill>
                   <a:srgbClr val="102F43"/>
@@ -13020,6 +13738,7 @@
               </a:defRPr>
             </a:lvl3pPr>
             <a:lvl4pPr>
+              <a:buNone/>
               <a:defRPr sz="2175" b="1">
                 <a:solidFill>
                   <a:srgbClr val="102F43"/>
@@ -13030,6 +13749,7 @@
               </a:defRPr>
             </a:lvl4pPr>
             <a:lvl5pPr>
+              <a:buNone/>
               <a:defRPr sz="2175" b="1">
                 <a:solidFill>
                   <a:srgbClr val="102F43"/>
@@ -13040,6 +13760,7 @@
               </a:defRPr>
             </a:lvl5pPr>
             <a:lvl6pPr>
+              <a:buNone/>
               <a:defRPr sz="2175" b="1">
                 <a:solidFill>
                   <a:srgbClr val="102F43"/>
@@ -13050,6 +13771,7 @@
               </a:defRPr>
             </a:lvl6pPr>
             <a:lvl7pPr>
+              <a:buNone/>
               <a:defRPr sz="2175" b="1">
                 <a:solidFill>
                   <a:srgbClr val="102F43"/>
@@ -13060,6 +13782,7 @@
               </a:defRPr>
             </a:lvl7pPr>
             <a:lvl8pPr>
+              <a:buNone/>
               <a:defRPr sz="2175" b="1">
                 <a:solidFill>
                   <a:srgbClr val="102F43"/>
@@ -13070,6 +13793,7 @@
               </a:defRPr>
             </a:lvl8pPr>
             <a:lvl9pPr>
+              <a:buNone/>
               <a:defRPr sz="2175" b="1">
                 <a:solidFill>
                   <a:srgbClr val="102F43"/>
@@ -13082,6 +13806,7 @@
           </a:lstStyle>
           <a:p xmlns:a="http://schemas.openxmlformats.org/drawingml/2006/main">
             <a:pPr>
+              <a:buNone/>
               <a:defRPr sz="2175" b="1">
                 <a:solidFill>
                   <a:srgbClr val="102F43"/>
@@ -13146,6 +13871,7 @@
               </a:defRPr>
             </a:defPPr>
             <a:lvl1pPr>
+              <a:buNone/>
               <a:defRPr sz="1875" b="0">
                 <a:solidFill>
                   <a:srgbClr val="526B7C"/>
@@ -13156,6 +13882,7 @@
               </a:defRPr>
             </a:lvl1pPr>
             <a:lvl2pPr>
+              <a:buNone/>
               <a:defRPr sz="1875" b="0">
                 <a:solidFill>
                   <a:srgbClr val="526B7C"/>
@@ -13166,6 +13893,7 @@
               </a:defRPr>
             </a:lvl2pPr>
             <a:lvl3pPr>
+              <a:buNone/>
               <a:defRPr sz="1875" b="0">
                 <a:solidFill>
                   <a:srgbClr val="526B7C"/>
@@ -13176,6 +13904,7 @@
               </a:defRPr>
             </a:lvl3pPr>
             <a:lvl4pPr>
+              <a:buNone/>
               <a:defRPr sz="1875" b="0">
                 <a:solidFill>
                   <a:srgbClr val="526B7C"/>
@@ -13186,6 +13915,7 @@
               </a:defRPr>
             </a:lvl4pPr>
             <a:lvl5pPr>
+              <a:buNone/>
               <a:defRPr sz="1875" b="0">
                 <a:solidFill>
                   <a:srgbClr val="526B7C"/>
@@ -13196,6 +13926,7 @@
               </a:defRPr>
             </a:lvl5pPr>
             <a:lvl6pPr>
+              <a:buNone/>
               <a:defRPr sz="1875" b="0">
                 <a:solidFill>
                   <a:srgbClr val="526B7C"/>
@@ -13206,6 +13937,7 @@
               </a:defRPr>
             </a:lvl6pPr>
             <a:lvl7pPr>
+              <a:buNone/>
               <a:defRPr sz="1875" b="0">
                 <a:solidFill>
                   <a:srgbClr val="526B7C"/>
@@ -13216,6 +13948,7 @@
               </a:defRPr>
             </a:lvl7pPr>
             <a:lvl8pPr>
+              <a:buNone/>
               <a:defRPr sz="1875" b="0">
                 <a:solidFill>
                   <a:srgbClr val="526B7C"/>
@@ -13226,6 +13959,7 @@
               </a:defRPr>
             </a:lvl8pPr>
             <a:lvl9pPr>
+              <a:buNone/>
               <a:defRPr sz="1875" b="0">
                 <a:solidFill>
                   <a:srgbClr val="526B7C"/>
@@ -13238,6 +13972,7 @@
           </a:lstStyle>
           <a:p xmlns:a="http://schemas.openxmlformats.org/drawingml/2006/main">
             <a:pPr>
+              <a:buNone/>
               <a:defRPr sz="1875" b="0">
                 <a:solidFill>
                   <a:srgbClr val="526B7C"/>
@@ -13261,6 +13996,7 @@
           </a:p>
           <a:p xmlns:a="http://schemas.openxmlformats.org/drawingml/2006/main">
             <a:pPr>
+              <a:buNone/>
               <a:defRPr sz="1875" b="0">
                 <a:solidFill>
                   <a:srgbClr val="526B7C"/>
@@ -13284,6 +14020,7 @@
           </a:p>
           <a:p xmlns:a="http://schemas.openxmlformats.org/drawingml/2006/main">
             <a:pPr>
+              <a:buNone/>
               <a:defRPr sz="1875" b="0">
                 <a:solidFill>
                   <a:srgbClr val="526B7C"/>
@@ -13348,6 +14085,7 @@
               </a:defRPr>
             </a:defPPr>
             <a:lvl1pPr>
+              <a:buNone/>
               <a:defRPr sz="2175" b="1">
                 <a:solidFill>
                   <a:srgbClr val="102F43"/>
@@ -13358,6 +14096,7 @@
               </a:defRPr>
             </a:lvl1pPr>
             <a:lvl2pPr>
+              <a:buNone/>
               <a:defRPr sz="2175" b="1">
                 <a:solidFill>
                   <a:srgbClr val="102F43"/>
@@ -13368,6 +14107,7 @@
               </a:defRPr>
             </a:lvl2pPr>
             <a:lvl3pPr>
+              <a:buNone/>
               <a:defRPr sz="2175" b="1">
                 <a:solidFill>
                   <a:srgbClr val="102F43"/>
@@ -13378,6 +14118,7 @@
               </a:defRPr>
             </a:lvl3pPr>
             <a:lvl4pPr>
+              <a:buNone/>
               <a:defRPr sz="2175" b="1">
                 <a:solidFill>
                   <a:srgbClr val="102F43"/>
@@ -13388,6 +14129,7 @@
               </a:defRPr>
             </a:lvl4pPr>
             <a:lvl5pPr>
+              <a:buNone/>
               <a:defRPr sz="2175" b="1">
                 <a:solidFill>
                   <a:srgbClr val="102F43"/>
@@ -13398,6 +14140,7 @@
               </a:defRPr>
             </a:lvl5pPr>
             <a:lvl6pPr>
+              <a:buNone/>
               <a:defRPr sz="2175" b="1">
                 <a:solidFill>
                   <a:srgbClr val="102F43"/>
@@ -13408,6 +14151,7 @@
               </a:defRPr>
             </a:lvl6pPr>
             <a:lvl7pPr>
+              <a:buNone/>
               <a:defRPr sz="2175" b="1">
                 <a:solidFill>
                   <a:srgbClr val="102F43"/>
@@ -13418,6 +14162,7 @@
               </a:defRPr>
             </a:lvl7pPr>
             <a:lvl8pPr>
+              <a:buNone/>
               <a:defRPr sz="2175" b="1">
                 <a:solidFill>
                   <a:srgbClr val="102F43"/>
@@ -13428,6 +14173,7 @@
               </a:defRPr>
             </a:lvl8pPr>
             <a:lvl9pPr>
+              <a:buNone/>
               <a:defRPr sz="2175" b="1">
                 <a:solidFill>
                   <a:srgbClr val="102F43"/>
@@ -13440,6 +14186,7 @@
           </a:lstStyle>
           <a:p xmlns:a="http://schemas.openxmlformats.org/drawingml/2006/main">
             <a:pPr>
+              <a:buNone/>
               <a:defRPr sz="2175" b="1">
                 <a:solidFill>
                   <a:srgbClr val="102F43"/>
@@ -13504,6 +14251,7 @@
               </a:defRPr>
             </a:defPPr>
             <a:lvl1pPr>
+              <a:buNone/>
               <a:defRPr sz="1875" b="0">
                 <a:solidFill>
                   <a:srgbClr val="526B7C"/>
@@ -13514,6 +14262,7 @@
               </a:defRPr>
             </a:lvl1pPr>
             <a:lvl2pPr>
+              <a:buNone/>
               <a:defRPr sz="1875" b="0">
                 <a:solidFill>
                   <a:srgbClr val="526B7C"/>
@@ -13524,6 +14273,7 @@
               </a:defRPr>
             </a:lvl2pPr>
             <a:lvl3pPr>
+              <a:buNone/>
               <a:defRPr sz="1875" b="0">
                 <a:solidFill>
                   <a:srgbClr val="526B7C"/>
@@ -13534,6 +14284,7 @@
               </a:defRPr>
             </a:lvl3pPr>
             <a:lvl4pPr>
+              <a:buNone/>
               <a:defRPr sz="1875" b="0">
                 <a:solidFill>
                   <a:srgbClr val="526B7C"/>
@@ -13544,6 +14295,7 @@
               </a:defRPr>
             </a:lvl4pPr>
             <a:lvl5pPr>
+              <a:buNone/>
               <a:defRPr sz="1875" b="0">
                 <a:solidFill>
                   <a:srgbClr val="526B7C"/>
@@ -13554,6 +14306,7 @@
               </a:defRPr>
             </a:lvl5pPr>
             <a:lvl6pPr>
+              <a:buNone/>
               <a:defRPr sz="1875" b="0">
                 <a:solidFill>
                   <a:srgbClr val="526B7C"/>
@@ -13564,6 +14317,7 @@
               </a:defRPr>
             </a:lvl6pPr>
             <a:lvl7pPr>
+              <a:buNone/>
               <a:defRPr sz="1875" b="0">
                 <a:solidFill>
                   <a:srgbClr val="526B7C"/>
@@ -13574,6 +14328,7 @@
               </a:defRPr>
             </a:lvl7pPr>
             <a:lvl8pPr>
+              <a:buNone/>
               <a:defRPr sz="1875" b="0">
                 <a:solidFill>
                   <a:srgbClr val="526B7C"/>
@@ -13584,6 +14339,7 @@
               </a:defRPr>
             </a:lvl8pPr>
             <a:lvl9pPr>
+              <a:buNone/>
               <a:defRPr sz="1875" b="0">
                 <a:solidFill>
                   <a:srgbClr val="526B7C"/>
@@ -13596,6 +14352,7 @@
           </a:lstStyle>
           <a:p xmlns:a="http://schemas.openxmlformats.org/drawingml/2006/main">
             <a:pPr>
+              <a:buNone/>
               <a:defRPr sz="1875" b="0">
                 <a:solidFill>
                   <a:srgbClr val="526B7C"/>
@@ -13619,6 +14376,7 @@
           </a:p>
           <a:p xmlns:a="http://schemas.openxmlformats.org/drawingml/2006/main">
             <a:pPr>
+              <a:buNone/>
               <a:defRPr sz="1875" b="0">
                 <a:solidFill>
                   <a:srgbClr val="526B7C"/>
@@ -13642,6 +14400,7 @@
           </a:p>
           <a:p xmlns:a="http://schemas.openxmlformats.org/drawingml/2006/main">
             <a:pPr>
+              <a:buNone/>
               <a:defRPr sz="1875" b="0">
                 <a:solidFill>
                   <a:srgbClr val="526B7C"/>
@@ -13706,6 +14465,7 @@
               </a:defRPr>
             </a:defPPr>
             <a:lvl1pPr>
+              <a:buNone/>
               <a:defRPr sz="2250" b="1">
                 <a:solidFill>
                   <a:srgbClr val="00A9D6"/>
@@ -13716,6 +14476,7 @@
               </a:defRPr>
             </a:lvl1pPr>
             <a:lvl2pPr>
+              <a:buNone/>
               <a:defRPr sz="2250" b="1">
                 <a:solidFill>
                   <a:srgbClr val="00A9D6"/>
@@ -13726,6 +14487,7 @@
               </a:defRPr>
             </a:lvl2pPr>
             <a:lvl3pPr>
+              <a:buNone/>
               <a:defRPr sz="2250" b="1">
                 <a:solidFill>
                   <a:srgbClr val="00A9D6"/>
@@ -13736,6 +14498,7 @@
               </a:defRPr>
             </a:lvl3pPr>
             <a:lvl4pPr>
+              <a:buNone/>
               <a:defRPr sz="2250" b="1">
                 <a:solidFill>
                   <a:srgbClr val="00A9D6"/>
@@ -13746,6 +14509,7 @@
               </a:defRPr>
             </a:lvl4pPr>
             <a:lvl5pPr>
+              <a:buNone/>
               <a:defRPr sz="2250" b="1">
                 <a:solidFill>
                   <a:srgbClr val="00A9D6"/>
@@ -13756,6 +14520,7 @@
               </a:defRPr>
             </a:lvl5pPr>
             <a:lvl6pPr>
+              <a:buNone/>
               <a:defRPr sz="2250" b="1">
                 <a:solidFill>
                   <a:srgbClr val="00A9D6"/>
@@ -13766,6 +14531,7 @@
               </a:defRPr>
             </a:lvl6pPr>
             <a:lvl7pPr>
+              <a:buNone/>
               <a:defRPr sz="2250" b="1">
                 <a:solidFill>
                   <a:srgbClr val="00A9D6"/>
@@ -13776,6 +14542,7 @@
               </a:defRPr>
             </a:lvl7pPr>
             <a:lvl8pPr>
+              <a:buNone/>
               <a:defRPr sz="2250" b="1">
                 <a:solidFill>
                   <a:srgbClr val="00A9D6"/>
@@ -13786,6 +14553,7 @@
               </a:defRPr>
             </a:lvl8pPr>
             <a:lvl9pPr>
+              <a:buNone/>
               <a:defRPr sz="2250" b="1">
                 <a:solidFill>
                   <a:srgbClr val="00A9D6"/>
@@ -13798,6 +14566,7 @@
           </a:lstStyle>
           <a:p xmlns:a="http://schemas.openxmlformats.org/drawingml/2006/main">
             <a:pPr>
+              <a:buNone/>
               <a:defRPr sz="2250" b="1">
                 <a:solidFill>
                   <a:srgbClr val="00A9D6"/>
@@ -13862,6 +14631,7 @@
               </a:defRPr>
             </a:defPPr>
             <a:lvl1pPr>
+              <a:buNone/>
               <a:defRPr sz="1950" b="0">
                 <a:solidFill>
                   <a:srgbClr val="526B7C"/>
@@ -13872,6 +14642,7 @@
               </a:defRPr>
             </a:lvl1pPr>
             <a:lvl2pPr>
+              <a:buNone/>
               <a:defRPr sz="1950" b="0">
                 <a:solidFill>
                   <a:srgbClr val="526B7C"/>
@@ -13882,6 +14653,7 @@
               </a:defRPr>
             </a:lvl2pPr>
             <a:lvl3pPr>
+              <a:buNone/>
               <a:defRPr sz="1950" b="0">
                 <a:solidFill>
                   <a:srgbClr val="526B7C"/>
@@ -13892,6 +14664,7 @@
               </a:defRPr>
             </a:lvl3pPr>
             <a:lvl4pPr>
+              <a:buNone/>
               <a:defRPr sz="1950" b="0">
                 <a:solidFill>
                   <a:srgbClr val="526B7C"/>
@@ -13902,6 +14675,7 @@
               </a:defRPr>
             </a:lvl4pPr>
             <a:lvl5pPr>
+              <a:buNone/>
               <a:defRPr sz="1950" b="0">
                 <a:solidFill>
                   <a:srgbClr val="526B7C"/>
@@ -13912,6 +14686,7 @@
               </a:defRPr>
             </a:lvl5pPr>
             <a:lvl6pPr>
+              <a:buNone/>
               <a:defRPr sz="1950" b="0">
                 <a:solidFill>
                   <a:srgbClr val="526B7C"/>
@@ -13922,6 +14697,7 @@
               </a:defRPr>
             </a:lvl6pPr>
             <a:lvl7pPr>
+              <a:buNone/>
               <a:defRPr sz="1950" b="0">
                 <a:solidFill>
                   <a:srgbClr val="526B7C"/>
@@ -13932,6 +14708,7 @@
               </a:defRPr>
             </a:lvl7pPr>
             <a:lvl8pPr>
+              <a:buNone/>
               <a:defRPr sz="1950" b="0">
                 <a:solidFill>
                   <a:srgbClr val="526B7C"/>
@@ -13942,6 +14719,7 @@
               </a:defRPr>
             </a:lvl8pPr>
             <a:lvl9pPr>
+              <a:buNone/>
               <a:defRPr sz="1950" b="0">
                 <a:solidFill>
                   <a:srgbClr val="526B7C"/>
@@ -13954,6 +14732,7 @@
           </a:lstStyle>
           <a:p xmlns:a="http://schemas.openxmlformats.org/drawingml/2006/main">
             <a:pPr>
+              <a:buNone/>
               <a:defRPr sz="1950" b="0">
                 <a:solidFill>
                   <a:srgbClr val="526B7C"/>
@@ -14047,6 +14826,7 @@
               </a:defRPr>
             </a:defPPr>
             <a:lvl1pPr>
+              <a:buNone/>
               <a:defRPr sz="3450" b="1">
                 <a:solidFill>
                   <a:srgbClr val="102F43"/>
@@ -14057,6 +14837,7 @@
               </a:defRPr>
             </a:lvl1pPr>
             <a:lvl2pPr>
+              <a:buNone/>
               <a:defRPr sz="3450" b="1">
                 <a:solidFill>
                   <a:srgbClr val="102F43"/>
@@ -14067,6 +14848,7 @@
               </a:defRPr>
             </a:lvl2pPr>
             <a:lvl3pPr>
+              <a:buNone/>
               <a:defRPr sz="3450" b="1">
                 <a:solidFill>
                   <a:srgbClr val="102F43"/>
@@ -14077,6 +14859,7 @@
               </a:defRPr>
             </a:lvl3pPr>
             <a:lvl4pPr>
+              <a:buNone/>
               <a:defRPr sz="3450" b="1">
                 <a:solidFill>
                   <a:srgbClr val="102F43"/>
@@ -14087,6 +14870,7 @@
               </a:defRPr>
             </a:lvl4pPr>
             <a:lvl5pPr>
+              <a:buNone/>
               <a:defRPr sz="3450" b="1">
                 <a:solidFill>
                   <a:srgbClr val="102F43"/>
@@ -14097,6 +14881,7 @@
               </a:defRPr>
             </a:lvl5pPr>
             <a:lvl6pPr>
+              <a:buNone/>
               <a:defRPr sz="3450" b="1">
                 <a:solidFill>
                   <a:srgbClr val="102F43"/>
@@ -14107,6 +14892,7 @@
               </a:defRPr>
             </a:lvl6pPr>
             <a:lvl7pPr>
+              <a:buNone/>
               <a:defRPr sz="3450" b="1">
                 <a:solidFill>
                   <a:srgbClr val="102F43"/>
@@ -14117,6 +14903,7 @@
               </a:defRPr>
             </a:lvl7pPr>
             <a:lvl8pPr>
+              <a:buNone/>
               <a:defRPr sz="3450" b="1">
                 <a:solidFill>
                   <a:srgbClr val="102F43"/>
@@ -14127,6 +14914,7 @@
               </a:defRPr>
             </a:lvl8pPr>
             <a:lvl9pPr>
+              <a:buNone/>
               <a:defRPr sz="3450" b="1">
                 <a:solidFill>
                   <a:srgbClr val="102F43"/>
@@ -14139,6 +14927,7 @@
           </a:lstStyle>
           <a:p xmlns:a="http://schemas.openxmlformats.org/drawingml/2006/main">
             <a:pPr>
+              <a:buNone/>
               <a:defRPr sz="3450" b="1">
                 <a:solidFill>
                   <a:srgbClr val="102F43"/>
@@ -14203,6 +14992,7 @@
               </a:defRPr>
             </a:defPPr>
             <a:lvl1pPr>
+              <a:buNone/>
               <a:defRPr sz="1200" b="0">
                 <a:solidFill>
                   <a:srgbClr val="526B7C"/>
@@ -14213,6 +15003,7 @@
               </a:defRPr>
             </a:lvl1pPr>
             <a:lvl2pPr>
+              <a:buNone/>
               <a:defRPr sz="1200" b="0">
                 <a:solidFill>
                   <a:srgbClr val="526B7C"/>
@@ -14223,6 +15014,7 @@
               </a:defRPr>
             </a:lvl2pPr>
             <a:lvl3pPr>
+              <a:buNone/>
               <a:defRPr sz="1200" b="0">
                 <a:solidFill>
                   <a:srgbClr val="526B7C"/>
@@ -14233,6 +15025,7 @@
               </a:defRPr>
             </a:lvl3pPr>
             <a:lvl4pPr>
+              <a:buNone/>
               <a:defRPr sz="1200" b="0">
                 <a:solidFill>
                   <a:srgbClr val="526B7C"/>
@@ -14243,6 +15036,7 @@
               </a:defRPr>
             </a:lvl4pPr>
             <a:lvl5pPr>
+              <a:buNone/>
               <a:defRPr sz="1200" b="0">
                 <a:solidFill>
                   <a:srgbClr val="526B7C"/>
@@ -14253,6 +15047,7 @@
               </a:defRPr>
             </a:lvl5pPr>
             <a:lvl6pPr>
+              <a:buNone/>
               <a:defRPr sz="1200" b="0">
                 <a:solidFill>
                   <a:srgbClr val="526B7C"/>
@@ -14263,6 +15058,7 @@
               </a:defRPr>
             </a:lvl6pPr>
             <a:lvl7pPr>
+              <a:buNone/>
               <a:defRPr sz="1200" b="0">
                 <a:solidFill>
                   <a:srgbClr val="526B7C"/>
@@ -14273,6 +15069,7 @@
               </a:defRPr>
             </a:lvl7pPr>
             <a:lvl8pPr>
+              <a:buNone/>
               <a:defRPr sz="1200" b="0">
                 <a:solidFill>
                   <a:srgbClr val="526B7C"/>
@@ -14283,6 +15080,7 @@
               </a:defRPr>
             </a:lvl8pPr>
             <a:lvl9pPr>
+              <a:buNone/>
               <a:defRPr sz="1200" b="0">
                 <a:solidFill>
                   <a:srgbClr val="526B7C"/>
@@ -14295,6 +15093,7 @@
           </a:lstStyle>
           <a:p xmlns:a="http://schemas.openxmlformats.org/drawingml/2006/main">
             <a:pPr>
+              <a:buNone/>
               <a:defRPr sz="1200" b="0">
                 <a:solidFill>
                   <a:srgbClr val="526B7C"/>
@@ -14359,6 +15158,7 @@
               </a:defRPr>
             </a:defPPr>
             <a:lvl1pPr>
+              <a:buNone/>
               <a:defRPr sz="1200" b="0">
                 <a:solidFill>
                   <a:srgbClr val="526B7C"/>
@@ -14369,6 +15169,7 @@
               </a:defRPr>
             </a:lvl1pPr>
             <a:lvl2pPr>
+              <a:buNone/>
               <a:defRPr sz="1200" b="0">
                 <a:solidFill>
                   <a:srgbClr val="526B7C"/>
@@ -14379,6 +15180,7 @@
               </a:defRPr>
             </a:lvl2pPr>
             <a:lvl3pPr>
+              <a:buNone/>
               <a:defRPr sz="1200" b="0">
                 <a:solidFill>
                   <a:srgbClr val="526B7C"/>
@@ -14389,6 +15191,7 @@
               </a:defRPr>
             </a:lvl3pPr>
             <a:lvl4pPr>
+              <a:buNone/>
               <a:defRPr sz="1200" b="0">
                 <a:solidFill>
                   <a:srgbClr val="526B7C"/>
@@ -14399,6 +15202,7 @@
               </a:defRPr>
             </a:lvl4pPr>
             <a:lvl5pPr>
+              <a:buNone/>
               <a:defRPr sz="1200" b="0">
                 <a:solidFill>
                   <a:srgbClr val="526B7C"/>
@@ -14409,6 +15213,7 @@
               </a:defRPr>
             </a:lvl5pPr>
             <a:lvl6pPr>
+              <a:buNone/>
               <a:defRPr sz="1200" b="0">
                 <a:solidFill>
                   <a:srgbClr val="526B7C"/>
@@ -14419,6 +15224,7 @@
               </a:defRPr>
             </a:lvl6pPr>
             <a:lvl7pPr>
+              <a:buNone/>
               <a:defRPr sz="1200" b="0">
                 <a:solidFill>
                   <a:srgbClr val="526B7C"/>
@@ -14429,6 +15235,7 @@
               </a:defRPr>
             </a:lvl7pPr>
             <a:lvl8pPr>
+              <a:buNone/>
               <a:defRPr sz="1200" b="0">
                 <a:solidFill>
                   <a:srgbClr val="526B7C"/>
@@ -14439,6 +15246,7 @@
               </a:defRPr>
             </a:lvl8pPr>
             <a:lvl9pPr>
+              <a:buNone/>
               <a:defRPr sz="1200" b="0">
                 <a:solidFill>
                   <a:srgbClr val="526B7C"/>
@@ -14451,6 +15259,7 @@
           </a:lstStyle>
           <a:p xmlns:a="http://schemas.openxmlformats.org/drawingml/2006/main">
             <a:pPr>
+              <a:buNone/>
               <a:defRPr sz="1200" b="0">
                 <a:solidFill>
                   <a:srgbClr val="526B7C"/>
@@ -14515,6 +15324,7 @@
               </a:defRPr>
             </a:defPPr>
             <a:lvl1pPr>
+              <a:buNone/>
               <a:defRPr sz="2475" b="1">
                 <a:solidFill>
                   <a:srgbClr val="102F43"/>
@@ -14525,6 +15335,7 @@
               </a:defRPr>
             </a:lvl1pPr>
             <a:lvl2pPr>
+              <a:buNone/>
               <a:defRPr sz="2475" b="1">
                 <a:solidFill>
                   <a:srgbClr val="102F43"/>
@@ -14535,6 +15346,7 @@
               </a:defRPr>
             </a:lvl2pPr>
             <a:lvl3pPr>
+              <a:buNone/>
               <a:defRPr sz="2475" b="1">
                 <a:solidFill>
                   <a:srgbClr val="102F43"/>
@@ -14545,6 +15357,7 @@
               </a:defRPr>
             </a:lvl3pPr>
             <a:lvl4pPr>
+              <a:buNone/>
               <a:defRPr sz="2475" b="1">
                 <a:solidFill>
                   <a:srgbClr val="102F43"/>
@@ -14555,6 +15368,7 @@
               </a:defRPr>
             </a:lvl4pPr>
             <a:lvl5pPr>
+              <a:buNone/>
               <a:defRPr sz="2475" b="1">
                 <a:solidFill>
                   <a:srgbClr val="102F43"/>
@@ -14565,6 +15379,7 @@
               </a:defRPr>
             </a:lvl5pPr>
             <a:lvl6pPr>
+              <a:buNone/>
               <a:defRPr sz="2475" b="1">
                 <a:solidFill>
                   <a:srgbClr val="102F43"/>
@@ -14575,6 +15390,7 @@
               </a:defRPr>
             </a:lvl6pPr>
             <a:lvl7pPr>
+              <a:buNone/>
               <a:defRPr sz="2475" b="1">
                 <a:solidFill>
                   <a:srgbClr val="102F43"/>
@@ -14585,6 +15401,7 @@
               </a:defRPr>
             </a:lvl7pPr>
             <a:lvl8pPr>
+              <a:buNone/>
               <a:defRPr sz="2475" b="1">
                 <a:solidFill>
                   <a:srgbClr val="102F43"/>
@@ -14595,6 +15412,7 @@
               </a:defRPr>
             </a:lvl8pPr>
             <a:lvl9pPr>
+              <a:buNone/>
               <a:defRPr sz="2475" b="1">
                 <a:solidFill>
                   <a:srgbClr val="102F43"/>
@@ -14607,6 +15425,7 @@
           </a:lstStyle>
           <a:p xmlns:a="http://schemas.openxmlformats.org/drawingml/2006/main">
             <a:pPr>
+              <a:buNone/>
               <a:defRPr sz="2475" b="1">
                 <a:solidFill>
                   <a:srgbClr val="102F43"/>
@@ -14671,6 +15490,7 @@
               </a:defRPr>
             </a:defPPr>
             <a:lvl1pPr>
+              <a:buNone/>
               <a:defRPr sz="2175" b="1">
                 <a:solidFill>
                   <a:srgbClr val="102F43"/>
@@ -14681,6 +15501,7 @@
               </a:defRPr>
             </a:lvl1pPr>
             <a:lvl2pPr>
+              <a:buNone/>
               <a:defRPr sz="2175" b="1">
                 <a:solidFill>
                   <a:srgbClr val="102F43"/>
@@ -14691,6 +15512,7 @@
               </a:defRPr>
             </a:lvl2pPr>
             <a:lvl3pPr>
+              <a:buNone/>
               <a:defRPr sz="2175" b="1">
                 <a:solidFill>
                   <a:srgbClr val="102F43"/>
@@ -14701,6 +15523,7 @@
               </a:defRPr>
             </a:lvl3pPr>
             <a:lvl4pPr>
+              <a:buNone/>
               <a:defRPr sz="2175" b="1">
                 <a:solidFill>
                   <a:srgbClr val="102F43"/>
@@ -14711,6 +15534,7 @@
               </a:defRPr>
             </a:lvl4pPr>
             <a:lvl5pPr>
+              <a:buNone/>
               <a:defRPr sz="2175" b="1">
                 <a:solidFill>
                   <a:srgbClr val="102F43"/>
@@ -14721,6 +15545,7 @@
               </a:defRPr>
             </a:lvl5pPr>
             <a:lvl6pPr>
+              <a:buNone/>
               <a:defRPr sz="2175" b="1">
                 <a:solidFill>
                   <a:srgbClr val="102F43"/>
@@ -14731,6 +15556,7 @@
               </a:defRPr>
             </a:lvl6pPr>
             <a:lvl7pPr>
+              <a:buNone/>
               <a:defRPr sz="2175" b="1">
                 <a:solidFill>
                   <a:srgbClr val="102F43"/>
@@ -14741,6 +15567,7 @@
               </a:defRPr>
             </a:lvl7pPr>
             <a:lvl8pPr>
+              <a:buNone/>
               <a:defRPr sz="2175" b="1">
                 <a:solidFill>
                   <a:srgbClr val="102F43"/>
@@ -14751,6 +15578,7 @@
               </a:defRPr>
             </a:lvl8pPr>
             <a:lvl9pPr>
+              <a:buNone/>
               <a:defRPr sz="2175" b="1">
                 <a:solidFill>
                   <a:srgbClr val="102F43"/>
@@ -14763,6 +15591,7 @@
           </a:lstStyle>
           <a:p xmlns:a="http://schemas.openxmlformats.org/drawingml/2006/main">
             <a:pPr>
+              <a:buNone/>
               <a:defRPr sz="2175" b="1">
                 <a:solidFill>
                   <a:srgbClr val="102F43"/>
@@ -14827,6 +15656,7 @@
               </a:defRPr>
             </a:defPPr>
             <a:lvl1pPr>
+              <a:buNone/>
               <a:defRPr sz="1875" b="0">
                 <a:solidFill>
                   <a:srgbClr val="526B7C"/>
@@ -14837,6 +15667,7 @@
               </a:defRPr>
             </a:lvl1pPr>
             <a:lvl2pPr>
+              <a:buNone/>
               <a:defRPr sz="1875" b="0">
                 <a:solidFill>
                   <a:srgbClr val="526B7C"/>
@@ -14847,6 +15678,7 @@
               </a:defRPr>
             </a:lvl2pPr>
             <a:lvl3pPr>
+              <a:buNone/>
               <a:defRPr sz="1875" b="0">
                 <a:solidFill>
                   <a:srgbClr val="526B7C"/>
@@ -14857,6 +15689,7 @@
               </a:defRPr>
             </a:lvl3pPr>
             <a:lvl4pPr>
+              <a:buNone/>
               <a:defRPr sz="1875" b="0">
                 <a:solidFill>
                   <a:srgbClr val="526B7C"/>
@@ -14867,6 +15700,7 @@
               </a:defRPr>
             </a:lvl4pPr>
             <a:lvl5pPr>
+              <a:buNone/>
               <a:defRPr sz="1875" b="0">
                 <a:solidFill>
                   <a:srgbClr val="526B7C"/>
@@ -14877,6 +15711,7 @@
               </a:defRPr>
             </a:lvl5pPr>
             <a:lvl6pPr>
+              <a:buNone/>
               <a:defRPr sz="1875" b="0">
                 <a:solidFill>
                   <a:srgbClr val="526B7C"/>
@@ -14887,6 +15722,7 @@
               </a:defRPr>
             </a:lvl6pPr>
             <a:lvl7pPr>
+              <a:buNone/>
               <a:defRPr sz="1875" b="0">
                 <a:solidFill>
                   <a:srgbClr val="526B7C"/>
@@ -14897,6 +15733,7 @@
               </a:defRPr>
             </a:lvl7pPr>
             <a:lvl8pPr>
+              <a:buNone/>
               <a:defRPr sz="1875" b="0">
                 <a:solidFill>
                   <a:srgbClr val="526B7C"/>
@@ -14907,6 +15744,7 @@
               </a:defRPr>
             </a:lvl8pPr>
             <a:lvl9pPr>
+              <a:buNone/>
               <a:defRPr sz="1875" b="0">
                 <a:solidFill>
                   <a:srgbClr val="526B7C"/>
@@ -14919,6 +15757,7 @@
           </a:lstStyle>
           <a:p xmlns:a="http://schemas.openxmlformats.org/drawingml/2006/main">
             <a:pPr>
+              <a:buNone/>
               <a:defRPr sz="1875" b="0">
                 <a:solidFill>
                   <a:srgbClr val="526B7C"/>
@@ -14942,6 +15781,7 @@
           </a:p>
           <a:p xmlns:a="http://schemas.openxmlformats.org/drawingml/2006/main">
             <a:pPr>
+              <a:buNone/>
               <a:defRPr sz="1875" b="0">
                 <a:solidFill>
                   <a:srgbClr val="526B7C"/>
@@ -14965,6 +15805,7 @@
           </a:p>
           <a:p xmlns:a="http://schemas.openxmlformats.org/drawingml/2006/main">
             <a:pPr>
+              <a:buNone/>
               <a:defRPr sz="1875" b="0">
                 <a:solidFill>
                   <a:srgbClr val="526B7C"/>
@@ -14988,6 +15829,7 @@
           </a:p>
           <a:p xmlns:a="http://schemas.openxmlformats.org/drawingml/2006/main">
             <a:pPr>
+              <a:buNone/>
               <a:defRPr sz="1875" b="0">
                 <a:solidFill>
                   <a:srgbClr val="526B7C"/>
@@ -15052,6 +15894,7 @@
               </a:defRPr>
             </a:defPPr>
             <a:lvl1pPr>
+              <a:buNone/>
               <a:defRPr sz="2175" b="1">
                 <a:solidFill>
                   <a:srgbClr val="102F43"/>
@@ -15062,6 +15905,7 @@
               </a:defRPr>
             </a:lvl1pPr>
             <a:lvl2pPr>
+              <a:buNone/>
               <a:defRPr sz="2175" b="1">
                 <a:solidFill>
                   <a:srgbClr val="102F43"/>
@@ -15072,6 +15916,7 @@
               </a:defRPr>
             </a:lvl2pPr>
             <a:lvl3pPr>
+              <a:buNone/>
               <a:defRPr sz="2175" b="1">
                 <a:solidFill>
                   <a:srgbClr val="102F43"/>
@@ -15082,6 +15927,7 @@
               </a:defRPr>
             </a:lvl3pPr>
             <a:lvl4pPr>
+              <a:buNone/>
               <a:defRPr sz="2175" b="1">
                 <a:solidFill>
                   <a:srgbClr val="102F43"/>
@@ -15092,6 +15938,7 @@
               </a:defRPr>
             </a:lvl4pPr>
             <a:lvl5pPr>
+              <a:buNone/>
               <a:defRPr sz="2175" b="1">
                 <a:solidFill>
                   <a:srgbClr val="102F43"/>
@@ -15102,6 +15949,7 @@
               </a:defRPr>
             </a:lvl5pPr>
             <a:lvl6pPr>
+              <a:buNone/>
               <a:defRPr sz="2175" b="1">
                 <a:solidFill>
                   <a:srgbClr val="102F43"/>
@@ -15112,6 +15960,7 @@
               </a:defRPr>
             </a:lvl6pPr>
             <a:lvl7pPr>
+              <a:buNone/>
               <a:defRPr sz="2175" b="1">
                 <a:solidFill>
                   <a:srgbClr val="102F43"/>
@@ -15122,6 +15971,7 @@
               </a:defRPr>
             </a:lvl7pPr>
             <a:lvl8pPr>
+              <a:buNone/>
               <a:defRPr sz="2175" b="1">
                 <a:solidFill>
                   <a:srgbClr val="102F43"/>
@@ -15132,6 +15982,7 @@
               </a:defRPr>
             </a:lvl8pPr>
             <a:lvl9pPr>
+              <a:buNone/>
               <a:defRPr sz="2175" b="1">
                 <a:solidFill>
                   <a:srgbClr val="102F43"/>
@@ -15144,6 +15995,7 @@
           </a:lstStyle>
           <a:p xmlns:a="http://schemas.openxmlformats.org/drawingml/2006/main">
             <a:pPr>
+              <a:buNone/>
               <a:defRPr sz="2175" b="1">
                 <a:solidFill>
                   <a:srgbClr val="102F43"/>
@@ -15208,6 +16060,7 @@
               </a:defRPr>
             </a:defPPr>
             <a:lvl1pPr>
+              <a:buNone/>
               <a:defRPr sz="1875" b="0">
                 <a:solidFill>
                   <a:srgbClr val="526B7C"/>
@@ -15218,6 +16071,7 @@
               </a:defRPr>
             </a:lvl1pPr>
             <a:lvl2pPr>
+              <a:buNone/>
               <a:defRPr sz="1875" b="0">
                 <a:solidFill>
                   <a:srgbClr val="526B7C"/>
@@ -15228,6 +16082,7 @@
               </a:defRPr>
             </a:lvl2pPr>
             <a:lvl3pPr>
+              <a:buNone/>
               <a:defRPr sz="1875" b="0">
                 <a:solidFill>
                   <a:srgbClr val="526B7C"/>
@@ -15238,6 +16093,7 @@
               </a:defRPr>
             </a:lvl3pPr>
             <a:lvl4pPr>
+              <a:buNone/>
               <a:defRPr sz="1875" b="0">
                 <a:solidFill>
                   <a:srgbClr val="526B7C"/>
@@ -15248,6 +16104,7 @@
               </a:defRPr>
             </a:lvl4pPr>
             <a:lvl5pPr>
+              <a:buNone/>
               <a:defRPr sz="1875" b="0">
                 <a:solidFill>
                   <a:srgbClr val="526B7C"/>
@@ -15258,6 +16115,7 @@
               </a:defRPr>
             </a:lvl5pPr>
             <a:lvl6pPr>
+              <a:buNone/>
               <a:defRPr sz="1875" b="0">
                 <a:solidFill>
                   <a:srgbClr val="526B7C"/>
@@ -15268,6 +16126,7 @@
               </a:defRPr>
             </a:lvl6pPr>
             <a:lvl7pPr>
+              <a:buNone/>
               <a:defRPr sz="1875" b="0">
                 <a:solidFill>
                   <a:srgbClr val="526B7C"/>
@@ -15278,6 +16137,7 @@
               </a:defRPr>
             </a:lvl7pPr>
             <a:lvl8pPr>
+              <a:buNone/>
               <a:defRPr sz="1875" b="0">
                 <a:solidFill>
                   <a:srgbClr val="526B7C"/>
@@ -15288,6 +16148,7 @@
               </a:defRPr>
             </a:lvl8pPr>
             <a:lvl9pPr>
+              <a:buNone/>
               <a:defRPr sz="1875" b="0">
                 <a:solidFill>
                   <a:srgbClr val="526B7C"/>
@@ -15300,6 +16161,7 @@
           </a:lstStyle>
           <a:p xmlns:a="http://schemas.openxmlformats.org/drawingml/2006/main">
             <a:pPr>
+              <a:buNone/>
               <a:defRPr sz="1875" b="0">
                 <a:solidFill>
                   <a:srgbClr val="526B7C"/>
@@ -15323,6 +16185,7 @@
           </a:p>
           <a:p xmlns:a="http://schemas.openxmlformats.org/drawingml/2006/main">
             <a:pPr>
+              <a:buNone/>
               <a:defRPr sz="1875" b="0">
                 <a:solidFill>
                   <a:srgbClr val="526B7C"/>
@@ -15346,6 +16209,7 @@
           </a:p>
           <a:p xmlns:a="http://schemas.openxmlformats.org/drawingml/2006/main">
             <a:pPr>
+              <a:buNone/>
               <a:defRPr sz="1875" b="0">
                 <a:solidFill>
                   <a:srgbClr val="526B7C"/>
@@ -15369,6 +16233,7 @@
           </a:p>
           <a:p xmlns:a="http://schemas.openxmlformats.org/drawingml/2006/main">
             <a:pPr>
+              <a:buNone/>
               <a:defRPr sz="1875" b="0">
                 <a:solidFill>
                   <a:srgbClr val="526B7C"/>
@@ -15433,6 +16298,7 @@
               </a:defRPr>
             </a:defPPr>
             <a:lvl1pPr>
+              <a:buNone/>
               <a:defRPr sz="2025" b="1">
                 <a:solidFill>
                   <a:srgbClr val="00A9D6"/>
@@ -15443,6 +16309,7 @@
               </a:defRPr>
             </a:lvl1pPr>
             <a:lvl2pPr>
+              <a:buNone/>
               <a:defRPr sz="2025" b="1">
                 <a:solidFill>
                   <a:srgbClr val="00A9D6"/>
@@ -15453,6 +16320,7 @@
               </a:defRPr>
             </a:lvl2pPr>
             <a:lvl3pPr>
+              <a:buNone/>
               <a:defRPr sz="2025" b="1">
                 <a:solidFill>
                   <a:srgbClr val="00A9D6"/>
@@ -15463,6 +16331,7 @@
               </a:defRPr>
             </a:lvl3pPr>
             <a:lvl4pPr>
+              <a:buNone/>
               <a:defRPr sz="2025" b="1">
                 <a:solidFill>
                   <a:srgbClr val="00A9D6"/>
@@ -15473,6 +16342,7 @@
               </a:defRPr>
             </a:lvl4pPr>
             <a:lvl5pPr>
+              <a:buNone/>
               <a:defRPr sz="2025" b="1">
                 <a:solidFill>
                   <a:srgbClr val="00A9D6"/>
@@ -15483,6 +16353,7 @@
               </a:defRPr>
             </a:lvl5pPr>
             <a:lvl6pPr>
+              <a:buNone/>
               <a:defRPr sz="2025" b="1">
                 <a:solidFill>
                   <a:srgbClr val="00A9D6"/>
@@ -15493,6 +16364,7 @@
               </a:defRPr>
             </a:lvl6pPr>
             <a:lvl7pPr>
+              <a:buNone/>
               <a:defRPr sz="2025" b="1">
                 <a:solidFill>
                   <a:srgbClr val="00A9D6"/>
@@ -15503,6 +16375,7 @@
               </a:defRPr>
             </a:lvl7pPr>
             <a:lvl8pPr>
+              <a:buNone/>
               <a:defRPr sz="2025" b="1">
                 <a:solidFill>
                   <a:srgbClr val="00A9D6"/>
@@ -15513,6 +16386,7 @@
               </a:defRPr>
             </a:lvl8pPr>
             <a:lvl9pPr>
+              <a:buNone/>
               <a:defRPr sz="2025" b="1">
                 <a:solidFill>
                   <a:srgbClr val="00A9D6"/>
@@ -15525,6 +16399,7 @@
           </a:lstStyle>
           <a:p xmlns:a="http://schemas.openxmlformats.org/drawingml/2006/main">
             <a:pPr>
+              <a:buNone/>
               <a:defRPr sz="2025" b="1">
                 <a:solidFill>
                   <a:srgbClr val="00A9D6"/>
@@ -15589,6 +16464,7 @@
               </a:defRPr>
             </a:defPPr>
             <a:lvl1pPr>
+              <a:buNone/>
               <a:defRPr sz="2100" b="0">
                 <a:solidFill>
                   <a:srgbClr val="102F43"/>
@@ -15599,6 +16475,7 @@
               </a:defRPr>
             </a:lvl1pPr>
             <a:lvl2pPr>
+              <a:buNone/>
               <a:defRPr sz="2100" b="0">
                 <a:solidFill>
                   <a:srgbClr val="102F43"/>
@@ -15609,6 +16486,7 @@
               </a:defRPr>
             </a:lvl2pPr>
             <a:lvl3pPr>
+              <a:buNone/>
               <a:defRPr sz="2100" b="0">
                 <a:solidFill>
                   <a:srgbClr val="102F43"/>
@@ -15619,6 +16497,7 @@
               </a:defRPr>
             </a:lvl3pPr>
             <a:lvl4pPr>
+              <a:buNone/>
               <a:defRPr sz="2100" b="0">
                 <a:solidFill>
                   <a:srgbClr val="102F43"/>
@@ -15629,6 +16508,7 @@
               </a:defRPr>
             </a:lvl4pPr>
             <a:lvl5pPr>
+              <a:buNone/>
               <a:defRPr sz="2100" b="0">
                 <a:solidFill>
                   <a:srgbClr val="102F43"/>
@@ -15639,6 +16519,7 @@
               </a:defRPr>
             </a:lvl5pPr>
             <a:lvl6pPr>
+              <a:buNone/>
               <a:defRPr sz="2100" b="0">
                 <a:solidFill>
                   <a:srgbClr val="102F43"/>
@@ -15649,6 +16530,7 @@
               </a:defRPr>
             </a:lvl6pPr>
             <a:lvl7pPr>
+              <a:buNone/>
               <a:defRPr sz="2100" b="0">
                 <a:solidFill>
                   <a:srgbClr val="102F43"/>
@@ -15659,6 +16541,7 @@
               </a:defRPr>
             </a:lvl7pPr>
             <a:lvl8pPr>
+              <a:buNone/>
               <a:defRPr sz="2100" b="0">
                 <a:solidFill>
                   <a:srgbClr val="102F43"/>
@@ -15669,6 +16552,7 @@
               </a:defRPr>
             </a:lvl8pPr>
             <a:lvl9pPr>
+              <a:buNone/>
               <a:defRPr sz="2100" b="0">
                 <a:solidFill>
                   <a:srgbClr val="102F43"/>
@@ -15681,6 +16565,7 @@
           </a:lstStyle>
           <a:p xmlns:a="http://schemas.openxmlformats.org/drawingml/2006/main">
             <a:pPr>
+              <a:buNone/>
               <a:defRPr sz="2100" b="0">
                 <a:solidFill>
                   <a:srgbClr val="102F43"/>
@@ -15704,6 +16589,7 @@
           </a:p>
           <a:p xmlns:a="http://schemas.openxmlformats.org/drawingml/2006/main">
             <a:pPr>
+              <a:buNone/>
               <a:defRPr sz="2100" b="0">
                 <a:solidFill>
                   <a:srgbClr val="102F43"/>
@@ -15768,6 +16654,7 @@
               </a:defRPr>
             </a:defPPr>
             <a:lvl1pPr>
+              <a:buNone/>
               <a:defRPr sz="1650" b="1">
                 <a:solidFill>
                   <a:srgbClr val="00A9D6"/>
@@ -15778,6 +16665,7 @@
               </a:defRPr>
             </a:lvl1pPr>
             <a:lvl2pPr>
+              <a:buNone/>
               <a:defRPr sz="1650" b="1">
                 <a:solidFill>
                   <a:srgbClr val="00A9D6"/>
@@ -15788,6 +16676,7 @@
               </a:defRPr>
             </a:lvl2pPr>
             <a:lvl3pPr>
+              <a:buNone/>
               <a:defRPr sz="1650" b="1">
                 <a:solidFill>
                   <a:srgbClr val="00A9D6"/>
@@ -15798,6 +16687,7 @@
               </a:defRPr>
             </a:lvl3pPr>
             <a:lvl4pPr>
+              <a:buNone/>
               <a:defRPr sz="1650" b="1">
                 <a:solidFill>
                   <a:srgbClr val="00A9D6"/>
@@ -15808,6 +16698,7 @@
               </a:defRPr>
             </a:lvl4pPr>
             <a:lvl5pPr>
+              <a:buNone/>
               <a:defRPr sz="1650" b="1">
                 <a:solidFill>
                   <a:srgbClr val="00A9D6"/>
@@ -15818,6 +16709,7 @@
               </a:defRPr>
             </a:lvl5pPr>
             <a:lvl6pPr>
+              <a:buNone/>
               <a:defRPr sz="1650" b="1">
                 <a:solidFill>
                   <a:srgbClr val="00A9D6"/>
@@ -15828,6 +16720,7 @@
               </a:defRPr>
             </a:lvl6pPr>
             <a:lvl7pPr>
+              <a:buNone/>
               <a:defRPr sz="1650" b="1">
                 <a:solidFill>
                   <a:srgbClr val="00A9D6"/>
@@ -15838,6 +16731,7 @@
               </a:defRPr>
             </a:lvl7pPr>
             <a:lvl8pPr>
+              <a:buNone/>
               <a:defRPr sz="1650" b="1">
                 <a:solidFill>
                   <a:srgbClr val="00A9D6"/>
@@ -15848,6 +16742,7 @@
               </a:defRPr>
             </a:lvl8pPr>
             <a:lvl9pPr>
+              <a:buNone/>
               <a:defRPr sz="1650" b="1">
                 <a:solidFill>
                   <a:srgbClr val="00A9D6"/>
@@ -15860,6 +16755,7 @@
           </a:lstStyle>
           <a:p xmlns:a="http://schemas.openxmlformats.org/drawingml/2006/main">
             <a:pPr>
+              <a:buNone/>
               <a:defRPr sz="1650" b="1">
                 <a:solidFill>
                   <a:srgbClr val="00A9D6"/>
@@ -15877,7 +16773,7 @@
                 <a:latin typeface="Helvetica Neue"/>
                 <a:ea typeface="Helvetica Neue"/>
                 <a:cs typeface="Helvetica Neue"/>
-                <a:hlinkClick xmlns:r="http://schemas.openxmlformats.org/officeDocument/2006/relationships" r:id="Rcd76a8b6df2748c8"/>
+                <a:hlinkClick xmlns:r="http://schemas.openxmlformats.org/officeDocument/2006/relationships" r:id="R232dd6fd99ad4df7"/>
               </a:rPr>
               <a:t>Live support prototype</a:t>
             </a:r>
@@ -15925,6 +16821,173 @@
               </a:defRPr>
             </a:defPPr>
             <a:lvl1pPr>
+              <a:buNone/>
+              <a:defRPr sz="1650" b="1">
+                <a:solidFill>
+                  <a:srgbClr val="00A9D6"/>
+                </a:solidFill>
+                <a:latin typeface="Helvetica Neue"/>
+                <a:ea typeface="Helvetica Neue"/>
+                <a:cs typeface="Helvetica Neue"/>
+              </a:defRPr>
+            </a:lvl1pPr>
+            <a:lvl2pPr>
+              <a:buNone/>
+              <a:defRPr sz="1650" b="1">
+                <a:solidFill>
+                  <a:srgbClr val="00A9D6"/>
+                </a:solidFill>
+                <a:latin typeface="Helvetica Neue"/>
+                <a:ea typeface="Helvetica Neue"/>
+                <a:cs typeface="Helvetica Neue"/>
+              </a:defRPr>
+            </a:lvl2pPr>
+            <a:lvl3pPr>
+              <a:buNone/>
+              <a:defRPr sz="1650" b="1">
+                <a:solidFill>
+                  <a:srgbClr val="00A9D6"/>
+                </a:solidFill>
+                <a:latin typeface="Helvetica Neue"/>
+                <a:ea typeface="Helvetica Neue"/>
+                <a:cs typeface="Helvetica Neue"/>
+              </a:defRPr>
+            </a:lvl3pPr>
+            <a:lvl4pPr>
+              <a:buNone/>
+              <a:defRPr sz="1650" b="1">
+                <a:solidFill>
+                  <a:srgbClr val="00A9D6"/>
+                </a:solidFill>
+                <a:latin typeface="Helvetica Neue"/>
+                <a:ea typeface="Helvetica Neue"/>
+                <a:cs typeface="Helvetica Neue"/>
+              </a:defRPr>
+            </a:lvl4pPr>
+            <a:lvl5pPr>
+              <a:buNone/>
+              <a:defRPr sz="1650" b="1">
+                <a:solidFill>
+                  <a:srgbClr val="00A9D6"/>
+                </a:solidFill>
+                <a:latin typeface="Helvetica Neue"/>
+                <a:ea typeface="Helvetica Neue"/>
+                <a:cs typeface="Helvetica Neue"/>
+              </a:defRPr>
+            </a:lvl5pPr>
+            <a:lvl6pPr>
+              <a:buNone/>
+              <a:defRPr sz="1650" b="1">
+                <a:solidFill>
+                  <a:srgbClr val="00A9D6"/>
+                </a:solidFill>
+                <a:latin typeface="Helvetica Neue"/>
+                <a:ea typeface="Helvetica Neue"/>
+                <a:cs typeface="Helvetica Neue"/>
+              </a:defRPr>
+            </a:lvl6pPr>
+            <a:lvl7pPr>
+              <a:buNone/>
+              <a:defRPr sz="1650" b="1">
+                <a:solidFill>
+                  <a:srgbClr val="00A9D6"/>
+                </a:solidFill>
+                <a:latin typeface="Helvetica Neue"/>
+                <a:ea typeface="Helvetica Neue"/>
+                <a:cs typeface="Helvetica Neue"/>
+              </a:defRPr>
+            </a:lvl7pPr>
+            <a:lvl8pPr>
+              <a:buNone/>
+              <a:defRPr sz="1650" b="1">
+                <a:solidFill>
+                  <a:srgbClr val="00A9D6"/>
+                </a:solidFill>
+                <a:latin typeface="Helvetica Neue"/>
+                <a:ea typeface="Helvetica Neue"/>
+                <a:cs typeface="Helvetica Neue"/>
+              </a:defRPr>
+            </a:lvl8pPr>
+            <a:lvl9pPr>
+              <a:buNone/>
+              <a:defRPr sz="1650" b="1">
+                <a:solidFill>
+                  <a:srgbClr val="00A9D6"/>
+                </a:solidFill>
+                <a:latin typeface="Helvetica Neue"/>
+                <a:ea typeface="Helvetica Neue"/>
+                <a:cs typeface="Helvetica Neue"/>
+              </a:defRPr>
+            </a:lvl9pPr>
+          </a:lstStyle>
+          <a:p xmlns:a="http://schemas.openxmlformats.org/drawingml/2006/main">
+            <a:pPr>
+              <a:buNone/>
+              <a:defRPr sz="1650" b="1">
+                <a:solidFill>
+                  <a:srgbClr val="00A9D6"/>
+                </a:solidFill>
+                <a:latin typeface="Helvetica Neue"/>
+                <a:ea typeface="Helvetica Neue"/>
+                <a:cs typeface="Helvetica Neue"/>
+              </a:defRPr>
+            </a:pPr>
+            <a:r>
+              <a:rPr u="sng">
+                <a:solidFill>
+                  <a:srgbClr val="00A9D6"/>
+                </a:solidFill>
+                <a:latin typeface="Helvetica Neue"/>
+                <a:ea typeface="Helvetica Neue"/>
+                <a:cs typeface="Helvetica Neue"/>
+                <a:hlinkClick xmlns:r="http://schemas.openxmlformats.org/officeDocument/2006/relationships" r:id="Refaec4219c5a4437"/>
+              </a:rPr>
+              <a:t>Source and architecture</a:t>
+            </a:r>
+          </a:p>
+        </p:txBody>
+      </p:sp>
+      <p:sp>
+        <p:nvSpPr>
+          <p:cNvPr id="14" name="">
+            <a:extLst xmlns:a="http://schemas.openxmlformats.org/drawingml/2006/main">
+              <a:ext uri="{FF2B5EF4-FFF2-40B4-BE49-F238E27FC236}">
+                <a16:creationId xmlns:a16="http://schemas.microsoft.com/office/drawing/2014/main" id="{DA5D0922-C24D-4B60-80A4-81F73284E70A}"/>
+              </a:ext>
+            </a:extLst>
+          </p:cNvPr>
+          <p:cNvSpPr>
+            <a:spLocks xmlns:a="http://schemas.openxmlformats.org/drawingml/2006/main" noGrp="1"/>
+          </p:cNvSpPr>
+          <p:nvPr/>
+        </p:nvSpPr>
+        <p:spPr>
+          <a:xfrm xmlns:a="http://schemas.openxmlformats.org/drawingml/2006/main">
+            <a:off x="9620250" y="6057900"/>
+            <a:ext cx="2000250" cy="333375"/>
+          </a:xfrm>
+          <a:prstGeom xmlns:a="http://schemas.openxmlformats.org/drawingml/2006/main" prst="rect">
+            <a:avLst/>
+          </a:prstGeom>
+          <a:noFill xmlns:a="http://schemas.openxmlformats.org/drawingml/2006/main"/>
+          <a:ln xmlns:a="http://schemas.openxmlformats.org/drawingml/2006/main" w="0">
+            <a:noFill/>
+          </a:ln>
+        </p:spPr>
+        <p:txBody>
+          <a:bodyPr xmlns:a="http://schemas.openxmlformats.org/drawingml/2006/main" lIns="0" tIns="0" rIns="0" bIns="0"/>
+          <a:lstStyle xmlns:a="http://schemas.openxmlformats.org/drawingml/2006/main">
+            <a:defPPr>
+              <a:defRPr sz="1650" b="1">
+                <a:solidFill>
+                  <a:srgbClr val="00A9D6"/>
+                </a:solidFill>
+                <a:latin typeface="Helvetica Neue"/>
+                <a:ea typeface="Helvetica Neue"/>
+                <a:cs typeface="Helvetica Neue"/>
+              </a:defRPr>
+            </a:defPPr>
+            <a:lvl1pPr>
               <a:defRPr sz="1650" b="1">
                 <a:solidFill>
                   <a:srgbClr val="00A9D6"/>
@@ -16034,9 +17097,9 @@
                 <a:latin typeface="Helvetica Neue"/>
                 <a:ea typeface="Helvetica Neue"/>
                 <a:cs typeface="Helvetica Neue"/>
-                <a:hlinkClick xmlns:r="http://schemas.openxmlformats.org/officeDocument/2006/relationships" r:id="Ra0a3026e48274e82"/>
+                <a:hlinkClick xmlns:r="http://schemas.openxmlformats.org/officeDocument/2006/relationships" r:id="R9e50152ccb2544dd"/>
               </a:rPr>
-              <a:t>Source and architecture</a:t>
+              <a:t>Demo (3:17)</a:t>
             </a:r>
           </a:p>
         </p:txBody>
